--- a/Week_7/Angular.pptx
+++ b/Week_7/Angular.pptx
@@ -6,9 +6,17 @@
   </p:sldMasterIdLst>
   <p:sldIdLst>
     <p:sldId id="256" r:id="rId2"/>
-    <p:sldId id="263" r:id="rId3"/>
-    <p:sldId id="264" r:id="rId4"/>
-    <p:sldId id="262" r:id="rId5"/>
+    <p:sldId id="346" r:id="rId3"/>
+    <p:sldId id="263" r:id="rId4"/>
+    <p:sldId id="264" r:id="rId5"/>
+    <p:sldId id="347" r:id="rId6"/>
+    <p:sldId id="348" r:id="rId7"/>
+    <p:sldId id="349" r:id="rId8"/>
+    <p:sldId id="350" r:id="rId9"/>
+    <p:sldId id="351" r:id="rId10"/>
+    <p:sldId id="352" r:id="rId11"/>
+    <p:sldId id="353" r:id="rId12"/>
+    <p:sldId id="262" r:id="rId13"/>
   </p:sldIdLst>
   <p:sldSz cx="12192000" cy="6858000"/>
   <p:notesSz cx="6858000" cy="9144000"/>
@@ -375,7 +383,7 @@
             <a:fld id="{B61BEF0D-F0BB-DE4B-95CE-6DB70DBA9567}" type="datetimeFigureOut">
               <a:rPr lang="en-US" dirty="0"/>
               <a:pPr/>
-              <a:t>10/5/2026</a:t>
+              <a:t>10/6/2026</a:t>
             </a:fld>
             <a:endParaRPr lang="en-US" dirty="0"/>
           </a:p>
@@ -637,7 +645,7 @@
             <a:fld id="{B61BEF0D-F0BB-DE4B-95CE-6DB70DBA9567}" type="datetimeFigureOut">
               <a:rPr lang="en-US" dirty="0"/>
               <a:pPr/>
-              <a:t>10/5/2026</a:t>
+              <a:t>10/6/2026</a:t>
             </a:fld>
             <a:endParaRPr lang="en-US" dirty="0"/>
           </a:p>
@@ -872,7 +880,7 @@
             <a:fld id="{B61BEF0D-F0BB-DE4B-95CE-6DB70DBA9567}" type="datetimeFigureOut">
               <a:rPr lang="en-US" dirty="0"/>
               <a:pPr/>
-              <a:t>10/5/2026</a:t>
+              <a:t>10/6/2026</a:t>
             </a:fld>
             <a:endParaRPr lang="en-US" dirty="0"/>
           </a:p>
@@ -1112,7 +1120,7 @@
             <a:fld id="{B61BEF0D-F0BB-DE4B-95CE-6DB70DBA9567}" type="datetimeFigureOut">
               <a:rPr lang="en-US" dirty="0"/>
               <a:pPr/>
-              <a:t>10/5/2026</a:t>
+              <a:t>10/6/2026</a:t>
             </a:fld>
             <a:endParaRPr lang="en-US" dirty="0"/>
           </a:p>
@@ -1420,7 +1428,7 @@
             <a:fld id="{B61BEF0D-F0BB-DE4B-95CE-6DB70DBA9567}" type="datetimeFigureOut">
               <a:rPr lang="en-US" dirty="0"/>
               <a:pPr/>
-              <a:t>10/5/2026</a:t>
+              <a:t>10/6/2026</a:t>
             </a:fld>
             <a:endParaRPr lang="en-US" dirty="0"/>
           </a:p>
@@ -1721,7 +1729,7 @@
             <a:fld id="{B61BEF0D-F0BB-DE4B-95CE-6DB70DBA9567}" type="datetimeFigureOut">
               <a:rPr lang="en-US" dirty="0"/>
               <a:pPr/>
-              <a:t>10/5/2026</a:t>
+              <a:t>10/6/2026</a:t>
             </a:fld>
             <a:endParaRPr lang="en-US" dirty="0"/>
           </a:p>
@@ -2142,7 +2150,7 @@
             <a:fld id="{B61BEF0D-F0BB-DE4B-95CE-6DB70DBA9567}" type="datetimeFigureOut">
               <a:rPr lang="en-US" dirty="0"/>
               <a:pPr/>
-              <a:t>10/5/2026</a:t>
+              <a:t>10/6/2026</a:t>
             </a:fld>
             <a:endParaRPr lang="en-US" dirty="0"/>
           </a:p>
@@ -2305,7 +2313,7 @@
             <a:fld id="{B61BEF0D-F0BB-DE4B-95CE-6DB70DBA9567}" type="datetimeFigureOut">
               <a:rPr lang="en-US" dirty="0"/>
               <a:pPr/>
-              <a:t>10/5/2026</a:t>
+              <a:t>10/6/2026</a:t>
             </a:fld>
             <a:endParaRPr lang="en-US" dirty="0"/>
           </a:p>
@@ -2402,7 +2410,7 @@
             <a:fld id="{B61BEF0D-F0BB-DE4B-95CE-6DB70DBA9567}" type="datetimeFigureOut">
               <a:rPr lang="en-US" dirty="0"/>
               <a:pPr/>
-              <a:t>10/5/2026</a:t>
+              <a:t>10/6/2026</a:t>
             </a:fld>
             <a:endParaRPr lang="en-US" dirty="0"/>
           </a:p>
@@ -2780,7 +2788,7 @@
             <a:fld id="{B61BEF0D-F0BB-DE4B-95CE-6DB70DBA9567}" type="datetimeFigureOut">
               <a:rPr lang="en-US" dirty="0"/>
               <a:pPr/>
-              <a:t>10/5/2026</a:t>
+              <a:t>10/6/2026</a:t>
             </a:fld>
             <a:endParaRPr lang="en-US" dirty="0"/>
           </a:p>
@@ -3066,7 +3074,7 @@
             <a:fld id="{B61BEF0D-F0BB-DE4B-95CE-6DB70DBA9567}" type="datetimeFigureOut">
               <a:rPr lang="en-US" dirty="0"/>
               <a:pPr/>
-              <a:t>10/5/2026</a:t>
+              <a:t>10/6/2026</a:t>
             </a:fld>
             <a:endParaRPr lang="en-US" dirty="0"/>
           </a:p>
@@ -3305,7 +3313,7 @@
             <a:fld id="{B61BEF0D-F0BB-DE4B-95CE-6DB70DBA9567}" type="datetimeFigureOut">
               <a:rPr lang="en-US" dirty="0"/>
               <a:pPr/>
-              <a:t>10/5/2026</a:t>
+              <a:t>10/6/2026</a:t>
             </a:fld>
             <a:endParaRPr lang="en-US" dirty="0"/>
           </a:p>
@@ -3963,6 +3971,1364 @@
 </p:sld>
 </file>
 
+<file path=ppt/slides/slide10.xml><?xml version="1.0" encoding="utf-8"?>
+<p:sld xmlns:a="http://schemas.openxmlformats.org/drawingml/2006/main" xmlns:r="http://schemas.openxmlformats.org/officeDocument/2006/relationships" xmlns:p="http://schemas.openxmlformats.org/presentationml/2006/main">
+  <p:cSld>
+    <p:spTree>
+      <p:nvGrpSpPr>
+        <p:cNvPr id="1" name=""/>
+        <p:cNvGrpSpPr/>
+        <p:nvPr/>
+      </p:nvGrpSpPr>
+      <p:grpSpPr>
+        <a:xfrm>
+          <a:off x="0" y="0"/>
+          <a:ext cx="0" cy="0"/>
+          <a:chOff x="0" y="0"/>
+          <a:chExt cx="0" cy="0"/>
+        </a:xfrm>
+      </p:grpSpPr>
+      <p:sp>
+        <p:nvSpPr>
+          <p:cNvPr id="2" name="Title 1">
+            <a:extLst>
+              <a:ext uri="{FF2B5EF4-FFF2-40B4-BE49-F238E27FC236}">
+                <a16:creationId xmlns:a16="http://schemas.microsoft.com/office/drawing/2014/main" id="{EB864EE9-0B13-5029-2811-088A0D6F7E56}"/>
+              </a:ext>
+            </a:extLst>
+          </p:cNvPr>
+          <p:cNvSpPr>
+            <a:spLocks noGrp="1"/>
+          </p:cNvSpPr>
+          <p:nvPr>
+            <p:ph type="title"/>
+          </p:nvPr>
+        </p:nvSpPr>
+        <p:spPr/>
+        <p:txBody>
+          <a:bodyPr/>
+          <a:lstStyle/>
+          <a:p>
+            <a:r>
+              <a:rPr lang="en-US" dirty="0"/>
+              <a:t>Angular Control flow</a:t>
+            </a:r>
+          </a:p>
+        </p:txBody>
+      </p:sp>
+      <p:sp>
+        <p:nvSpPr>
+          <p:cNvPr id="5" name="TextBox 4">
+            <a:extLst>
+              <a:ext uri="{FF2B5EF4-FFF2-40B4-BE49-F238E27FC236}">
+                <a16:creationId xmlns:a16="http://schemas.microsoft.com/office/drawing/2014/main" id="{36C967E8-7177-0710-E314-884EA6C833F4}"/>
+              </a:ext>
+            </a:extLst>
+          </p:cNvPr>
+          <p:cNvSpPr txBox="1"/>
+          <p:nvPr/>
+        </p:nvSpPr>
+        <p:spPr>
+          <a:xfrm>
+            <a:off x="581192" y="2150332"/>
+            <a:ext cx="6097772" cy="4247317"/>
+          </a:xfrm>
+          <a:prstGeom prst="rect">
+            <a:avLst/>
+          </a:prstGeom>
+          <a:noFill/>
+        </p:spPr>
+        <p:txBody>
+          <a:bodyPr wrap="square">
+            <a:spAutoFit/>
+          </a:bodyPr>
+          <a:lstStyle/>
+          <a:p>
+            <a:pPr indent="0" algn="l">
+              <a:buNone/>
+            </a:pPr>
+            <a:r>
+              <a:rPr lang="en-US" b="1" i="0" dirty="0">
+                <a:solidFill>
+                  <a:schemeClr val="tx1"/>
+                </a:solidFill>
+                <a:effectLst/>
+                <a:latin typeface="+mn-lt"/>
+              </a:rPr>
+              <a:t>1. @if — conditional rendering</a:t>
+            </a:r>
+          </a:p>
+          <a:p>
+            <a:pPr indent="0" algn="l">
+              <a:buNone/>
+            </a:pPr>
+            <a:r>
+              <a:rPr lang="en-US" sz="1800" b="0" i="0" dirty="0">
+                <a:solidFill>
+                  <a:schemeClr val="tx1"/>
+                </a:solidFill>
+                <a:effectLst/>
+                <a:latin typeface="+mn-lt"/>
+              </a:rPr>
+              <a:t>@if (</a:t>
+            </a:r>
+            <a:r>
+              <a:rPr lang="en-US" sz="1800" b="0" i="0" dirty="0" err="1">
+                <a:solidFill>
+                  <a:schemeClr val="tx1"/>
+                </a:solidFill>
+                <a:effectLst/>
+                <a:latin typeface="+mn-lt"/>
+              </a:rPr>
+              <a:t>isLoggedIn</a:t>
+            </a:r>
+            <a:r>
+              <a:rPr lang="en-US" sz="1800" b="0" i="0" dirty="0">
+                <a:solidFill>
+                  <a:schemeClr val="tx1"/>
+                </a:solidFill>
+                <a:effectLst/>
+                <a:latin typeface="+mn-lt"/>
+              </a:rPr>
+              <a:t>) {</a:t>
+            </a:r>
+          </a:p>
+          <a:p>
+            <a:pPr indent="0" algn="l">
+              <a:buNone/>
+            </a:pPr>
+            <a:r>
+              <a:rPr lang="en-US" sz="1800" b="0" i="0" dirty="0">
+                <a:solidFill>
+                  <a:schemeClr val="tx1"/>
+                </a:solidFill>
+                <a:effectLst/>
+                <a:latin typeface="+mn-lt"/>
+              </a:rPr>
+              <a:t>  &lt;p&gt;Welcome!&lt;/p&gt;</a:t>
+            </a:r>
+          </a:p>
+          <a:p>
+            <a:pPr indent="0" algn="l">
+              <a:buNone/>
+            </a:pPr>
+            <a:r>
+              <a:rPr lang="en-US" sz="1800" b="0" i="0" dirty="0">
+                <a:solidFill>
+                  <a:schemeClr val="tx1"/>
+                </a:solidFill>
+                <a:effectLst/>
+                <a:latin typeface="+mn-lt"/>
+              </a:rPr>
+              <a:t>} @else {</a:t>
+            </a:r>
+          </a:p>
+          <a:p>
+            <a:pPr indent="0" algn="l">
+              <a:buNone/>
+            </a:pPr>
+            <a:r>
+              <a:rPr lang="en-US" sz="1800" b="0" i="0" dirty="0">
+                <a:solidFill>
+                  <a:schemeClr val="tx1"/>
+                </a:solidFill>
+                <a:effectLst/>
+                <a:latin typeface="+mn-lt"/>
+              </a:rPr>
+              <a:t>  &lt;p&gt;Please log in.&lt;/p&gt;</a:t>
+            </a:r>
+          </a:p>
+          <a:p>
+            <a:pPr indent="0" algn="l">
+              <a:buNone/>
+            </a:pPr>
+            <a:r>
+              <a:rPr lang="en-US" sz="1800" b="0" i="0" dirty="0">
+                <a:solidFill>
+                  <a:schemeClr val="tx1"/>
+                </a:solidFill>
+                <a:effectLst/>
+                <a:latin typeface="+mn-lt"/>
+              </a:rPr>
+              <a:t>}</a:t>
+            </a:r>
+          </a:p>
+          <a:p>
+            <a:pPr indent="0" algn="l">
+              <a:buNone/>
+            </a:pPr>
+            <a:endParaRPr lang="en-US" dirty="0"/>
+          </a:p>
+          <a:p>
+            <a:pPr indent="0" algn="l">
+              <a:buNone/>
+            </a:pPr>
+            <a:r>
+              <a:rPr lang="en-US" sz="1800" b="1" i="0" dirty="0">
+                <a:solidFill>
+                  <a:schemeClr val="tx1"/>
+                </a:solidFill>
+                <a:effectLst/>
+                <a:latin typeface="+mn-lt"/>
+              </a:rPr>
+              <a:t>if / else if / else</a:t>
+            </a:r>
+            <a:endParaRPr lang="en-US" sz="1800" b="0" i="0" dirty="0">
+              <a:solidFill>
+                <a:schemeClr val="tx1"/>
+              </a:solidFill>
+              <a:effectLst/>
+              <a:latin typeface="+mn-lt"/>
+            </a:endParaRPr>
+          </a:p>
+          <a:p>
+            <a:pPr indent="0" algn="l">
+              <a:buNone/>
+            </a:pPr>
+            <a:r>
+              <a:rPr lang="en-US" sz="1800" b="0" i="0" dirty="0">
+                <a:solidFill>
+                  <a:schemeClr val="tx1"/>
+                </a:solidFill>
+                <a:effectLst/>
+                <a:latin typeface="+mn-lt"/>
+              </a:rPr>
+              <a:t>@if (user) {</a:t>
+            </a:r>
+          </a:p>
+          <a:p>
+            <a:pPr indent="0" algn="l">
+              <a:buNone/>
+            </a:pPr>
+            <a:r>
+              <a:rPr lang="en-US" sz="1800" b="0" i="0" dirty="0">
+                <a:solidFill>
+                  <a:schemeClr val="tx1"/>
+                </a:solidFill>
+                <a:effectLst/>
+                <a:latin typeface="+mn-lt"/>
+              </a:rPr>
+              <a:t>  &lt;p&gt;{{ user.name }}&lt;/p&gt;</a:t>
+            </a:r>
+          </a:p>
+          <a:p>
+            <a:pPr indent="0" algn="l">
+              <a:buNone/>
+            </a:pPr>
+            <a:r>
+              <a:rPr lang="en-US" sz="1800" b="0" i="0" dirty="0">
+                <a:solidFill>
+                  <a:schemeClr val="tx1"/>
+                </a:solidFill>
+                <a:effectLst/>
+                <a:latin typeface="+mn-lt"/>
+              </a:rPr>
+              <a:t>} @else if (loading) {</a:t>
+            </a:r>
+          </a:p>
+          <a:p>
+            <a:pPr indent="0" algn="l">
+              <a:buNone/>
+            </a:pPr>
+            <a:r>
+              <a:rPr lang="en-US" sz="1800" b="0" i="0" dirty="0">
+                <a:solidFill>
+                  <a:schemeClr val="tx1"/>
+                </a:solidFill>
+                <a:effectLst/>
+                <a:latin typeface="+mn-lt"/>
+              </a:rPr>
+              <a:t>  &lt;p&gt;Loading...&lt;/p&gt;</a:t>
+            </a:r>
+          </a:p>
+          <a:p>
+            <a:pPr indent="0" algn="l">
+              <a:buNone/>
+            </a:pPr>
+            <a:r>
+              <a:rPr lang="en-US" sz="1800" b="0" i="0" dirty="0">
+                <a:solidFill>
+                  <a:schemeClr val="tx1"/>
+                </a:solidFill>
+                <a:effectLst/>
+                <a:latin typeface="+mn-lt"/>
+              </a:rPr>
+              <a:t>} @else {</a:t>
+            </a:r>
+          </a:p>
+          <a:p>
+            <a:pPr indent="0" algn="l">
+              <a:buNone/>
+            </a:pPr>
+            <a:r>
+              <a:rPr lang="en-US" sz="1800" b="0" i="0" dirty="0">
+                <a:solidFill>
+                  <a:schemeClr val="tx1"/>
+                </a:solidFill>
+                <a:effectLst/>
+                <a:latin typeface="+mn-lt"/>
+              </a:rPr>
+              <a:t>  &lt;p&gt;No user found.&lt;/p&gt;</a:t>
+            </a:r>
+          </a:p>
+          <a:p>
+            <a:pPr indent="0" algn="l">
+              <a:buNone/>
+            </a:pPr>
+            <a:r>
+              <a:rPr lang="en-US" sz="1800" b="0" i="0" dirty="0">
+                <a:solidFill>
+                  <a:schemeClr val="tx1"/>
+                </a:solidFill>
+                <a:effectLst/>
+                <a:latin typeface="+mn-lt"/>
+              </a:rPr>
+              <a:t>}</a:t>
+            </a:r>
+            <a:endParaRPr lang="en-US" sz="1200" b="0" i="0" dirty="0">
+              <a:solidFill>
+                <a:srgbClr val="FFFFFF"/>
+              </a:solidFill>
+              <a:effectLst/>
+              <a:latin typeface="Courier New" panose="02070309020205020404" pitchFamily="49" charset="0"/>
+            </a:endParaRPr>
+          </a:p>
+        </p:txBody>
+      </p:sp>
+      <p:sp>
+        <p:nvSpPr>
+          <p:cNvPr id="7" name="TextBox 6">
+            <a:extLst>
+              <a:ext uri="{FF2B5EF4-FFF2-40B4-BE49-F238E27FC236}">
+                <a16:creationId xmlns:a16="http://schemas.microsoft.com/office/drawing/2014/main" id="{4B61BC42-5112-8254-76C6-3ACFD62709E5}"/>
+              </a:ext>
+            </a:extLst>
+          </p:cNvPr>
+          <p:cNvSpPr txBox="1"/>
+          <p:nvPr/>
+        </p:nvSpPr>
+        <p:spPr>
+          <a:xfrm>
+            <a:off x="6096000" y="2523023"/>
+            <a:ext cx="6097772" cy="3693319"/>
+          </a:xfrm>
+          <a:prstGeom prst="rect">
+            <a:avLst/>
+          </a:prstGeom>
+          <a:noFill/>
+        </p:spPr>
+        <p:txBody>
+          <a:bodyPr wrap="square">
+            <a:spAutoFit/>
+          </a:bodyPr>
+          <a:lstStyle/>
+          <a:p>
+            <a:pPr indent="0" algn="l">
+              <a:buNone/>
+            </a:pPr>
+            <a:r>
+              <a:rPr lang="en-US" b="1" i="0" dirty="0">
+                <a:solidFill>
+                  <a:schemeClr val="tx1"/>
+                </a:solidFill>
+                <a:effectLst/>
+                <a:latin typeface="+mn-lt"/>
+              </a:rPr>
+              <a:t>2. @for — looping</a:t>
+            </a:r>
+          </a:p>
+          <a:p>
+            <a:pPr indent="0" algn="l">
+              <a:buNone/>
+            </a:pPr>
+            <a:r>
+              <a:rPr lang="en-US" sz="1800" b="0" i="0" dirty="0">
+                <a:solidFill>
+                  <a:schemeClr val="tx1"/>
+                </a:solidFill>
+                <a:effectLst/>
+                <a:latin typeface="+mn-lt"/>
+              </a:rPr>
+              <a:t>@for (user of users; track user.id) {</a:t>
+            </a:r>
+          </a:p>
+          <a:p>
+            <a:pPr indent="0" algn="l">
+              <a:buNone/>
+            </a:pPr>
+            <a:r>
+              <a:rPr lang="en-US" sz="1800" b="0" i="0" dirty="0">
+                <a:solidFill>
+                  <a:schemeClr val="tx1"/>
+                </a:solidFill>
+                <a:effectLst/>
+                <a:latin typeface="+mn-lt"/>
+              </a:rPr>
+              <a:t>  &lt;p&gt;{{ user.name }}&lt;/p&gt;</a:t>
+            </a:r>
+          </a:p>
+          <a:p>
+            <a:pPr indent="0" algn="l">
+              <a:buNone/>
+            </a:pPr>
+            <a:r>
+              <a:rPr lang="en-US" sz="1800" b="0" i="0" dirty="0">
+                <a:solidFill>
+                  <a:schemeClr val="tx1"/>
+                </a:solidFill>
+                <a:effectLst/>
+                <a:latin typeface="+mn-lt"/>
+              </a:rPr>
+              <a:t>}</a:t>
+            </a:r>
+          </a:p>
+          <a:p>
+            <a:pPr indent="0" algn="l">
+              <a:buNone/>
+            </a:pPr>
+            <a:endParaRPr lang="en-US" sz="1800" b="0" i="0" dirty="0">
+              <a:solidFill>
+                <a:schemeClr val="tx1"/>
+              </a:solidFill>
+              <a:effectLst/>
+              <a:latin typeface="+mn-lt"/>
+            </a:endParaRPr>
+          </a:p>
+          <a:p>
+            <a:pPr indent="0" algn="l">
+              <a:buNone/>
+            </a:pPr>
+            <a:r>
+              <a:rPr lang="en-US" sz="1800" b="1" i="0" dirty="0">
+                <a:solidFill>
+                  <a:schemeClr val="tx1"/>
+                </a:solidFill>
+                <a:effectLst/>
+                <a:latin typeface="+mn-lt"/>
+              </a:rPr>
+              <a:t>for each item in a collection</a:t>
+            </a:r>
+            <a:r>
+              <a:rPr lang="en-US" sz="1800" b="0" i="0" dirty="0">
+                <a:solidFill>
+                  <a:schemeClr val="tx1"/>
+                </a:solidFill>
+                <a:effectLst/>
+                <a:latin typeface="+mn-lt"/>
+              </a:rPr>
+              <a:t>.</a:t>
+            </a:r>
+          </a:p>
+          <a:p>
+            <a:pPr indent="0" algn="l">
+              <a:buNone/>
+            </a:pPr>
+            <a:r>
+              <a:rPr lang="en-US" sz="1800" b="0" i="0" dirty="0">
+                <a:solidFill>
+                  <a:schemeClr val="tx1"/>
+                </a:solidFill>
+                <a:effectLst/>
+                <a:latin typeface="+mn-lt"/>
+              </a:rPr>
+              <a:t>You'll commonly see:</a:t>
+            </a:r>
+          </a:p>
+          <a:p>
+            <a:pPr indent="0" algn="l">
+              <a:buNone/>
+            </a:pPr>
+            <a:endParaRPr lang="en-US" sz="1800" b="0" i="0" dirty="0">
+              <a:solidFill>
+                <a:schemeClr val="tx1"/>
+              </a:solidFill>
+              <a:effectLst/>
+              <a:latin typeface="+mn-lt"/>
+            </a:endParaRPr>
+          </a:p>
+          <a:p>
+            <a:pPr indent="0" algn="l">
+              <a:buNone/>
+            </a:pPr>
+            <a:r>
+              <a:rPr lang="en-US" sz="1800" b="0" i="0" dirty="0">
+                <a:solidFill>
+                  <a:schemeClr val="tx1"/>
+                </a:solidFill>
+                <a:effectLst/>
+                <a:latin typeface="+mn-lt"/>
+              </a:rPr>
+              <a:t>@for (item of items; track item.id) {</a:t>
+            </a:r>
+          </a:p>
+          <a:p>
+            <a:pPr indent="0" algn="l">
+              <a:buNone/>
+            </a:pPr>
+            <a:r>
+              <a:rPr lang="en-US" sz="1800" b="0" i="0" dirty="0">
+                <a:solidFill>
+                  <a:schemeClr val="tx1"/>
+                </a:solidFill>
+                <a:effectLst/>
+                <a:latin typeface="+mn-lt"/>
+              </a:rPr>
+              <a:t>  {{ item.name }}</a:t>
+            </a:r>
+          </a:p>
+          <a:p>
+            <a:pPr indent="0" algn="l">
+              <a:buNone/>
+            </a:pPr>
+            <a:r>
+              <a:rPr lang="en-US" sz="1800" b="0" i="0" dirty="0">
+                <a:solidFill>
+                  <a:schemeClr val="tx1"/>
+                </a:solidFill>
+                <a:effectLst/>
+                <a:latin typeface="+mn-lt"/>
+              </a:rPr>
+              <a:t>} @empty {</a:t>
+            </a:r>
+          </a:p>
+          <a:p>
+            <a:pPr indent="0" algn="l">
+              <a:buNone/>
+            </a:pPr>
+            <a:r>
+              <a:rPr lang="en-US" sz="1800" b="0" i="0" dirty="0">
+                <a:solidFill>
+                  <a:schemeClr val="tx1"/>
+                </a:solidFill>
+                <a:effectLst/>
+                <a:latin typeface="+mn-lt"/>
+              </a:rPr>
+              <a:t>  &lt;p&gt;No items found.&lt;/p&gt;</a:t>
+            </a:r>
+          </a:p>
+          <a:p>
+            <a:pPr indent="0" algn="l">
+              <a:buNone/>
+            </a:pPr>
+            <a:r>
+              <a:rPr lang="en-US" sz="1800" b="0" i="0" dirty="0">
+                <a:solidFill>
+                  <a:schemeClr val="tx1"/>
+                </a:solidFill>
+                <a:effectLst/>
+                <a:latin typeface="+mn-lt"/>
+              </a:rPr>
+              <a:t>}</a:t>
+            </a:r>
+            <a:endParaRPr lang="en-US" sz="1200" b="0" i="0" dirty="0">
+              <a:solidFill>
+                <a:srgbClr val="FFFFFF"/>
+              </a:solidFill>
+              <a:effectLst/>
+              <a:latin typeface="Courier New" panose="02070309020205020404" pitchFamily="49" charset="0"/>
+            </a:endParaRPr>
+          </a:p>
+        </p:txBody>
+      </p:sp>
+    </p:spTree>
+    <p:extLst>
+      <p:ext uri="{BB962C8B-B14F-4D97-AF65-F5344CB8AC3E}">
+        <p14:creationId xmlns:p14="http://schemas.microsoft.com/office/powerpoint/2010/main" val="4098936885"/>
+      </p:ext>
+    </p:extLst>
+  </p:cSld>
+  <p:clrMapOvr>
+    <a:masterClrMapping/>
+  </p:clrMapOvr>
+</p:sld>
+</file>
+
+<file path=ppt/slides/slide11.xml><?xml version="1.0" encoding="utf-8"?>
+<p:sld xmlns:a="http://schemas.openxmlformats.org/drawingml/2006/main" xmlns:r="http://schemas.openxmlformats.org/officeDocument/2006/relationships" xmlns:p="http://schemas.openxmlformats.org/presentationml/2006/main">
+  <p:cSld>
+    <p:spTree>
+      <p:nvGrpSpPr>
+        <p:cNvPr id="1" name=""/>
+        <p:cNvGrpSpPr/>
+        <p:nvPr/>
+      </p:nvGrpSpPr>
+      <p:grpSpPr>
+        <a:xfrm>
+          <a:off x="0" y="0"/>
+          <a:ext cx="0" cy="0"/>
+          <a:chOff x="0" y="0"/>
+          <a:chExt cx="0" cy="0"/>
+        </a:xfrm>
+      </p:grpSpPr>
+      <p:sp>
+        <p:nvSpPr>
+          <p:cNvPr id="2" name="Title 1">
+            <a:extLst>
+              <a:ext uri="{FF2B5EF4-FFF2-40B4-BE49-F238E27FC236}">
+                <a16:creationId xmlns:a16="http://schemas.microsoft.com/office/drawing/2014/main" id="{787F5527-7CFD-5F94-6B4E-238402F4D1A3}"/>
+              </a:ext>
+            </a:extLst>
+          </p:cNvPr>
+          <p:cNvSpPr>
+            <a:spLocks noGrp="1"/>
+          </p:cNvSpPr>
+          <p:nvPr>
+            <p:ph type="title"/>
+          </p:nvPr>
+        </p:nvSpPr>
+        <p:spPr/>
+        <p:txBody>
+          <a:bodyPr/>
+          <a:lstStyle/>
+          <a:p>
+            <a:r>
+              <a:rPr lang="en-US" dirty="0"/>
+              <a:t>Angular control flow</a:t>
+            </a:r>
+          </a:p>
+        </p:txBody>
+      </p:sp>
+      <p:sp>
+        <p:nvSpPr>
+          <p:cNvPr id="5" name="TextBox 4">
+            <a:extLst>
+              <a:ext uri="{FF2B5EF4-FFF2-40B4-BE49-F238E27FC236}">
+                <a16:creationId xmlns:a16="http://schemas.microsoft.com/office/drawing/2014/main" id="{0ADB9EDB-527F-8E6E-CACB-E7BB88818AAF}"/>
+              </a:ext>
+            </a:extLst>
+          </p:cNvPr>
+          <p:cNvSpPr txBox="1"/>
+          <p:nvPr/>
+        </p:nvSpPr>
+        <p:spPr>
+          <a:xfrm>
+            <a:off x="4611872" y="2249660"/>
+            <a:ext cx="6097772" cy="2677656"/>
+          </a:xfrm>
+          <a:prstGeom prst="rect">
+            <a:avLst/>
+          </a:prstGeom>
+          <a:noFill/>
+        </p:spPr>
+        <p:txBody>
+          <a:bodyPr wrap="square">
+            <a:spAutoFit/>
+          </a:bodyPr>
+          <a:lstStyle/>
+          <a:p>
+            <a:pPr indent="0" algn="l">
+              <a:buNone/>
+            </a:pPr>
+            <a:r>
+              <a:rPr lang="en-US" sz="1800" b="0" i="0" dirty="0">
+                <a:solidFill>
+                  <a:schemeClr val="tx1"/>
+                </a:solidFill>
+                <a:effectLst/>
+                <a:latin typeface="+mn-lt"/>
+              </a:rPr>
+              <a:t>@switch (status) {</a:t>
+            </a:r>
+          </a:p>
+          <a:p>
+            <a:pPr indent="0" algn="l">
+              <a:buNone/>
+            </a:pPr>
+            <a:r>
+              <a:rPr lang="en-US" sz="1800" b="0" i="0" dirty="0">
+                <a:solidFill>
+                  <a:schemeClr val="tx1"/>
+                </a:solidFill>
+                <a:effectLst/>
+                <a:latin typeface="+mn-lt"/>
+              </a:rPr>
+              <a:t>  @case ('loading') {</a:t>
+            </a:r>
+          </a:p>
+          <a:p>
+            <a:pPr indent="0" algn="l">
+              <a:buNone/>
+            </a:pPr>
+            <a:r>
+              <a:rPr lang="en-US" sz="1800" b="0" i="0" dirty="0">
+                <a:solidFill>
+                  <a:schemeClr val="tx1"/>
+                </a:solidFill>
+                <a:effectLst/>
+                <a:latin typeface="+mn-lt"/>
+              </a:rPr>
+              <a:t>    &lt;p&gt;Loading...&lt;/p&gt;</a:t>
+            </a:r>
+          </a:p>
+          <a:p>
+            <a:pPr indent="0" algn="l">
+              <a:buNone/>
+            </a:pPr>
+            <a:r>
+              <a:rPr lang="en-US" sz="1800" b="0" i="0" dirty="0">
+                <a:solidFill>
+                  <a:schemeClr val="tx1"/>
+                </a:solidFill>
+                <a:effectLst/>
+                <a:latin typeface="+mn-lt"/>
+              </a:rPr>
+              <a:t>  }</a:t>
+            </a:r>
+          </a:p>
+          <a:p>
+            <a:pPr indent="0" algn="l">
+              <a:buNone/>
+            </a:pPr>
+            <a:r>
+              <a:rPr lang="en-US" sz="1800" b="0" i="0" dirty="0">
+                <a:solidFill>
+                  <a:schemeClr val="tx1"/>
+                </a:solidFill>
+                <a:effectLst/>
+                <a:latin typeface="+mn-lt"/>
+              </a:rPr>
+              <a:t>  @case ('success') {</a:t>
+            </a:r>
+          </a:p>
+          <a:p>
+            <a:pPr indent="0" algn="l">
+              <a:buNone/>
+            </a:pPr>
+            <a:r>
+              <a:rPr lang="en-US" sz="1800" b="0" i="0" dirty="0">
+                <a:solidFill>
+                  <a:schemeClr val="tx1"/>
+                </a:solidFill>
+                <a:effectLst/>
+                <a:latin typeface="+mn-lt"/>
+              </a:rPr>
+              <a:t>    &lt;p&gt;Success!&lt;/p&gt;</a:t>
+            </a:r>
+          </a:p>
+          <a:p>
+            <a:pPr indent="0" algn="l">
+              <a:buNone/>
+            </a:pPr>
+            <a:r>
+              <a:rPr lang="en-US" sz="1800" b="0" i="0" dirty="0">
+                <a:solidFill>
+                  <a:schemeClr val="tx1"/>
+                </a:solidFill>
+                <a:effectLst/>
+                <a:latin typeface="+mn-lt"/>
+              </a:rPr>
+              <a:t>  }</a:t>
+            </a:r>
+          </a:p>
+          <a:p>
+            <a:pPr indent="0" algn="l">
+              <a:buNone/>
+            </a:pPr>
+            <a:r>
+              <a:rPr lang="en-US" sz="1800" b="0" i="0" dirty="0">
+                <a:solidFill>
+                  <a:schemeClr val="tx1"/>
+                </a:solidFill>
+                <a:effectLst/>
+                <a:latin typeface="+mn-lt"/>
+              </a:rPr>
+              <a:t>  @case ('error') {</a:t>
+            </a:r>
+          </a:p>
+          <a:p>
+            <a:pPr indent="0" algn="l">
+              <a:buNone/>
+            </a:pPr>
+            <a:r>
+              <a:rPr lang="en-US" sz="1800" b="0" i="0" dirty="0">
+                <a:solidFill>
+                  <a:schemeClr val="tx1"/>
+                </a:solidFill>
+                <a:effectLst/>
+                <a:latin typeface="+mn-lt"/>
+              </a:rPr>
+              <a:t>    &lt;p&gt;Error!&lt;/p&gt;</a:t>
+            </a:r>
+          </a:p>
+          <a:p>
+            <a:pPr indent="0" algn="l">
+              <a:buNone/>
+            </a:pPr>
+            <a:r>
+              <a:rPr lang="en-US" sz="1800" b="0" i="0" dirty="0">
+                <a:solidFill>
+                  <a:schemeClr val="tx1"/>
+                </a:solidFill>
+                <a:effectLst/>
+                <a:latin typeface="+mn-lt"/>
+              </a:rPr>
+              <a:t>  }</a:t>
+            </a:r>
+          </a:p>
+          <a:p>
+            <a:pPr indent="0" algn="l">
+              <a:buNone/>
+            </a:pPr>
+            <a:r>
+              <a:rPr lang="en-US" sz="1800" b="0" i="0" dirty="0">
+                <a:solidFill>
+                  <a:schemeClr val="tx1"/>
+                </a:solidFill>
+                <a:effectLst/>
+                <a:latin typeface="+mn-lt"/>
+              </a:rPr>
+              <a:t>  @default {</a:t>
+            </a:r>
+          </a:p>
+          <a:p>
+            <a:pPr indent="0" algn="l">
+              <a:buNone/>
+            </a:pPr>
+            <a:r>
+              <a:rPr lang="en-US" sz="1800" b="0" i="0" dirty="0">
+                <a:solidFill>
+                  <a:schemeClr val="tx1"/>
+                </a:solidFill>
+                <a:effectLst/>
+                <a:latin typeface="+mn-lt"/>
+              </a:rPr>
+              <a:t>    &lt;p&gt;Unknown status&lt;/p&gt;</a:t>
+            </a:r>
+          </a:p>
+          <a:p>
+            <a:pPr indent="0" algn="l">
+              <a:buNone/>
+            </a:pPr>
+            <a:r>
+              <a:rPr lang="en-US" sz="1800" b="0" i="0" dirty="0">
+                <a:solidFill>
+                  <a:schemeClr val="tx1"/>
+                </a:solidFill>
+                <a:effectLst/>
+                <a:latin typeface="+mn-lt"/>
+              </a:rPr>
+              <a:t>  }</a:t>
+            </a:r>
+          </a:p>
+          <a:p>
+            <a:pPr indent="0" algn="l">
+              <a:buNone/>
+            </a:pPr>
+            <a:r>
+              <a:rPr lang="en-US" sz="1800" b="0" i="0" dirty="0">
+                <a:solidFill>
+                  <a:schemeClr val="tx1"/>
+                </a:solidFill>
+                <a:effectLst/>
+                <a:latin typeface="+mn-lt"/>
+              </a:rPr>
+              <a:t>}</a:t>
+            </a:r>
+            <a:endParaRPr lang="en-US" sz="1200" b="0" i="0" dirty="0">
+              <a:solidFill>
+                <a:srgbClr val="FFFFFF"/>
+              </a:solidFill>
+              <a:effectLst/>
+              <a:latin typeface="Courier New" panose="02070309020205020404" pitchFamily="49" charset="0"/>
+            </a:endParaRPr>
+          </a:p>
+        </p:txBody>
+      </p:sp>
+    </p:spTree>
+    <p:extLst>
+      <p:ext uri="{BB962C8B-B14F-4D97-AF65-F5344CB8AC3E}">
+        <p14:creationId xmlns:p14="http://schemas.microsoft.com/office/powerpoint/2010/main" val="3678459877"/>
+      </p:ext>
+    </p:extLst>
+  </p:cSld>
+  <p:clrMapOvr>
+    <a:masterClrMapping/>
+  </p:clrMapOvr>
+</p:sld>
+</file>
+
+<file path=ppt/slides/slide12.xml><?xml version="1.0" encoding="utf-8"?>
+<p:sld xmlns:a="http://schemas.openxmlformats.org/drawingml/2006/main" xmlns:r="http://schemas.openxmlformats.org/officeDocument/2006/relationships" xmlns:p="http://schemas.openxmlformats.org/presentationml/2006/main">
+  <p:cSld>
+    <p:spTree>
+      <p:nvGrpSpPr>
+        <p:cNvPr id="1" name="">
+          <a:extLst>
+            <a:ext uri="{FF2B5EF4-FFF2-40B4-BE49-F238E27FC236}">
+              <a16:creationId xmlns:a16="http://schemas.microsoft.com/office/drawing/2014/main" id="{E83D92F2-BD3F-5502-960E-3CFF3577844B}"/>
+            </a:ext>
+          </a:extLst>
+        </p:cNvPr>
+        <p:cNvGrpSpPr/>
+        <p:nvPr/>
+      </p:nvGrpSpPr>
+      <p:grpSpPr>
+        <a:xfrm>
+          <a:off x="0" y="0"/>
+          <a:ext cx="0" cy="0"/>
+          <a:chOff x="0" y="0"/>
+          <a:chExt cx="0" cy="0"/>
+        </a:xfrm>
+      </p:grpSpPr>
+      <p:sp>
+        <p:nvSpPr>
+          <p:cNvPr id="2" name="Title 1">
+            <a:extLst>
+              <a:ext uri="{FF2B5EF4-FFF2-40B4-BE49-F238E27FC236}">
+                <a16:creationId xmlns:a16="http://schemas.microsoft.com/office/drawing/2014/main" id="{475D234C-D59D-E997-1AA0-D508BFFD3CB6}"/>
+              </a:ext>
+            </a:extLst>
+          </p:cNvPr>
+          <p:cNvSpPr>
+            <a:spLocks noGrp="1"/>
+          </p:cNvSpPr>
+          <p:nvPr>
+            <p:ph type="title"/>
+          </p:nvPr>
+        </p:nvSpPr>
+        <p:spPr/>
+        <p:txBody>
+          <a:bodyPr>
+            <a:normAutofit/>
+          </a:bodyPr>
+          <a:lstStyle/>
+          <a:p>
+            <a:r>
+              <a:rPr lang="en-US" sz="2400" dirty="0"/>
+              <a:t>Challenge – components, control flow, &amp; communication</a:t>
+            </a:r>
+          </a:p>
+        </p:txBody>
+      </p:sp>
+      <p:sp>
+        <p:nvSpPr>
+          <p:cNvPr id="3" name="Content Placeholder 2">
+            <a:extLst>
+              <a:ext uri="{FF2B5EF4-FFF2-40B4-BE49-F238E27FC236}">
+                <a16:creationId xmlns:a16="http://schemas.microsoft.com/office/drawing/2014/main" id="{23F8E57B-9E41-4816-C2F2-1105A90F87A9}"/>
+              </a:ext>
+            </a:extLst>
+          </p:cNvPr>
+          <p:cNvSpPr>
+            <a:spLocks noGrp="1"/>
+          </p:cNvSpPr>
+          <p:nvPr>
+            <p:ph idx="1"/>
+          </p:nvPr>
+        </p:nvSpPr>
+        <p:spPr>
+          <a:xfrm>
+            <a:off x="581192" y="2475925"/>
+            <a:ext cx="5317584" cy="1681246"/>
+          </a:xfrm>
+        </p:spPr>
+        <p:txBody>
+          <a:bodyPr/>
+          <a:lstStyle/>
+          <a:p>
+            <a:r>
+              <a:rPr lang="en-US" dirty="0"/>
+              <a:t>Delete students from the student list</a:t>
+            </a:r>
+          </a:p>
+        </p:txBody>
+      </p:sp>
+      <p:sp>
+        <p:nvSpPr>
+          <p:cNvPr id="6" name="TextBox 5">
+            <a:extLst>
+              <a:ext uri="{FF2B5EF4-FFF2-40B4-BE49-F238E27FC236}">
+                <a16:creationId xmlns:a16="http://schemas.microsoft.com/office/drawing/2014/main" id="{2DE50FF0-C783-F3C0-044D-2F094F317804}"/>
+              </a:ext>
+            </a:extLst>
+          </p:cNvPr>
+          <p:cNvSpPr txBox="1"/>
+          <p:nvPr/>
+        </p:nvSpPr>
+        <p:spPr>
+          <a:xfrm>
+            <a:off x="1228165" y="2402747"/>
+            <a:ext cx="756938" cy="369332"/>
+          </a:xfrm>
+          <a:prstGeom prst="rect">
+            <a:avLst/>
+          </a:prstGeom>
+          <a:noFill/>
+        </p:spPr>
+        <p:txBody>
+          <a:bodyPr wrap="none" rtlCol="0">
+            <a:spAutoFit/>
+          </a:bodyPr>
+          <a:lstStyle/>
+          <a:p>
+            <a:r>
+              <a:rPr lang="en-US" b="1" dirty="0"/>
+              <a:t>Goal:</a:t>
+            </a:r>
+          </a:p>
+        </p:txBody>
+      </p:sp>
+      <p:sp>
+        <p:nvSpPr>
+          <p:cNvPr id="7" name="TextBox 6">
+            <a:extLst>
+              <a:ext uri="{FF2B5EF4-FFF2-40B4-BE49-F238E27FC236}">
+                <a16:creationId xmlns:a16="http://schemas.microsoft.com/office/drawing/2014/main" id="{405306AE-2095-D0AE-E069-321DBC55370F}"/>
+              </a:ext>
+            </a:extLst>
+          </p:cNvPr>
+          <p:cNvSpPr txBox="1"/>
+          <p:nvPr/>
+        </p:nvSpPr>
+        <p:spPr>
+          <a:xfrm>
+            <a:off x="6949165" y="2402747"/>
+            <a:ext cx="4661643" cy="369332"/>
+          </a:xfrm>
+          <a:prstGeom prst="rect">
+            <a:avLst/>
+          </a:prstGeom>
+          <a:noFill/>
+        </p:spPr>
+        <p:txBody>
+          <a:bodyPr wrap="square" rtlCol="0">
+            <a:spAutoFit/>
+          </a:bodyPr>
+          <a:lstStyle/>
+          <a:p>
+            <a:r>
+              <a:rPr lang="en-US" b="1" dirty="0"/>
+              <a:t>Scenario:  			   5 min</a:t>
+            </a:r>
+          </a:p>
+        </p:txBody>
+      </p:sp>
+      <p:sp>
+        <p:nvSpPr>
+          <p:cNvPr id="8" name="Content Placeholder 2">
+            <a:extLst>
+              <a:ext uri="{FF2B5EF4-FFF2-40B4-BE49-F238E27FC236}">
+                <a16:creationId xmlns:a16="http://schemas.microsoft.com/office/drawing/2014/main" id="{61B443B1-E14C-64AB-9E9D-75FFCF923C2B}"/>
+              </a:ext>
+            </a:extLst>
+          </p:cNvPr>
+          <p:cNvSpPr txBox="1">
+            <a:spLocks/>
+          </p:cNvSpPr>
+          <p:nvPr/>
+        </p:nvSpPr>
+        <p:spPr>
+          <a:xfrm>
+            <a:off x="6545749" y="2772079"/>
+            <a:ext cx="4661642" cy="2533456"/>
+          </a:xfrm>
+          <a:prstGeom prst="rect">
+            <a:avLst/>
+          </a:prstGeom>
+        </p:spPr>
+        <p:txBody>
+          <a:bodyPr vert="horz" lIns="91440" tIns="45720" rIns="91440" bIns="45720" rtlCol="0" anchor="ctr">
+            <a:normAutofit fontScale="92500" lnSpcReduction="10000"/>
+          </a:bodyPr>
+          <a:lstStyle>
+            <a:lvl1pPr marL="306000" indent="-306000" algn="l" defTabSz="457200" rtl="0" eaLnBrk="1" latinLnBrk="0" hangingPunct="1">
+              <a:spcBef>
+                <a:spcPct val="20000"/>
+              </a:spcBef>
+              <a:spcAft>
+                <a:spcPts val="600"/>
+              </a:spcAft>
+              <a:buClr>
+                <a:schemeClr val="accent2"/>
+              </a:buClr>
+              <a:buSzPct val="92000"/>
+              <a:buFont typeface="Wingdings 2" panose="05020102010507070707" pitchFamily="18" charset="2"/>
+              <a:buChar char=""/>
+              <a:defRPr sz="1800" kern="1200">
+                <a:solidFill>
+                  <a:schemeClr val="tx2"/>
+                </a:solidFill>
+                <a:latin typeface="+mn-lt"/>
+                <a:ea typeface="+mn-ea"/>
+                <a:cs typeface="+mn-cs"/>
+              </a:defRPr>
+            </a:lvl1pPr>
+            <a:lvl2pPr marL="630000" indent="-306000" algn="l" defTabSz="457200" rtl="0" eaLnBrk="1" latinLnBrk="0" hangingPunct="1">
+              <a:spcBef>
+                <a:spcPct val="20000"/>
+              </a:spcBef>
+              <a:spcAft>
+                <a:spcPts val="600"/>
+              </a:spcAft>
+              <a:buClr>
+                <a:schemeClr val="accent2"/>
+              </a:buClr>
+              <a:buSzPct val="92000"/>
+              <a:buFont typeface="Wingdings 2" panose="05020102010507070707" pitchFamily="18" charset="2"/>
+              <a:buChar char=""/>
+              <a:defRPr sz="1600" kern="1200">
+                <a:solidFill>
+                  <a:schemeClr val="tx2"/>
+                </a:solidFill>
+                <a:latin typeface="+mn-lt"/>
+                <a:ea typeface="+mn-ea"/>
+                <a:cs typeface="+mn-cs"/>
+              </a:defRPr>
+            </a:lvl2pPr>
+            <a:lvl3pPr marL="900000" indent="-270000" algn="l" defTabSz="457200" rtl="0" eaLnBrk="1" latinLnBrk="0" hangingPunct="1">
+              <a:spcBef>
+                <a:spcPct val="20000"/>
+              </a:spcBef>
+              <a:spcAft>
+                <a:spcPts val="600"/>
+              </a:spcAft>
+              <a:buClr>
+                <a:schemeClr val="accent2"/>
+              </a:buClr>
+              <a:buSzPct val="92000"/>
+              <a:buFont typeface="Wingdings 2" panose="05020102010507070707" pitchFamily="18" charset="2"/>
+              <a:buChar char=""/>
+              <a:defRPr sz="1400" kern="1200">
+                <a:solidFill>
+                  <a:schemeClr val="tx2"/>
+                </a:solidFill>
+                <a:latin typeface="+mn-lt"/>
+                <a:ea typeface="+mn-ea"/>
+                <a:cs typeface="+mn-cs"/>
+              </a:defRPr>
+            </a:lvl3pPr>
+            <a:lvl4pPr marL="1242000" indent="-234000" algn="l" defTabSz="457200" rtl="0" eaLnBrk="1" latinLnBrk="0" hangingPunct="1">
+              <a:spcBef>
+                <a:spcPct val="20000"/>
+              </a:spcBef>
+              <a:spcAft>
+                <a:spcPts val="600"/>
+              </a:spcAft>
+              <a:buClr>
+                <a:schemeClr val="accent2"/>
+              </a:buClr>
+              <a:buSzPct val="92000"/>
+              <a:buFont typeface="Wingdings 2" panose="05020102010507070707" pitchFamily="18" charset="2"/>
+              <a:buChar char=""/>
+              <a:defRPr sz="1200" kern="1200">
+                <a:solidFill>
+                  <a:schemeClr val="tx2"/>
+                </a:solidFill>
+                <a:latin typeface="+mn-lt"/>
+                <a:ea typeface="+mn-ea"/>
+                <a:cs typeface="+mn-cs"/>
+              </a:defRPr>
+            </a:lvl4pPr>
+            <a:lvl5pPr marL="1602000" indent="-234000" algn="l" defTabSz="457200" rtl="0" eaLnBrk="1" latinLnBrk="0" hangingPunct="1">
+              <a:spcBef>
+                <a:spcPct val="20000"/>
+              </a:spcBef>
+              <a:spcAft>
+                <a:spcPts val="600"/>
+              </a:spcAft>
+              <a:buClr>
+                <a:schemeClr val="accent2"/>
+              </a:buClr>
+              <a:buSzPct val="92000"/>
+              <a:buFont typeface="Wingdings 2" panose="05020102010507070707" pitchFamily="18" charset="2"/>
+              <a:buChar char=""/>
+              <a:defRPr sz="1200" kern="1200">
+                <a:solidFill>
+                  <a:schemeClr val="tx2"/>
+                </a:solidFill>
+                <a:latin typeface="+mn-lt"/>
+                <a:ea typeface="+mn-ea"/>
+                <a:cs typeface="+mn-cs"/>
+              </a:defRPr>
+            </a:lvl5pPr>
+            <a:lvl6pPr marL="1900000" indent="-228600" algn="l" defTabSz="457200" rtl="0" eaLnBrk="1" latinLnBrk="0" hangingPunct="1">
+              <a:spcBef>
+                <a:spcPct val="20000"/>
+              </a:spcBef>
+              <a:spcAft>
+                <a:spcPts val="600"/>
+              </a:spcAft>
+              <a:buClr>
+                <a:schemeClr val="accent2"/>
+              </a:buClr>
+              <a:buSzPct val="92000"/>
+              <a:buFont typeface="Wingdings 2" panose="05020102010507070707" pitchFamily="18" charset="2"/>
+              <a:buChar char=""/>
+              <a:defRPr sz="1200" kern="1200">
+                <a:solidFill>
+                  <a:schemeClr val="tx2"/>
+                </a:solidFill>
+                <a:latin typeface="+mn-lt"/>
+                <a:ea typeface="+mn-ea"/>
+                <a:cs typeface="+mn-cs"/>
+              </a:defRPr>
+            </a:lvl6pPr>
+            <a:lvl7pPr marL="2200000" indent="-228600" algn="l" defTabSz="457200" rtl="0" eaLnBrk="1" latinLnBrk="0" hangingPunct="1">
+              <a:spcBef>
+                <a:spcPct val="20000"/>
+              </a:spcBef>
+              <a:spcAft>
+                <a:spcPts val="600"/>
+              </a:spcAft>
+              <a:buClr>
+                <a:schemeClr val="accent2"/>
+              </a:buClr>
+              <a:buSzPct val="92000"/>
+              <a:buFont typeface="Wingdings 2" panose="05020102010507070707" pitchFamily="18" charset="2"/>
+              <a:buChar char=""/>
+              <a:defRPr sz="1200" kern="1200">
+                <a:solidFill>
+                  <a:schemeClr val="tx2"/>
+                </a:solidFill>
+                <a:latin typeface="+mn-lt"/>
+                <a:ea typeface="+mn-ea"/>
+                <a:cs typeface="+mn-cs"/>
+              </a:defRPr>
+            </a:lvl7pPr>
+            <a:lvl8pPr marL="2500000" indent="-228600" algn="l" defTabSz="457200" rtl="0" eaLnBrk="1" latinLnBrk="0" hangingPunct="1">
+              <a:spcBef>
+                <a:spcPct val="20000"/>
+              </a:spcBef>
+              <a:spcAft>
+                <a:spcPts val="600"/>
+              </a:spcAft>
+              <a:buClr>
+                <a:schemeClr val="accent2"/>
+              </a:buClr>
+              <a:buSzPct val="92000"/>
+              <a:buFont typeface="Wingdings 2" panose="05020102010507070707" pitchFamily="18" charset="2"/>
+              <a:buChar char=""/>
+              <a:defRPr sz="1200" kern="1200">
+                <a:solidFill>
+                  <a:schemeClr val="tx2"/>
+                </a:solidFill>
+                <a:latin typeface="+mn-lt"/>
+                <a:ea typeface="+mn-ea"/>
+                <a:cs typeface="+mn-cs"/>
+              </a:defRPr>
+            </a:lvl8pPr>
+            <a:lvl9pPr marL="2800000" indent="-228600" algn="l" defTabSz="457200" rtl="0" eaLnBrk="1" latinLnBrk="0" hangingPunct="1">
+              <a:spcBef>
+                <a:spcPct val="20000"/>
+              </a:spcBef>
+              <a:spcAft>
+                <a:spcPts val="600"/>
+              </a:spcAft>
+              <a:buClr>
+                <a:schemeClr val="accent2"/>
+              </a:buClr>
+              <a:buSzPct val="92000"/>
+              <a:buFont typeface="Wingdings 2" panose="05020102010507070707" pitchFamily="18" charset="2"/>
+              <a:buChar char=""/>
+              <a:defRPr sz="1200" kern="1200">
+                <a:solidFill>
+                  <a:schemeClr val="tx2"/>
+                </a:solidFill>
+                <a:latin typeface="+mn-lt"/>
+                <a:ea typeface="+mn-ea"/>
+                <a:cs typeface="+mn-cs"/>
+              </a:defRPr>
+            </a:lvl9pPr>
+          </a:lstStyle>
+          <a:p>
+            <a:r>
+              <a:rPr lang="en-US" dirty="0"/>
+              <a:t>You can use our previous examples to build off of</a:t>
+            </a:r>
+          </a:p>
+          <a:p>
+            <a:r>
+              <a:rPr lang="en-US" dirty="0"/>
+              <a:t>Instead of a ‘Select’ button, use a ‘Delete’ button instead on the student card</a:t>
+            </a:r>
+          </a:p>
+          <a:p>
+            <a:r>
+              <a:rPr lang="en-US" dirty="0"/>
+              <a:t>If no students are in the list, then print to the page: ‘No students found…’</a:t>
+            </a:r>
+          </a:p>
+          <a:p>
+            <a:r>
+              <a:rPr lang="en-US" dirty="0"/>
+              <a:t>Hint: use the standard JavaScript filter() method to help remove items from the list</a:t>
+            </a:r>
+          </a:p>
+        </p:txBody>
+      </p:sp>
+      <p:pic>
+        <p:nvPicPr>
+          <p:cNvPr id="5" name="Picture 4">
+            <a:extLst>
+              <a:ext uri="{FF2B5EF4-FFF2-40B4-BE49-F238E27FC236}">
+                <a16:creationId xmlns:a16="http://schemas.microsoft.com/office/drawing/2014/main" id="{2A27A20E-6D1E-E6A8-E8A0-859EC95373DF}"/>
+              </a:ext>
+            </a:extLst>
+          </p:cNvPr>
+          <p:cNvPicPr>
+            <a:picLocks noChangeAspect="1"/>
+          </p:cNvPicPr>
+          <p:nvPr/>
+        </p:nvPicPr>
+        <p:blipFill>
+          <a:blip r:embed="rId2"/>
+          <a:stretch>
+            <a:fillRect/>
+          </a:stretch>
+        </p:blipFill>
+        <p:spPr>
+          <a:xfrm>
+            <a:off x="1741531" y="3890007"/>
+            <a:ext cx="1498453" cy="2570875"/>
+          </a:xfrm>
+          <a:prstGeom prst="rect">
+            <a:avLst/>
+          </a:prstGeom>
+        </p:spPr>
+      </p:pic>
+      <p:pic>
+        <p:nvPicPr>
+          <p:cNvPr id="10" name="Picture 9">
+            <a:extLst>
+              <a:ext uri="{FF2B5EF4-FFF2-40B4-BE49-F238E27FC236}">
+                <a16:creationId xmlns:a16="http://schemas.microsoft.com/office/drawing/2014/main" id="{600F8269-74F2-5714-0FD6-366D878FDD88}"/>
+              </a:ext>
+            </a:extLst>
+          </p:cNvPr>
+          <p:cNvPicPr>
+            <a:picLocks noChangeAspect="1"/>
+          </p:cNvPicPr>
+          <p:nvPr/>
+        </p:nvPicPr>
+        <p:blipFill>
+          <a:blip r:embed="rId3"/>
+          <a:stretch>
+            <a:fillRect/>
+          </a:stretch>
+        </p:blipFill>
+        <p:spPr>
+          <a:xfrm>
+            <a:off x="3239984" y="4914955"/>
+            <a:ext cx="2162477" cy="390580"/>
+          </a:xfrm>
+          <a:prstGeom prst="rect">
+            <a:avLst/>
+          </a:prstGeom>
+        </p:spPr>
+      </p:pic>
+    </p:spTree>
+    <p:extLst>
+      <p:ext uri="{BB962C8B-B14F-4D97-AF65-F5344CB8AC3E}">
+        <p14:creationId xmlns:p14="http://schemas.microsoft.com/office/powerpoint/2010/main" val="3587871389"/>
+      </p:ext>
+    </p:extLst>
+  </p:cSld>
+  <p:clrMapOvr>
+    <a:masterClrMapping/>
+  </p:clrMapOvr>
+</p:sld>
+</file>
+
 <file path=ppt/slides/slide2.xml><?xml version="1.0" encoding="utf-8"?>
 <p:sld xmlns:a="http://schemas.openxmlformats.org/drawingml/2006/main" xmlns:r="http://schemas.openxmlformats.org/officeDocument/2006/relationships" xmlns:p="http://schemas.openxmlformats.org/presentationml/2006/main">
   <p:cSld>
@@ -3985,7 +5351,7 @@
           <p:cNvPr id="2" name="Title 1">
             <a:extLst>
               <a:ext uri="{FF2B5EF4-FFF2-40B4-BE49-F238E27FC236}">
-                <a16:creationId xmlns:a16="http://schemas.microsoft.com/office/drawing/2014/main" id="{E38A80A3-4D51-B75A-C30A-4DD6B5B66CEE}"/>
+                <a16:creationId xmlns:a16="http://schemas.microsoft.com/office/drawing/2014/main" id="{886B767D-9794-541A-3195-1CF4492B175B}"/>
               </a:ext>
             </a:extLst>
           </p:cNvPr>
@@ -4003,7 +5369,7 @@
           <a:p>
             <a:r>
               <a:rPr lang="en-US" dirty="0"/>
-              <a:t>Getting started</a:t>
+              <a:t>MPA vs SPA</a:t>
             </a:r>
           </a:p>
         </p:txBody>
@@ -4013,7 +5379,7 @@
           <p:cNvPr id="3" name="Content Placeholder 2">
             <a:extLst>
               <a:ext uri="{FF2B5EF4-FFF2-40B4-BE49-F238E27FC236}">
-                <a16:creationId xmlns:a16="http://schemas.microsoft.com/office/drawing/2014/main" id="{5D567102-C53B-06A8-A207-E1506722E506}"/>
+                <a16:creationId xmlns:a16="http://schemas.microsoft.com/office/drawing/2014/main" id="{5053475F-E790-9AAC-4210-92A9275F302D}"/>
               </a:ext>
             </a:extLst>
           </p:cNvPr>
@@ -4031,75 +5397,82 @@
           <a:p>
             <a:r>
               <a:rPr lang="en-US" dirty="0"/>
-              <a:t>Install NPM</a:t>
-            </a:r>
-          </a:p>
-          <a:p>
-            <a:r>
-              <a:rPr lang="en-US" dirty="0" err="1"/>
-              <a:t>npm</a:t>
-            </a:r>
-            <a:r>
-              <a:rPr lang="en-US" dirty="0"/>
-              <a:t> install -g </a:t>
-            </a:r>
-            <a:r>
-              <a:rPr lang="en-US" dirty="0" err="1"/>
-              <a:t>npm@latest</a:t>
+              <a:t>A </a:t>
+            </a:r>
+            <a:r>
+              <a:rPr lang="en-US" b="1" dirty="0"/>
+              <a:t>Single-Page Application</a:t>
+            </a:r>
+            <a:r>
+              <a:rPr lang="en-US" dirty="0"/>
+              <a:t> is a web application that loads </a:t>
+            </a:r>
+            <a:r>
+              <a:rPr lang="en-US" b="1" dirty="0"/>
+              <a:t>one main HTML page</a:t>
+            </a:r>
+            <a:r>
+              <a:rPr lang="en-US" dirty="0"/>
+              <a:t> and dynamically updates its content as the user interacts with it, without fully reloading the page.</a:t>
+            </a:r>
+          </a:p>
+          <a:p>
+            <a:pPr lvl="1"/>
+            <a:r>
+              <a:rPr lang="en-US" b="1" dirty="0"/>
+              <a:t>How it works:</a:t>
             </a:r>
             <a:endParaRPr lang="en-US" dirty="0"/>
           </a:p>
           <a:p>
-            <a:r>
-              <a:rPr lang="en-US" dirty="0"/>
-              <a:t>ng new my-angular-app</a:t>
-            </a:r>
-          </a:p>
-          <a:p>
-            <a:r>
-              <a:rPr lang="en-US" dirty="0"/>
-              <a:t>cd my-angular-app</a:t>
-            </a:r>
-          </a:p>
-          <a:p>
-            <a:r>
-              <a:rPr lang="en-US" dirty="0" err="1"/>
-              <a:t>npm</a:t>
-            </a:r>
-            <a:r>
-              <a:rPr lang="en-US" dirty="0"/>
-              <a:t> run start</a:t>
-            </a:r>
-          </a:p>
-          <a:p>
-            <a:r>
-              <a:rPr lang="en-US" dirty="0"/>
-              <a:t>Generating components (always us camelCase when generating components):</a:t>
-            </a:r>
-          </a:p>
-          <a:p>
             <a:pPr lvl="1"/>
             <a:r>
               <a:rPr lang="en-US" dirty="0"/>
-              <a:t>Within app folder: ng generate component </a:t>
-            </a:r>
-            <a:r>
-              <a:rPr lang="en-US" dirty="0" err="1"/>
-              <a:t>componentName</a:t>
-            </a:r>
-            <a:endParaRPr lang="en-US" dirty="0"/>
+              <a:t>The browser initially loads the application.</a:t>
+            </a:r>
           </a:p>
           <a:p>
             <a:pPr lvl="1"/>
             <a:r>
               <a:rPr lang="en-US" dirty="0"/>
-              <a:t>Nested within app folder: ng generate component nested/</a:t>
-            </a:r>
-            <a:r>
-              <a:rPr lang="en-US" dirty="0" err="1"/>
-              <a:t>componentName</a:t>
-            </a:r>
-            <a:endParaRPr lang="en-US" dirty="0"/>
+              <a:t>JavaScript retrieves and displays new data as needed.</a:t>
+            </a:r>
+          </a:p>
+          <a:p>
+            <a:pPr lvl="1"/>
+            <a:r>
+              <a:rPr lang="en-US" dirty="0"/>
+              <a:t>Navigation usually happens without a complete page refresh.</a:t>
+            </a:r>
+          </a:p>
+          <a:p>
+            <a:pPr lvl="1"/>
+            <a:r>
+              <a:rPr lang="en-US" dirty="0"/>
+              <a:t>Frameworks such as React, Angular, and Vue are commonly used.</a:t>
+            </a:r>
+          </a:p>
+          <a:p>
+            <a:r>
+              <a:rPr lang="en-US" dirty="0"/>
+              <a:t>A </a:t>
+            </a:r>
+            <a:r>
+              <a:rPr lang="en-US" b="1" dirty="0"/>
+              <a:t>Multi-Page Application</a:t>
+            </a:r>
+            <a:r>
+              <a:rPr lang="en-US" dirty="0"/>
+              <a:t> is a web application consisting of </a:t>
+            </a:r>
+            <a:r>
+              <a:rPr lang="en-US" b="1" dirty="0"/>
+              <a:t>multiple HTML pages</a:t>
+            </a:r>
+            <a:r>
+              <a:rPr lang="en-US" dirty="0"/>
+              <a:t>. When the user navigates to a different section, the browser generally requests a new page from the server and reloads the document.</a:t>
+            </a:r>
           </a:p>
           <a:p>
             <a:endParaRPr lang="en-US" dirty="0"/>
@@ -4109,7 +5482,7 @@
     </p:spTree>
     <p:extLst>
       <p:ext uri="{BB962C8B-B14F-4D97-AF65-F5344CB8AC3E}">
-        <p14:creationId xmlns:p14="http://schemas.microsoft.com/office/powerpoint/2010/main" val="1861942786"/>
+        <p14:creationId xmlns:p14="http://schemas.microsoft.com/office/powerpoint/2010/main" val="1537627767"/>
       </p:ext>
     </p:extLst>
   </p:cSld>
@@ -4141,7 +5514,7 @@
           <p:cNvPr id="2" name="Title 1">
             <a:extLst>
               <a:ext uri="{FF2B5EF4-FFF2-40B4-BE49-F238E27FC236}">
-                <a16:creationId xmlns:a16="http://schemas.microsoft.com/office/drawing/2014/main" id="{A1F9BE7C-EA47-D5AD-C0FD-D8DB5CC4B8DB}"/>
+                <a16:creationId xmlns:a16="http://schemas.microsoft.com/office/drawing/2014/main" id="{E38A80A3-4D51-B75A-C30A-4DD6B5B66CEE}"/>
               </a:ext>
             </a:extLst>
           </p:cNvPr>
@@ -4157,7 +5530,10 @@
           <a:bodyPr/>
           <a:lstStyle/>
           <a:p>
-            <a:endParaRPr lang="en-US"/>
+            <a:r>
+              <a:rPr lang="en-US" dirty="0"/>
+              <a:t>Getting started</a:t>
+            </a:r>
           </a:p>
         </p:txBody>
       </p:sp>
@@ -4166,7 +5542,7 @@
           <p:cNvPr id="3" name="Content Placeholder 2">
             <a:extLst>
               <a:ext uri="{FF2B5EF4-FFF2-40B4-BE49-F238E27FC236}">
-                <a16:creationId xmlns:a16="http://schemas.microsoft.com/office/drawing/2014/main" id="{B30E42B9-BACC-C8EC-4F59-D408A375B8ED}"/>
+                <a16:creationId xmlns:a16="http://schemas.microsoft.com/office/drawing/2014/main" id="{5D567102-C53B-06A8-A207-E1506722E506}"/>
               </a:ext>
             </a:extLst>
           </p:cNvPr>
@@ -4182,14 +5558,87 @@
           <a:bodyPr/>
           <a:lstStyle/>
           <a:p>
-            <a:endParaRPr lang="en-US"/>
+            <a:r>
+              <a:rPr lang="en-US" dirty="0"/>
+              <a:t>Install NPM</a:t>
+            </a:r>
+          </a:p>
+          <a:p>
+            <a:r>
+              <a:rPr lang="en-US" dirty="0" err="1"/>
+              <a:t>npm</a:t>
+            </a:r>
+            <a:r>
+              <a:rPr lang="en-US" dirty="0"/>
+              <a:t> install -g </a:t>
+            </a:r>
+            <a:r>
+              <a:rPr lang="en-US" dirty="0" err="1"/>
+              <a:t>npm@latest</a:t>
+            </a:r>
+            <a:endParaRPr lang="en-US" dirty="0"/>
+          </a:p>
+          <a:p>
+            <a:r>
+              <a:rPr lang="en-US" dirty="0"/>
+              <a:t>ng new my-angular-app</a:t>
+            </a:r>
+          </a:p>
+          <a:p>
+            <a:r>
+              <a:rPr lang="en-US" dirty="0"/>
+              <a:t>cd my-angular-app</a:t>
+            </a:r>
+          </a:p>
+          <a:p>
+            <a:r>
+              <a:rPr lang="en-US" dirty="0" err="1"/>
+              <a:t>npm</a:t>
+            </a:r>
+            <a:r>
+              <a:rPr lang="en-US" dirty="0"/>
+              <a:t> run start</a:t>
+            </a:r>
+          </a:p>
+          <a:p>
+            <a:r>
+              <a:rPr lang="en-US" dirty="0"/>
+              <a:t>Generating components (always us camelCase when generating components):</a:t>
+            </a:r>
+          </a:p>
+          <a:p>
+            <a:pPr lvl="1"/>
+            <a:r>
+              <a:rPr lang="en-US" dirty="0"/>
+              <a:t>Within app folder: ng generate component </a:t>
+            </a:r>
+            <a:r>
+              <a:rPr lang="en-US" dirty="0" err="1"/>
+              <a:t>componentName</a:t>
+            </a:r>
+            <a:endParaRPr lang="en-US" dirty="0"/>
+          </a:p>
+          <a:p>
+            <a:pPr lvl="1"/>
+            <a:r>
+              <a:rPr lang="en-US" dirty="0"/>
+              <a:t>Nested within app folder: ng generate component nested/</a:t>
+            </a:r>
+            <a:r>
+              <a:rPr lang="en-US" dirty="0" err="1"/>
+              <a:t>componentName</a:t>
+            </a:r>
+            <a:endParaRPr lang="en-US" dirty="0"/>
+          </a:p>
+          <a:p>
+            <a:endParaRPr lang="en-US" dirty="0"/>
           </a:p>
         </p:txBody>
       </p:sp>
     </p:spTree>
     <p:extLst>
       <p:ext uri="{BB962C8B-B14F-4D97-AF65-F5344CB8AC3E}">
-        <p14:creationId xmlns:p14="http://schemas.microsoft.com/office/powerpoint/2010/main" val="3416167633"/>
+        <p14:creationId xmlns:p14="http://schemas.microsoft.com/office/powerpoint/2010/main" val="1861942786"/>
       </p:ext>
     </p:extLst>
   </p:cSld>
@@ -4204,13 +5653,7 @@
   <p:cSld>
     <p:spTree>
       <p:nvGrpSpPr>
-        <p:cNvPr id="1" name="">
-          <a:extLst>
-            <a:ext uri="{FF2B5EF4-FFF2-40B4-BE49-F238E27FC236}">
-              <a16:creationId xmlns:a16="http://schemas.microsoft.com/office/drawing/2014/main" id="{E83D92F2-BD3F-5502-960E-3CFF3577844B}"/>
-            </a:ext>
-          </a:extLst>
-        </p:cNvPr>
+        <p:cNvPr id="1" name=""/>
         <p:cNvGrpSpPr/>
         <p:nvPr/>
       </p:nvGrpSpPr>
@@ -4227,7 +5670,7 @@
           <p:cNvPr id="2" name="Title 1">
             <a:extLst>
               <a:ext uri="{FF2B5EF4-FFF2-40B4-BE49-F238E27FC236}">
-                <a16:creationId xmlns:a16="http://schemas.microsoft.com/office/drawing/2014/main" id="{475D234C-D59D-E997-1AA0-D508BFFD3CB6}"/>
+                <a16:creationId xmlns:a16="http://schemas.microsoft.com/office/drawing/2014/main" id="{A1F9BE7C-EA47-D5AD-C0FD-D8DB5CC4B8DB}"/>
               </a:ext>
             </a:extLst>
           </p:cNvPr>
@@ -4245,7 +5688,7 @@
           <a:p>
             <a:r>
               <a:rPr lang="en-US" dirty="0"/>
-              <a:t>Challenge Demo – How to Excel in this course</a:t>
+              <a:t>What is a component?</a:t>
             </a:r>
           </a:p>
         </p:txBody>
@@ -4255,7 +5698,7 @@
           <p:cNvPr id="3" name="Content Placeholder 2">
             <a:extLst>
               <a:ext uri="{FF2B5EF4-FFF2-40B4-BE49-F238E27FC236}">
-                <a16:creationId xmlns:a16="http://schemas.microsoft.com/office/drawing/2014/main" id="{23F8E57B-9E41-4816-C2F2-1105A90F87A9}"/>
+                <a16:creationId xmlns:a16="http://schemas.microsoft.com/office/drawing/2014/main" id="{B30E42B9-BACC-C8EC-4F59-D408A375B8ED}"/>
               </a:ext>
             </a:extLst>
           </p:cNvPr>
@@ -4268,8 +5711,8 @@
         </p:nvSpPr>
         <p:spPr>
           <a:xfrm>
-            <a:off x="581192" y="2475925"/>
-            <a:ext cx="5317584" cy="1681246"/>
+            <a:off x="581193" y="2180496"/>
+            <a:ext cx="10795644" cy="3678303"/>
           </a:xfrm>
         </p:spPr>
         <p:txBody>
@@ -4278,17 +5721,231 @@
           <a:p>
             <a:r>
               <a:rPr lang="en-US" dirty="0"/>
-              <a:t>Complete a hands-on challenge</a:t>
-            </a:r>
-          </a:p>
-        </p:txBody>
-      </p:sp>
-      <p:sp>
-        <p:nvSpPr>
-          <p:cNvPr id="6" name="TextBox 5">
+              <a:t>In </a:t>
+            </a:r>
+            <a:r>
+              <a:rPr lang="en-US" b="1" dirty="0"/>
+              <a:t>Angular</a:t>
+            </a:r>
+            <a:r>
+              <a:rPr lang="en-US" dirty="0"/>
+              <a:t>, a </a:t>
+            </a:r>
+            <a:r>
+              <a:rPr lang="en-US" b="1" dirty="0"/>
+              <a:t>component</a:t>
+            </a:r>
+            <a:r>
+              <a:rPr lang="en-US" dirty="0"/>
+              <a:t> is a building block of an application that controls a specific part of the </a:t>
+            </a:r>
+            <a:r>
+              <a:rPr lang="en-US" b="1" dirty="0"/>
+              <a:t>user interface (UI)</a:t>
+            </a:r>
+            <a:r>
+              <a:rPr lang="en-US" dirty="0"/>
+              <a:t>.</a:t>
+            </a:r>
+          </a:p>
+          <a:p>
+            <a:r>
+              <a:rPr lang="en-US" dirty="0"/>
+              <a:t>A component typically consists of three main things:</a:t>
+            </a:r>
+          </a:p>
+          <a:p>
+            <a:pPr lvl="1"/>
+            <a:r>
+              <a:rPr lang="en-US" b="1" dirty="0"/>
+              <a:t>HTML template</a:t>
+            </a:r>
+            <a:r>
+              <a:rPr lang="en-US" dirty="0"/>
+              <a:t> — defines what appears on the screen.</a:t>
+            </a:r>
+          </a:p>
+          <a:p>
+            <a:pPr lvl="1"/>
+            <a:r>
+              <a:rPr lang="en-US" b="1" dirty="0"/>
+              <a:t>TypeScript class</a:t>
+            </a:r>
+            <a:r>
+              <a:rPr lang="en-US" dirty="0"/>
+              <a:t> — contains the component's data and behavior.</a:t>
+            </a:r>
+          </a:p>
+          <a:p>
+            <a:pPr lvl="1"/>
+            <a:r>
+              <a:rPr lang="en-US" b="1" dirty="0"/>
+              <a:t>CSS styles</a:t>
+            </a:r>
+            <a:r>
+              <a:rPr lang="en-US" dirty="0"/>
+              <a:t> — defines how the component looks.</a:t>
+            </a:r>
+          </a:p>
+          <a:p>
+            <a:endParaRPr lang="en-US" dirty="0"/>
+          </a:p>
+        </p:txBody>
+      </p:sp>
+    </p:spTree>
+    <p:extLst>
+      <p:ext uri="{BB962C8B-B14F-4D97-AF65-F5344CB8AC3E}">
+        <p14:creationId xmlns:p14="http://schemas.microsoft.com/office/powerpoint/2010/main" val="3416167633"/>
+      </p:ext>
+    </p:extLst>
+  </p:cSld>
+  <p:clrMapOvr>
+    <a:masterClrMapping/>
+  </p:clrMapOvr>
+</p:sld>
+</file>
+
+<file path=ppt/slides/slide5.xml><?xml version="1.0" encoding="utf-8"?>
+<p:sld xmlns:a="http://schemas.openxmlformats.org/drawingml/2006/main" xmlns:r="http://schemas.openxmlformats.org/officeDocument/2006/relationships" xmlns:p="http://schemas.openxmlformats.org/presentationml/2006/main">
+  <p:cSld>
+    <p:spTree>
+      <p:nvGrpSpPr>
+        <p:cNvPr id="1" name=""/>
+        <p:cNvGrpSpPr/>
+        <p:nvPr/>
+      </p:nvGrpSpPr>
+      <p:grpSpPr>
+        <a:xfrm>
+          <a:off x="0" y="0"/>
+          <a:ext cx="0" cy="0"/>
+          <a:chOff x="0" y="0"/>
+          <a:chExt cx="0" cy="0"/>
+        </a:xfrm>
+      </p:grpSpPr>
+      <p:sp>
+        <p:nvSpPr>
+          <p:cNvPr id="2" name="Title 1">
             <a:extLst>
               <a:ext uri="{FF2B5EF4-FFF2-40B4-BE49-F238E27FC236}">
-                <a16:creationId xmlns:a16="http://schemas.microsoft.com/office/drawing/2014/main" id="{2DE50FF0-C783-F3C0-044D-2F094F317804}"/>
+                <a16:creationId xmlns:a16="http://schemas.microsoft.com/office/drawing/2014/main" id="{F78F5337-3DBD-A5F3-DCA6-40FDE9B74554}"/>
+              </a:ext>
+            </a:extLst>
+          </p:cNvPr>
+          <p:cNvSpPr>
+            <a:spLocks noGrp="1"/>
+          </p:cNvSpPr>
+          <p:nvPr>
+            <p:ph type="title"/>
+          </p:nvPr>
+        </p:nvSpPr>
+        <p:spPr/>
+        <p:txBody>
+          <a:bodyPr/>
+          <a:lstStyle/>
+          <a:p>
+            <a:r>
+              <a:rPr lang="en-US" dirty="0"/>
+              <a:t>Angular components</a:t>
+            </a:r>
+          </a:p>
+        </p:txBody>
+      </p:sp>
+      <p:sp>
+        <p:nvSpPr>
+          <p:cNvPr id="3" name="Content Placeholder 2">
+            <a:extLst>
+              <a:ext uri="{FF2B5EF4-FFF2-40B4-BE49-F238E27FC236}">
+                <a16:creationId xmlns:a16="http://schemas.microsoft.com/office/drawing/2014/main" id="{C923574E-3EA3-202D-C0E5-E13B8B847F66}"/>
+              </a:ext>
+            </a:extLst>
+          </p:cNvPr>
+          <p:cNvSpPr>
+            <a:spLocks noGrp="1"/>
+          </p:cNvSpPr>
+          <p:nvPr>
+            <p:ph idx="1"/>
+          </p:nvPr>
+        </p:nvSpPr>
+        <p:spPr>
+          <a:xfrm>
+            <a:off x="581192" y="2180496"/>
+            <a:ext cx="5128492" cy="4337262"/>
+          </a:xfrm>
+        </p:spPr>
+        <p:txBody>
+          <a:bodyPr/>
+          <a:lstStyle/>
+          <a:p>
+            <a:r>
+              <a:rPr lang="en-US" dirty="0"/>
+              <a:t>Selector – determines how we can reference the component inside other components</a:t>
+            </a:r>
+          </a:p>
+          <a:p>
+            <a:pPr lvl="1"/>
+            <a:r>
+              <a:rPr lang="en-US" dirty="0"/>
+              <a:t>E.g. &lt;app-user&gt;&lt;/app-user&gt;</a:t>
+            </a:r>
+          </a:p>
+          <a:p>
+            <a:r>
+              <a:rPr lang="en-US" dirty="0"/>
+              <a:t>Template – the markup for the component </a:t>
+            </a:r>
+          </a:p>
+          <a:p>
+            <a:pPr lvl="1"/>
+            <a:r>
+              <a:rPr lang="en-US" dirty="0"/>
+              <a:t>More commonly, we may use </a:t>
+            </a:r>
+            <a:r>
+              <a:rPr lang="en-US" dirty="0" err="1"/>
+              <a:t>templateUrl</a:t>
+            </a:r>
+            <a:r>
+              <a:rPr lang="en-US" dirty="0"/>
+              <a:t> instead to point to a separate template file</a:t>
+            </a:r>
+          </a:p>
+          <a:p>
+            <a:r>
+              <a:rPr lang="en-US" dirty="0"/>
+              <a:t>Styles – </a:t>
+            </a:r>
+            <a:r>
+              <a:rPr lang="en-US" dirty="0" err="1"/>
+              <a:t>css</a:t>
+            </a:r>
+            <a:r>
+              <a:rPr lang="en-US" dirty="0"/>
+              <a:t> for the component </a:t>
+            </a:r>
+          </a:p>
+          <a:p>
+            <a:pPr lvl="1"/>
+            <a:r>
+              <a:rPr lang="en-US" dirty="0"/>
+              <a:t>More commonly, we may use </a:t>
+            </a:r>
+            <a:r>
+              <a:rPr lang="en-US" dirty="0" err="1"/>
+              <a:t>styleUrl</a:t>
+            </a:r>
+            <a:r>
+              <a:rPr lang="en-US" dirty="0"/>
+              <a:t> instead to point to a separate CSS stylesheet</a:t>
+            </a:r>
+          </a:p>
+        </p:txBody>
+      </p:sp>
+      <p:sp>
+        <p:nvSpPr>
+          <p:cNvPr id="5" name="TextBox 4">
+            <a:extLst>
+              <a:ext uri="{FF2B5EF4-FFF2-40B4-BE49-F238E27FC236}">
+                <a16:creationId xmlns:a16="http://schemas.microsoft.com/office/drawing/2014/main" id="{820F63B3-4293-4BE3-6C9B-133B9EE1E0DA}"/>
               </a:ext>
             </a:extLst>
           </p:cNvPr>
@@ -4297,8 +5954,8 @@
         </p:nvSpPr>
         <p:spPr>
           <a:xfrm>
-            <a:off x="1228165" y="2402747"/>
-            <a:ext cx="756938" cy="369332"/>
+            <a:off x="6206756" y="2180496"/>
+            <a:ext cx="5021226" cy="4616648"/>
           </a:xfrm>
           <a:prstGeom prst="rect">
             <a:avLst/>
@@ -4306,24 +5963,898 @@
           <a:noFill/>
         </p:spPr>
         <p:txBody>
-          <a:bodyPr wrap="none" rtlCol="0">
+          <a:bodyPr wrap="square">
             <a:spAutoFit/>
           </a:bodyPr>
           <a:lstStyle/>
           <a:p>
-            <a:r>
-              <a:rPr lang="en-US" b="1" dirty="0"/>
-              <a:t>Goal:</a:t>
-            </a:r>
-          </a:p>
-        </p:txBody>
-      </p:sp>
-      <p:sp>
-        <p:nvSpPr>
-          <p:cNvPr id="7" name="TextBox 6">
+            <a:pPr indent="0" algn="l">
+              <a:buNone/>
+            </a:pPr>
+            <a:r>
+              <a:rPr lang="en-US" sz="1400" b="0" i="0" dirty="0">
+                <a:solidFill>
+                  <a:schemeClr val="tx1"/>
+                </a:solidFill>
+                <a:effectLst/>
+                <a:latin typeface="+mn-lt"/>
+              </a:rPr>
+              <a:t>import { Component } from '@angular/core';</a:t>
+            </a:r>
+          </a:p>
+          <a:p>
+            <a:pPr indent="0" algn="l">
+              <a:buNone/>
+            </a:pPr>
+            <a:endParaRPr lang="en-US" sz="1400" b="0" i="0" dirty="0">
+              <a:solidFill>
+                <a:schemeClr val="tx1"/>
+              </a:solidFill>
+              <a:effectLst/>
+              <a:latin typeface="+mn-lt"/>
+            </a:endParaRPr>
+          </a:p>
+          <a:p>
+            <a:pPr indent="0" algn="l">
+              <a:buNone/>
+            </a:pPr>
+            <a:r>
+              <a:rPr lang="en-US" sz="1400" b="0" i="0" dirty="0">
+                <a:solidFill>
+                  <a:schemeClr val="tx1"/>
+                </a:solidFill>
+                <a:effectLst/>
+                <a:latin typeface="+mn-lt"/>
+              </a:rPr>
+              <a:t>@Component({</a:t>
+            </a:r>
+          </a:p>
+          <a:p>
+            <a:pPr indent="0" algn="l">
+              <a:buNone/>
+            </a:pPr>
+            <a:r>
+              <a:rPr lang="en-US" sz="1400" b="0" i="0" dirty="0">
+                <a:solidFill>
+                  <a:schemeClr val="tx1"/>
+                </a:solidFill>
+                <a:effectLst/>
+                <a:latin typeface="+mn-lt"/>
+              </a:rPr>
+              <a:t>  selector: 'app-user',</a:t>
+            </a:r>
+          </a:p>
+          <a:p>
+            <a:pPr indent="0" algn="l">
+              <a:buNone/>
+            </a:pPr>
+            <a:r>
+              <a:rPr lang="en-US" sz="1400" b="0" i="0" dirty="0">
+                <a:solidFill>
+                  <a:schemeClr val="tx1"/>
+                </a:solidFill>
+                <a:effectLst/>
+                <a:latin typeface="+mn-lt"/>
+              </a:rPr>
+              <a:t>  template: `</a:t>
+            </a:r>
+          </a:p>
+          <a:p>
+            <a:pPr indent="0" algn="l">
+              <a:buNone/>
+            </a:pPr>
+            <a:r>
+              <a:rPr lang="en-US" sz="1400" b="0" i="0" dirty="0">
+                <a:solidFill>
+                  <a:schemeClr val="tx1"/>
+                </a:solidFill>
+                <a:effectLst/>
+                <a:latin typeface="+mn-lt"/>
+              </a:rPr>
+              <a:t>    &lt;h1&gt;Hello, {{ name }}!&lt;/h1&gt;</a:t>
+            </a:r>
+          </a:p>
+          <a:p>
+            <a:pPr indent="0" algn="l">
+              <a:buNone/>
+            </a:pPr>
+            <a:r>
+              <a:rPr lang="en-US" sz="1400" b="0" i="0" dirty="0">
+                <a:solidFill>
+                  <a:schemeClr val="tx1"/>
+                </a:solidFill>
+                <a:effectLst/>
+                <a:latin typeface="+mn-lt"/>
+              </a:rPr>
+              <a:t>    &lt;button (click)="</a:t>
+            </a:r>
+            <a:r>
+              <a:rPr lang="en-US" sz="1400" b="0" i="0" dirty="0" err="1">
+                <a:solidFill>
+                  <a:schemeClr val="tx1"/>
+                </a:solidFill>
+                <a:effectLst/>
+                <a:latin typeface="+mn-lt"/>
+              </a:rPr>
+              <a:t>changeName</a:t>
+            </a:r>
+            <a:r>
+              <a:rPr lang="en-US" sz="1400" b="0" i="0" dirty="0">
+                <a:solidFill>
+                  <a:schemeClr val="tx1"/>
+                </a:solidFill>
+                <a:effectLst/>
+                <a:latin typeface="+mn-lt"/>
+              </a:rPr>
+              <a:t>()"&gt;Change Name&lt;/button&gt;</a:t>
+            </a:r>
+          </a:p>
+          <a:p>
+            <a:pPr indent="0" algn="l">
+              <a:buNone/>
+            </a:pPr>
+            <a:r>
+              <a:rPr lang="en-US" sz="1400" b="0" i="0" dirty="0">
+                <a:solidFill>
+                  <a:schemeClr val="tx1"/>
+                </a:solidFill>
+                <a:effectLst/>
+                <a:latin typeface="+mn-lt"/>
+              </a:rPr>
+              <a:t>  `,</a:t>
+            </a:r>
+          </a:p>
+          <a:p>
+            <a:pPr indent="0" algn="l">
+              <a:buNone/>
+            </a:pPr>
+            <a:r>
+              <a:rPr lang="en-US" sz="1400" b="0" i="0" dirty="0">
+                <a:solidFill>
+                  <a:schemeClr val="tx1"/>
+                </a:solidFill>
+                <a:effectLst/>
+                <a:latin typeface="+mn-lt"/>
+              </a:rPr>
+              <a:t>  styles: [`</a:t>
+            </a:r>
+          </a:p>
+          <a:p>
+            <a:pPr indent="0" algn="l">
+              <a:buNone/>
+            </a:pPr>
+            <a:r>
+              <a:rPr lang="en-US" sz="1400" b="0" i="0" dirty="0">
+                <a:solidFill>
+                  <a:schemeClr val="tx1"/>
+                </a:solidFill>
+                <a:effectLst/>
+                <a:latin typeface="+mn-lt"/>
+              </a:rPr>
+              <a:t>    h1 {</a:t>
+            </a:r>
+          </a:p>
+          <a:p>
+            <a:pPr indent="0" algn="l">
+              <a:buNone/>
+            </a:pPr>
+            <a:r>
+              <a:rPr lang="en-US" sz="1400" b="0" i="0" dirty="0">
+                <a:solidFill>
+                  <a:schemeClr val="tx1"/>
+                </a:solidFill>
+                <a:effectLst/>
+                <a:latin typeface="+mn-lt"/>
+              </a:rPr>
+              <a:t>      color: blue;</a:t>
+            </a:r>
+          </a:p>
+          <a:p>
+            <a:pPr indent="0" algn="l">
+              <a:buNone/>
+            </a:pPr>
+            <a:r>
+              <a:rPr lang="en-US" sz="1400" b="0" i="0" dirty="0">
+                <a:solidFill>
+                  <a:schemeClr val="tx1"/>
+                </a:solidFill>
+                <a:effectLst/>
+                <a:latin typeface="+mn-lt"/>
+              </a:rPr>
+              <a:t>    }</a:t>
+            </a:r>
+          </a:p>
+          <a:p>
+            <a:pPr indent="0" algn="l">
+              <a:buNone/>
+            </a:pPr>
+            <a:r>
+              <a:rPr lang="en-US" sz="1400" b="0" i="0" dirty="0">
+                <a:solidFill>
+                  <a:schemeClr val="tx1"/>
+                </a:solidFill>
+                <a:effectLst/>
+                <a:latin typeface="+mn-lt"/>
+              </a:rPr>
+              <a:t>  `]</a:t>
+            </a:r>
+          </a:p>
+          <a:p>
+            <a:pPr indent="0" algn="l">
+              <a:buNone/>
+            </a:pPr>
+            <a:r>
+              <a:rPr lang="en-US" sz="1400" b="0" i="0" dirty="0">
+                <a:solidFill>
+                  <a:schemeClr val="tx1"/>
+                </a:solidFill>
+                <a:effectLst/>
+                <a:latin typeface="+mn-lt"/>
+              </a:rPr>
+              <a:t>})</a:t>
+            </a:r>
+          </a:p>
+          <a:p>
+            <a:pPr indent="0" algn="l">
+              <a:buNone/>
+            </a:pPr>
+            <a:r>
+              <a:rPr lang="en-US" sz="1400" b="0" i="0" dirty="0">
+                <a:solidFill>
+                  <a:schemeClr val="tx1"/>
+                </a:solidFill>
+                <a:effectLst/>
+                <a:latin typeface="+mn-lt"/>
+              </a:rPr>
+              <a:t>export class </a:t>
+            </a:r>
+            <a:r>
+              <a:rPr lang="en-US" sz="1400" b="0" i="0" dirty="0" err="1">
+                <a:solidFill>
+                  <a:schemeClr val="tx1"/>
+                </a:solidFill>
+                <a:effectLst/>
+                <a:latin typeface="+mn-lt"/>
+              </a:rPr>
+              <a:t>UserComponent</a:t>
+            </a:r>
+            <a:r>
+              <a:rPr lang="en-US" sz="1400" b="0" i="0" dirty="0">
+                <a:solidFill>
+                  <a:schemeClr val="tx1"/>
+                </a:solidFill>
+                <a:effectLst/>
+                <a:latin typeface="+mn-lt"/>
+              </a:rPr>
+              <a:t> {</a:t>
+            </a:r>
+          </a:p>
+          <a:p>
+            <a:pPr indent="0" algn="l">
+              <a:buNone/>
+            </a:pPr>
+            <a:r>
+              <a:rPr lang="en-US" sz="1400" b="0" i="0" dirty="0">
+                <a:solidFill>
+                  <a:schemeClr val="tx1"/>
+                </a:solidFill>
+                <a:effectLst/>
+                <a:latin typeface="+mn-lt"/>
+              </a:rPr>
+              <a:t>  name = 'John';</a:t>
+            </a:r>
+          </a:p>
+          <a:p>
+            <a:pPr indent="0" algn="l">
+              <a:buNone/>
+            </a:pPr>
+            <a:endParaRPr lang="en-US" sz="1400" b="0" i="0" dirty="0">
+              <a:solidFill>
+                <a:schemeClr val="tx1"/>
+              </a:solidFill>
+              <a:effectLst/>
+              <a:latin typeface="+mn-lt"/>
+            </a:endParaRPr>
+          </a:p>
+          <a:p>
+            <a:pPr indent="0" algn="l">
+              <a:buNone/>
+            </a:pPr>
+            <a:r>
+              <a:rPr lang="en-US" sz="1400" b="0" i="0" dirty="0">
+                <a:solidFill>
+                  <a:schemeClr val="tx1"/>
+                </a:solidFill>
+                <a:effectLst/>
+                <a:latin typeface="+mn-lt"/>
+              </a:rPr>
+              <a:t>  </a:t>
+            </a:r>
+            <a:r>
+              <a:rPr lang="en-US" sz="1400" b="0" i="0" dirty="0" err="1">
+                <a:solidFill>
+                  <a:schemeClr val="tx1"/>
+                </a:solidFill>
+                <a:effectLst/>
+                <a:latin typeface="+mn-lt"/>
+              </a:rPr>
+              <a:t>changeName</a:t>
+            </a:r>
+            <a:r>
+              <a:rPr lang="en-US" sz="1400" b="0" i="0" dirty="0">
+                <a:solidFill>
+                  <a:schemeClr val="tx1"/>
+                </a:solidFill>
+                <a:effectLst/>
+                <a:latin typeface="+mn-lt"/>
+              </a:rPr>
+              <a:t>() {</a:t>
+            </a:r>
+          </a:p>
+          <a:p>
+            <a:pPr indent="0" algn="l">
+              <a:buNone/>
+            </a:pPr>
+            <a:r>
+              <a:rPr lang="en-US" sz="1400" b="0" i="0" dirty="0">
+                <a:solidFill>
+                  <a:schemeClr val="tx1"/>
+                </a:solidFill>
+                <a:effectLst/>
+                <a:latin typeface="+mn-lt"/>
+              </a:rPr>
+              <a:t>    this.name = 'Jane';</a:t>
+            </a:r>
+          </a:p>
+          <a:p>
+            <a:pPr indent="0" algn="l">
+              <a:buNone/>
+            </a:pPr>
+            <a:r>
+              <a:rPr lang="en-US" sz="1400" b="0" i="0" dirty="0">
+                <a:solidFill>
+                  <a:schemeClr val="tx1"/>
+                </a:solidFill>
+                <a:effectLst/>
+                <a:latin typeface="+mn-lt"/>
+              </a:rPr>
+              <a:t>  }</a:t>
+            </a:r>
+          </a:p>
+          <a:p>
+            <a:pPr indent="0" algn="l">
+              <a:buNone/>
+            </a:pPr>
+            <a:r>
+              <a:rPr lang="en-US" sz="1400" b="0" i="0" dirty="0">
+                <a:solidFill>
+                  <a:schemeClr val="tx1"/>
+                </a:solidFill>
+                <a:effectLst/>
+                <a:latin typeface="+mn-lt"/>
+              </a:rPr>
+              <a:t>}</a:t>
+            </a:r>
+            <a:endParaRPr lang="en-US" sz="1050" b="0" i="0" dirty="0">
+              <a:solidFill>
+                <a:srgbClr val="FFFFFF"/>
+              </a:solidFill>
+              <a:effectLst/>
+              <a:latin typeface="Courier New" panose="02070309020205020404" pitchFamily="49" charset="0"/>
+            </a:endParaRPr>
+          </a:p>
+        </p:txBody>
+      </p:sp>
+    </p:spTree>
+    <p:extLst>
+      <p:ext uri="{BB962C8B-B14F-4D97-AF65-F5344CB8AC3E}">
+        <p14:creationId xmlns:p14="http://schemas.microsoft.com/office/powerpoint/2010/main" val="1206029649"/>
+      </p:ext>
+    </p:extLst>
+  </p:cSld>
+  <p:clrMapOvr>
+    <a:masterClrMapping/>
+  </p:clrMapOvr>
+</p:sld>
+</file>
+
+<file path=ppt/slides/slide6.xml><?xml version="1.0" encoding="utf-8"?>
+<p:sld xmlns:a="http://schemas.openxmlformats.org/drawingml/2006/main" xmlns:r="http://schemas.openxmlformats.org/officeDocument/2006/relationships" xmlns:p="http://schemas.openxmlformats.org/presentationml/2006/main">
+  <p:cSld>
+    <p:spTree>
+      <p:nvGrpSpPr>
+        <p:cNvPr id="1" name=""/>
+        <p:cNvGrpSpPr/>
+        <p:nvPr/>
+      </p:nvGrpSpPr>
+      <p:grpSpPr>
+        <a:xfrm>
+          <a:off x="0" y="0"/>
+          <a:ext cx="0" cy="0"/>
+          <a:chOff x="0" y="0"/>
+          <a:chExt cx="0" cy="0"/>
+        </a:xfrm>
+      </p:grpSpPr>
+      <p:sp>
+        <p:nvSpPr>
+          <p:cNvPr id="2" name="Title 1">
             <a:extLst>
               <a:ext uri="{FF2B5EF4-FFF2-40B4-BE49-F238E27FC236}">
-                <a16:creationId xmlns:a16="http://schemas.microsoft.com/office/drawing/2014/main" id="{405306AE-2095-D0AE-E069-321DBC55370F}"/>
+                <a16:creationId xmlns:a16="http://schemas.microsoft.com/office/drawing/2014/main" id="{599B6404-B61A-438C-DD48-BC4201AA0A3A}"/>
+              </a:ext>
+            </a:extLst>
+          </p:cNvPr>
+          <p:cNvSpPr>
+            <a:spLocks noGrp="1"/>
+          </p:cNvSpPr>
+          <p:nvPr>
+            <p:ph type="title"/>
+          </p:nvPr>
+        </p:nvSpPr>
+        <p:spPr/>
+        <p:txBody>
+          <a:bodyPr/>
+          <a:lstStyle/>
+          <a:p>
+            <a:r>
+              <a:rPr lang="en-US" dirty="0"/>
+              <a:t>Another look at angular components </a:t>
+            </a:r>
+          </a:p>
+        </p:txBody>
+      </p:sp>
+      <p:sp>
+        <p:nvSpPr>
+          <p:cNvPr id="3" name="Content Placeholder 2">
+            <a:extLst>
+              <a:ext uri="{FF2B5EF4-FFF2-40B4-BE49-F238E27FC236}">
+                <a16:creationId xmlns:a16="http://schemas.microsoft.com/office/drawing/2014/main" id="{A8FC49DF-370B-D363-14E1-78B3B39E7E9A}"/>
+              </a:ext>
+            </a:extLst>
+          </p:cNvPr>
+          <p:cNvSpPr>
+            <a:spLocks noGrp="1"/>
+          </p:cNvSpPr>
+          <p:nvPr>
+            <p:ph idx="1"/>
+          </p:nvPr>
+        </p:nvSpPr>
+        <p:spPr>
+          <a:xfrm>
+            <a:off x="581193" y="2180496"/>
+            <a:ext cx="4596863" cy="4082081"/>
+          </a:xfrm>
+        </p:spPr>
+        <p:txBody>
+          <a:bodyPr>
+            <a:normAutofit lnSpcReduction="10000"/>
+          </a:bodyPr>
+          <a:lstStyle/>
+          <a:p>
+            <a:r>
+              <a:rPr lang="en-US" dirty="0"/>
+              <a:t>Here we are using separate files for the template and CSS </a:t>
+            </a:r>
+          </a:p>
+          <a:p>
+            <a:r>
+              <a:rPr lang="en-US" dirty="0"/>
+              <a:t>We are also including ‘</a:t>
+            </a:r>
+            <a:r>
+              <a:rPr lang="en-US" dirty="0" err="1"/>
+              <a:t>StudentCard</a:t>
+            </a:r>
+            <a:r>
+              <a:rPr lang="en-US" dirty="0"/>
+              <a:t>’ – another component</a:t>
+            </a:r>
+          </a:p>
+          <a:p>
+            <a:pPr lvl="1"/>
+            <a:r>
+              <a:rPr lang="en-US" dirty="0"/>
+              <a:t>Note that if we want to use one component inside another, we must import a reference to it in the parent component </a:t>
+            </a:r>
+          </a:p>
+          <a:p>
+            <a:r>
+              <a:rPr lang="en-US" dirty="0">
+                <a:solidFill>
+                  <a:schemeClr val="accent2"/>
+                </a:solidFill>
+              </a:rPr>
+              <a:t>Component Composition </a:t>
+            </a:r>
+            <a:r>
+              <a:rPr lang="en-US" dirty="0"/>
+              <a:t>– the term we use to describe how components are nested and structured to compose our application</a:t>
+            </a:r>
+          </a:p>
+          <a:p>
+            <a:r>
+              <a:rPr lang="en-US" dirty="0"/>
+              <a:t>Inside the class, we will have functions and variables that may be referenced in the component</a:t>
+            </a:r>
+          </a:p>
+        </p:txBody>
+      </p:sp>
+      <p:pic>
+        <p:nvPicPr>
+          <p:cNvPr id="7" name="Picture 6">
+            <a:extLst>
+              <a:ext uri="{FF2B5EF4-FFF2-40B4-BE49-F238E27FC236}">
+                <a16:creationId xmlns:a16="http://schemas.microsoft.com/office/drawing/2014/main" id="{37B1254F-0C70-81C1-C8F6-28C28886E246}"/>
+              </a:ext>
+            </a:extLst>
+          </p:cNvPr>
+          <p:cNvPicPr>
+            <a:picLocks noChangeAspect="1"/>
+          </p:cNvPicPr>
+          <p:nvPr/>
+        </p:nvPicPr>
+        <p:blipFill>
+          <a:blip r:embed="rId2"/>
+          <a:stretch>
+            <a:fillRect/>
+          </a:stretch>
+        </p:blipFill>
+        <p:spPr>
+          <a:xfrm>
+            <a:off x="6096000" y="2141885"/>
+            <a:ext cx="4797223" cy="4120692"/>
+          </a:xfrm>
+          <a:prstGeom prst="rect">
+            <a:avLst/>
+          </a:prstGeom>
+        </p:spPr>
+      </p:pic>
+    </p:spTree>
+    <p:extLst>
+      <p:ext uri="{BB962C8B-B14F-4D97-AF65-F5344CB8AC3E}">
+        <p14:creationId xmlns:p14="http://schemas.microsoft.com/office/powerpoint/2010/main" val="157126180"/>
+      </p:ext>
+    </p:extLst>
+  </p:cSld>
+  <p:clrMapOvr>
+    <a:masterClrMapping/>
+  </p:clrMapOvr>
+</p:sld>
+</file>
+
+<file path=ppt/slides/slide7.xml><?xml version="1.0" encoding="utf-8"?>
+<p:sld xmlns:a="http://schemas.openxmlformats.org/drawingml/2006/main" xmlns:r="http://schemas.openxmlformats.org/officeDocument/2006/relationships" xmlns:p="http://schemas.openxmlformats.org/presentationml/2006/main">
+  <p:cSld>
+    <p:spTree>
+      <p:nvGrpSpPr>
+        <p:cNvPr id="1" name=""/>
+        <p:cNvGrpSpPr/>
+        <p:nvPr/>
+      </p:nvGrpSpPr>
+      <p:grpSpPr>
+        <a:xfrm>
+          <a:off x="0" y="0"/>
+          <a:ext cx="0" cy="0"/>
+          <a:chOff x="0" y="0"/>
+          <a:chExt cx="0" cy="0"/>
+        </a:xfrm>
+      </p:grpSpPr>
+      <p:sp>
+        <p:nvSpPr>
+          <p:cNvPr id="2" name="Title 1">
+            <a:extLst>
+              <a:ext uri="{FF2B5EF4-FFF2-40B4-BE49-F238E27FC236}">
+                <a16:creationId xmlns:a16="http://schemas.microsoft.com/office/drawing/2014/main" id="{5493E84A-5181-C0EA-E47E-CA174DCFE6CA}"/>
+              </a:ext>
+            </a:extLst>
+          </p:cNvPr>
+          <p:cNvSpPr>
+            <a:spLocks noGrp="1"/>
+          </p:cNvSpPr>
+          <p:nvPr>
+            <p:ph type="title"/>
+          </p:nvPr>
+        </p:nvSpPr>
+        <p:spPr/>
+        <p:txBody>
+          <a:bodyPr/>
+          <a:lstStyle/>
+          <a:p>
+            <a:r>
+              <a:rPr lang="en-US" dirty="0"/>
+              <a:t>interfaces</a:t>
+            </a:r>
+          </a:p>
+        </p:txBody>
+      </p:sp>
+      <p:sp>
+        <p:nvSpPr>
+          <p:cNvPr id="3" name="Content Placeholder 2">
+            <a:extLst>
+              <a:ext uri="{FF2B5EF4-FFF2-40B4-BE49-F238E27FC236}">
+                <a16:creationId xmlns:a16="http://schemas.microsoft.com/office/drawing/2014/main" id="{0A2A393A-121B-B157-BD42-D85FEC334853}"/>
+              </a:ext>
+            </a:extLst>
+          </p:cNvPr>
+          <p:cNvSpPr>
+            <a:spLocks noGrp="1"/>
+          </p:cNvSpPr>
+          <p:nvPr>
+            <p:ph idx="1"/>
+          </p:nvPr>
+        </p:nvSpPr>
+        <p:spPr>
+          <a:xfrm>
+            <a:off x="581193" y="2180496"/>
+            <a:ext cx="5514808" cy="3678303"/>
+          </a:xfrm>
+        </p:spPr>
+        <p:txBody>
+          <a:bodyPr/>
+          <a:lstStyle/>
+          <a:p>
+            <a:r>
+              <a:rPr lang="en-US" dirty="0"/>
+              <a:t>We use interfaces to define custom datatypes we’d like to use in our app</a:t>
+            </a:r>
+          </a:p>
+          <a:p>
+            <a:r>
+              <a:rPr lang="en-US" dirty="0"/>
+              <a:t>You may have noticed ‘Student’ in our last example – that is an interface</a:t>
+            </a:r>
+          </a:p>
+          <a:p>
+            <a:r>
+              <a:rPr lang="en-US" dirty="0"/>
+              <a:t>To generate: </a:t>
+            </a:r>
+            <a:r>
+              <a:rPr lang="en-US" dirty="0" err="1"/>
+              <a:t>npm</a:t>
+            </a:r>
+            <a:r>
+              <a:rPr lang="en-US" dirty="0"/>
+              <a:t> run ng generate interface Student</a:t>
+            </a:r>
+          </a:p>
+          <a:p>
+            <a:endParaRPr lang="en-US" dirty="0"/>
+          </a:p>
+        </p:txBody>
+      </p:sp>
+      <p:pic>
+        <p:nvPicPr>
+          <p:cNvPr id="7" name="Picture 6">
+            <a:extLst>
+              <a:ext uri="{FF2B5EF4-FFF2-40B4-BE49-F238E27FC236}">
+                <a16:creationId xmlns:a16="http://schemas.microsoft.com/office/drawing/2014/main" id="{6B0DA48A-BE56-3D39-5F0F-29D3C8AD3190}"/>
+              </a:ext>
+            </a:extLst>
+          </p:cNvPr>
+          <p:cNvPicPr>
+            <a:picLocks noChangeAspect="1"/>
+          </p:cNvPicPr>
+          <p:nvPr/>
+        </p:nvPicPr>
+        <p:blipFill>
+          <a:blip r:embed="rId2"/>
+          <a:stretch>
+            <a:fillRect/>
+          </a:stretch>
+        </p:blipFill>
+        <p:spPr>
+          <a:xfrm>
+            <a:off x="7060646" y="2849005"/>
+            <a:ext cx="3200847" cy="2086266"/>
+          </a:xfrm>
+          <a:prstGeom prst="rect">
+            <a:avLst/>
+          </a:prstGeom>
+        </p:spPr>
+      </p:pic>
+    </p:spTree>
+    <p:extLst>
+      <p:ext uri="{BB962C8B-B14F-4D97-AF65-F5344CB8AC3E}">
+        <p14:creationId xmlns:p14="http://schemas.microsoft.com/office/powerpoint/2010/main" val="1774748570"/>
+      </p:ext>
+    </p:extLst>
+  </p:cSld>
+  <p:clrMapOvr>
+    <a:masterClrMapping/>
+  </p:clrMapOvr>
+</p:sld>
+</file>
+
+<file path=ppt/slides/slide8.xml><?xml version="1.0" encoding="utf-8"?>
+<p:sld xmlns:a="http://schemas.openxmlformats.org/drawingml/2006/main" xmlns:r="http://schemas.openxmlformats.org/officeDocument/2006/relationships" xmlns:p="http://schemas.openxmlformats.org/presentationml/2006/main">
+  <p:cSld>
+    <p:spTree>
+      <p:nvGrpSpPr>
+        <p:cNvPr id="1" name=""/>
+        <p:cNvGrpSpPr/>
+        <p:nvPr/>
+      </p:nvGrpSpPr>
+      <p:grpSpPr>
+        <a:xfrm>
+          <a:off x="0" y="0"/>
+          <a:ext cx="0" cy="0"/>
+          <a:chOff x="0" y="0"/>
+          <a:chExt cx="0" cy="0"/>
+        </a:xfrm>
+      </p:grpSpPr>
+      <p:sp>
+        <p:nvSpPr>
+          <p:cNvPr id="2" name="Title 1">
+            <a:extLst>
+              <a:ext uri="{FF2B5EF4-FFF2-40B4-BE49-F238E27FC236}">
+                <a16:creationId xmlns:a16="http://schemas.microsoft.com/office/drawing/2014/main" id="{B99472C9-61E4-C4E3-919F-F23D592374C9}"/>
+              </a:ext>
+            </a:extLst>
+          </p:cNvPr>
+          <p:cNvSpPr>
+            <a:spLocks noGrp="1"/>
+          </p:cNvSpPr>
+          <p:nvPr>
+            <p:ph type="title"/>
+          </p:nvPr>
+        </p:nvSpPr>
+        <p:spPr/>
+        <p:txBody>
+          <a:bodyPr/>
+          <a:lstStyle/>
+          <a:p>
+            <a:r>
+              <a:rPr lang="en-US" dirty="0"/>
+              <a:t>Student card &amp; Component communication</a:t>
+            </a:r>
+          </a:p>
+        </p:txBody>
+      </p:sp>
+      <p:sp>
+        <p:nvSpPr>
+          <p:cNvPr id="3" name="Content Placeholder 2">
+            <a:extLst>
+              <a:ext uri="{FF2B5EF4-FFF2-40B4-BE49-F238E27FC236}">
+                <a16:creationId xmlns:a16="http://schemas.microsoft.com/office/drawing/2014/main" id="{4031C8A6-8B5E-6588-70A1-CEFB5B9064ED}"/>
+              </a:ext>
+            </a:extLst>
+          </p:cNvPr>
+          <p:cNvSpPr>
+            <a:spLocks noGrp="1"/>
+          </p:cNvSpPr>
+          <p:nvPr>
+            <p:ph idx="1"/>
+          </p:nvPr>
+        </p:nvSpPr>
+        <p:spPr>
+          <a:xfrm>
+            <a:off x="581193" y="2180496"/>
+            <a:ext cx="4050184" cy="4082081"/>
+          </a:xfrm>
+        </p:spPr>
+        <p:txBody>
+          <a:bodyPr>
+            <a:normAutofit fontScale="92500" lnSpcReduction="10000"/>
+          </a:bodyPr>
+          <a:lstStyle/>
+          <a:p>
+            <a:r>
+              <a:rPr lang="en-US" dirty="0"/>
+              <a:t>{{ student().name }} – this is </a:t>
+            </a:r>
+            <a:r>
+              <a:rPr lang="en-US" dirty="0">
+                <a:solidFill>
+                  <a:schemeClr val="accent2"/>
+                </a:solidFill>
+              </a:rPr>
+              <a:t>interpolation</a:t>
+            </a:r>
+          </a:p>
+          <a:p>
+            <a:r>
+              <a:rPr lang="en-US" dirty="0">
+                <a:solidFill>
+                  <a:schemeClr val="accent2"/>
+                </a:solidFill>
+              </a:rPr>
+              <a:t>Interpolation </a:t>
+            </a:r>
+            <a:r>
+              <a:rPr lang="en-US" dirty="0">
+                <a:solidFill>
+                  <a:schemeClr val="tx1"/>
+                </a:solidFill>
+              </a:rPr>
+              <a:t>– is the process of reading data from component logic, i.e. the </a:t>
+            </a:r>
+            <a:r>
+              <a:rPr lang="en-US" dirty="0" err="1">
+                <a:solidFill>
+                  <a:schemeClr val="tx1"/>
+                </a:solidFill>
+              </a:rPr>
+              <a:t>ts</a:t>
+            </a:r>
+            <a:r>
+              <a:rPr lang="en-US" dirty="0">
+                <a:solidFill>
+                  <a:schemeClr val="tx1"/>
+                </a:solidFill>
+              </a:rPr>
+              <a:t> file </a:t>
+            </a:r>
+          </a:p>
+          <a:p>
+            <a:r>
+              <a:rPr lang="en-US" dirty="0">
+                <a:solidFill>
+                  <a:schemeClr val="tx1"/>
+                </a:solidFill>
+              </a:rPr>
+              <a:t>Since the data is coming from an input, we use ‘signal’ syntax, i.e. ‘student()’ (more on signal later)</a:t>
+            </a:r>
+          </a:p>
+          <a:p>
+            <a:r>
+              <a:rPr lang="en-US" dirty="0">
+                <a:solidFill>
+                  <a:schemeClr val="tx1"/>
+                </a:solidFill>
+              </a:rPr>
+              <a:t>Regular properties may be called directly, i.e. ‘</a:t>
+            </a:r>
+            <a:r>
+              <a:rPr lang="en-US" dirty="0" err="1">
+                <a:solidFill>
+                  <a:schemeClr val="tx1"/>
+                </a:solidFill>
+              </a:rPr>
+              <a:t>regularProp</a:t>
+            </a:r>
+            <a:r>
+              <a:rPr lang="en-US" dirty="0">
+                <a:solidFill>
+                  <a:schemeClr val="tx1"/>
+                </a:solidFill>
+              </a:rPr>
+              <a:t>’</a:t>
+            </a:r>
+          </a:p>
+          <a:p>
+            <a:r>
+              <a:rPr lang="en-US" dirty="0">
+                <a:solidFill>
+                  <a:schemeClr val="tx1"/>
+                </a:solidFill>
+              </a:rPr>
+              <a:t>Input – allows us to take in data from a parent component</a:t>
+            </a:r>
+          </a:p>
+          <a:p>
+            <a:r>
+              <a:rPr lang="en-US" dirty="0">
+                <a:solidFill>
+                  <a:schemeClr val="tx1"/>
+                </a:solidFill>
+              </a:rPr>
+              <a:t>Output – allows us to emit data to a parent component </a:t>
+            </a:r>
+            <a:endParaRPr lang="en-US" dirty="0">
+              <a:solidFill>
+                <a:schemeClr val="accent2"/>
+              </a:solidFill>
+            </a:endParaRPr>
+          </a:p>
+        </p:txBody>
+      </p:sp>
+      <p:sp>
+        <p:nvSpPr>
+          <p:cNvPr id="8" name="TextBox 7">
+            <a:extLst>
+              <a:ext uri="{FF2B5EF4-FFF2-40B4-BE49-F238E27FC236}">
+                <a16:creationId xmlns:a16="http://schemas.microsoft.com/office/drawing/2014/main" id="{738AB20F-FD37-DB58-7AB4-C948FB4B89C3}"/>
               </a:ext>
             </a:extLst>
           </p:cNvPr>
@@ -4332,8 +6863,8 @@
         </p:nvSpPr>
         <p:spPr>
           <a:xfrm>
-            <a:off x="6949165" y="2402747"/>
-            <a:ext cx="4661643" cy="369332"/>
+            <a:off x="5231941" y="1796852"/>
+            <a:ext cx="2565070" cy="369332"/>
           </a:xfrm>
           <a:prstGeom prst="rect">
             <a:avLst/>
@@ -4347,251 +6878,400 @@
           <a:lstStyle/>
           <a:p>
             <a:r>
-              <a:rPr lang="en-US" b="1" dirty="0"/>
-              <a:t>Scenario:  			   5 min</a:t>
-            </a:r>
-          </a:p>
-        </p:txBody>
-      </p:sp>
-      <p:sp>
-        <p:nvSpPr>
-          <p:cNvPr id="8" name="Content Placeholder 2">
+              <a:rPr lang="en-US" dirty="0"/>
+              <a:t>Template (html file):</a:t>
+            </a:r>
+          </a:p>
+        </p:txBody>
+      </p:sp>
+      <p:sp>
+        <p:nvSpPr>
+          <p:cNvPr id="9" name="TextBox 8">
             <a:extLst>
               <a:ext uri="{FF2B5EF4-FFF2-40B4-BE49-F238E27FC236}">
-                <a16:creationId xmlns:a16="http://schemas.microsoft.com/office/drawing/2014/main" id="{61B443B1-E14C-64AB-9E9D-75FFCF923C2B}"/>
+                <a16:creationId xmlns:a16="http://schemas.microsoft.com/office/drawing/2014/main" id="{3DBB7298-959A-37BE-64D7-2386C76050FC}"/>
               </a:ext>
             </a:extLst>
           </p:cNvPr>
-          <p:cNvSpPr txBox="1">
-            <a:spLocks/>
-          </p:cNvSpPr>
+          <p:cNvSpPr txBox="1"/>
           <p:nvPr/>
         </p:nvSpPr>
+        <p:spPr>
+          <a:xfrm flipH="1">
+            <a:off x="5231941" y="3059668"/>
+            <a:ext cx="2194759" cy="369332"/>
+          </a:xfrm>
+          <a:prstGeom prst="rect">
+            <a:avLst/>
+          </a:prstGeom>
+          <a:noFill/>
+        </p:spPr>
+        <p:txBody>
+          <a:bodyPr wrap="square" rtlCol="0">
+            <a:spAutoFit/>
+          </a:bodyPr>
+          <a:lstStyle/>
+          <a:p>
+            <a:r>
+              <a:rPr lang="en-US" dirty="0" err="1"/>
+              <a:t>StudentCard</a:t>
+            </a:r>
+            <a:r>
+              <a:rPr lang="en-US" dirty="0"/>
+              <a:t> </a:t>
+            </a:r>
+            <a:r>
+              <a:rPr lang="en-US" dirty="0" err="1"/>
+              <a:t>ts</a:t>
+            </a:r>
+            <a:r>
+              <a:rPr lang="en-US" dirty="0"/>
+              <a:t> file:</a:t>
+            </a:r>
+          </a:p>
+        </p:txBody>
+      </p:sp>
+      <p:pic>
+        <p:nvPicPr>
+          <p:cNvPr id="17" name="Picture 16">
+            <a:extLst>
+              <a:ext uri="{FF2B5EF4-FFF2-40B4-BE49-F238E27FC236}">
+                <a16:creationId xmlns:a16="http://schemas.microsoft.com/office/drawing/2014/main" id="{79B497D4-E6B0-78DB-F63A-3611159E9734}"/>
+              </a:ext>
+            </a:extLst>
+          </p:cNvPr>
+          <p:cNvPicPr>
+            <a:picLocks noChangeAspect="1"/>
+          </p:cNvPicPr>
+          <p:nvPr/>
+        </p:nvPicPr>
+        <p:blipFill>
+          <a:blip r:embed="rId2"/>
+          <a:stretch>
+            <a:fillRect/>
+          </a:stretch>
+        </p:blipFill>
         <p:spPr>
           <a:xfrm>
-            <a:off x="6545749" y="2772079"/>
-            <a:ext cx="4661642" cy="1681246"/>
+            <a:off x="5231941" y="2166184"/>
+            <a:ext cx="5308096" cy="928917"/>
           </a:xfrm>
           <a:prstGeom prst="rect">
             <a:avLst/>
           </a:prstGeom>
         </p:spPr>
-        <p:txBody>
-          <a:bodyPr vert="horz" lIns="91440" tIns="45720" rIns="91440" bIns="45720" rtlCol="0" anchor="ctr">
-            <a:normAutofit/>
-          </a:bodyPr>
-          <a:lstStyle>
-            <a:lvl1pPr marL="306000" indent="-306000" algn="l" defTabSz="457200" rtl="0" eaLnBrk="1" latinLnBrk="0" hangingPunct="1">
-              <a:spcBef>
-                <a:spcPct val="20000"/>
-              </a:spcBef>
-              <a:spcAft>
-                <a:spcPts val="600"/>
-              </a:spcAft>
-              <a:buClr>
-                <a:schemeClr val="accent2"/>
-              </a:buClr>
-              <a:buSzPct val="92000"/>
-              <a:buFont typeface="Wingdings 2" panose="05020102010507070707" pitchFamily="18" charset="2"/>
-              <a:buChar char=""/>
-              <a:defRPr sz="1800" kern="1200">
-                <a:solidFill>
-                  <a:schemeClr val="tx2"/>
-                </a:solidFill>
-                <a:latin typeface="+mn-lt"/>
-                <a:ea typeface="+mn-ea"/>
-                <a:cs typeface="+mn-cs"/>
-              </a:defRPr>
-            </a:lvl1pPr>
-            <a:lvl2pPr marL="630000" indent="-306000" algn="l" defTabSz="457200" rtl="0" eaLnBrk="1" latinLnBrk="0" hangingPunct="1">
-              <a:spcBef>
-                <a:spcPct val="20000"/>
-              </a:spcBef>
-              <a:spcAft>
-                <a:spcPts val="600"/>
-              </a:spcAft>
-              <a:buClr>
-                <a:schemeClr val="accent2"/>
-              </a:buClr>
-              <a:buSzPct val="92000"/>
-              <a:buFont typeface="Wingdings 2" panose="05020102010507070707" pitchFamily="18" charset="2"/>
-              <a:buChar char=""/>
-              <a:defRPr sz="1600" kern="1200">
-                <a:solidFill>
-                  <a:schemeClr val="tx2"/>
-                </a:solidFill>
-                <a:latin typeface="+mn-lt"/>
-                <a:ea typeface="+mn-ea"/>
-                <a:cs typeface="+mn-cs"/>
-              </a:defRPr>
-            </a:lvl2pPr>
-            <a:lvl3pPr marL="900000" indent="-270000" algn="l" defTabSz="457200" rtl="0" eaLnBrk="1" latinLnBrk="0" hangingPunct="1">
-              <a:spcBef>
-                <a:spcPct val="20000"/>
-              </a:spcBef>
-              <a:spcAft>
-                <a:spcPts val="600"/>
-              </a:spcAft>
-              <a:buClr>
-                <a:schemeClr val="accent2"/>
-              </a:buClr>
-              <a:buSzPct val="92000"/>
-              <a:buFont typeface="Wingdings 2" panose="05020102010507070707" pitchFamily="18" charset="2"/>
-              <a:buChar char=""/>
-              <a:defRPr sz="1400" kern="1200">
-                <a:solidFill>
-                  <a:schemeClr val="tx2"/>
-                </a:solidFill>
-                <a:latin typeface="+mn-lt"/>
-                <a:ea typeface="+mn-ea"/>
-                <a:cs typeface="+mn-cs"/>
-              </a:defRPr>
-            </a:lvl3pPr>
-            <a:lvl4pPr marL="1242000" indent="-234000" algn="l" defTabSz="457200" rtl="0" eaLnBrk="1" latinLnBrk="0" hangingPunct="1">
-              <a:spcBef>
-                <a:spcPct val="20000"/>
-              </a:spcBef>
-              <a:spcAft>
-                <a:spcPts val="600"/>
-              </a:spcAft>
-              <a:buClr>
-                <a:schemeClr val="accent2"/>
-              </a:buClr>
-              <a:buSzPct val="92000"/>
-              <a:buFont typeface="Wingdings 2" panose="05020102010507070707" pitchFamily="18" charset="2"/>
-              <a:buChar char=""/>
-              <a:defRPr sz="1200" kern="1200">
-                <a:solidFill>
-                  <a:schemeClr val="tx2"/>
-                </a:solidFill>
-                <a:latin typeface="+mn-lt"/>
-                <a:ea typeface="+mn-ea"/>
-                <a:cs typeface="+mn-cs"/>
-              </a:defRPr>
-            </a:lvl4pPr>
-            <a:lvl5pPr marL="1602000" indent="-234000" algn="l" defTabSz="457200" rtl="0" eaLnBrk="1" latinLnBrk="0" hangingPunct="1">
-              <a:spcBef>
-                <a:spcPct val="20000"/>
-              </a:spcBef>
-              <a:spcAft>
-                <a:spcPts val="600"/>
-              </a:spcAft>
-              <a:buClr>
-                <a:schemeClr val="accent2"/>
-              </a:buClr>
-              <a:buSzPct val="92000"/>
-              <a:buFont typeface="Wingdings 2" panose="05020102010507070707" pitchFamily="18" charset="2"/>
-              <a:buChar char=""/>
-              <a:defRPr sz="1200" kern="1200">
-                <a:solidFill>
-                  <a:schemeClr val="tx2"/>
-                </a:solidFill>
-                <a:latin typeface="+mn-lt"/>
-                <a:ea typeface="+mn-ea"/>
-                <a:cs typeface="+mn-cs"/>
-              </a:defRPr>
-            </a:lvl5pPr>
-            <a:lvl6pPr marL="1900000" indent="-228600" algn="l" defTabSz="457200" rtl="0" eaLnBrk="1" latinLnBrk="0" hangingPunct="1">
-              <a:spcBef>
-                <a:spcPct val="20000"/>
-              </a:spcBef>
-              <a:spcAft>
-                <a:spcPts val="600"/>
-              </a:spcAft>
-              <a:buClr>
-                <a:schemeClr val="accent2"/>
-              </a:buClr>
-              <a:buSzPct val="92000"/>
-              <a:buFont typeface="Wingdings 2" panose="05020102010507070707" pitchFamily="18" charset="2"/>
-              <a:buChar char=""/>
-              <a:defRPr sz="1200" kern="1200">
-                <a:solidFill>
-                  <a:schemeClr val="tx2"/>
-                </a:solidFill>
-                <a:latin typeface="+mn-lt"/>
-                <a:ea typeface="+mn-ea"/>
-                <a:cs typeface="+mn-cs"/>
-              </a:defRPr>
-            </a:lvl6pPr>
-            <a:lvl7pPr marL="2200000" indent="-228600" algn="l" defTabSz="457200" rtl="0" eaLnBrk="1" latinLnBrk="0" hangingPunct="1">
-              <a:spcBef>
-                <a:spcPct val="20000"/>
-              </a:spcBef>
-              <a:spcAft>
-                <a:spcPts val="600"/>
-              </a:spcAft>
-              <a:buClr>
-                <a:schemeClr val="accent2"/>
-              </a:buClr>
-              <a:buSzPct val="92000"/>
-              <a:buFont typeface="Wingdings 2" panose="05020102010507070707" pitchFamily="18" charset="2"/>
-              <a:buChar char=""/>
-              <a:defRPr sz="1200" kern="1200">
-                <a:solidFill>
-                  <a:schemeClr val="tx2"/>
-                </a:solidFill>
-                <a:latin typeface="+mn-lt"/>
-                <a:ea typeface="+mn-ea"/>
-                <a:cs typeface="+mn-cs"/>
-              </a:defRPr>
-            </a:lvl7pPr>
-            <a:lvl8pPr marL="2500000" indent="-228600" algn="l" defTabSz="457200" rtl="0" eaLnBrk="1" latinLnBrk="0" hangingPunct="1">
-              <a:spcBef>
-                <a:spcPct val="20000"/>
-              </a:spcBef>
-              <a:spcAft>
-                <a:spcPts val="600"/>
-              </a:spcAft>
-              <a:buClr>
-                <a:schemeClr val="accent2"/>
-              </a:buClr>
-              <a:buSzPct val="92000"/>
-              <a:buFont typeface="Wingdings 2" panose="05020102010507070707" pitchFamily="18" charset="2"/>
-              <a:buChar char=""/>
-              <a:defRPr sz="1200" kern="1200">
-                <a:solidFill>
-                  <a:schemeClr val="tx2"/>
-                </a:solidFill>
-                <a:latin typeface="+mn-lt"/>
-                <a:ea typeface="+mn-ea"/>
-                <a:cs typeface="+mn-cs"/>
-              </a:defRPr>
-            </a:lvl8pPr>
-            <a:lvl9pPr marL="2800000" indent="-228600" algn="l" defTabSz="457200" rtl="0" eaLnBrk="1" latinLnBrk="0" hangingPunct="1">
-              <a:spcBef>
-                <a:spcPct val="20000"/>
-              </a:spcBef>
-              <a:spcAft>
-                <a:spcPts val="600"/>
-              </a:spcAft>
-              <a:buClr>
-                <a:schemeClr val="accent2"/>
-              </a:buClr>
-              <a:buSzPct val="92000"/>
-              <a:buFont typeface="Wingdings 2" panose="05020102010507070707" pitchFamily="18" charset="2"/>
-              <a:buChar char=""/>
-              <a:defRPr sz="1200" kern="1200">
-                <a:solidFill>
-                  <a:schemeClr val="tx2"/>
-                </a:solidFill>
-                <a:latin typeface="+mn-lt"/>
-                <a:ea typeface="+mn-ea"/>
-                <a:cs typeface="+mn-cs"/>
-              </a:defRPr>
-            </a:lvl9pPr>
-          </a:lstStyle>
-          <a:p>
-            <a:r>
-              <a:rPr lang="en-US" dirty="0"/>
-              <a:t>Your organization needs to relay technical concepts to you. Clients often need to do the same. Take a few moments to get some pen and paper ready to take notes. </a:t>
-            </a:r>
-          </a:p>
-        </p:txBody>
-      </p:sp>
+      </p:pic>
+      <p:pic>
+        <p:nvPicPr>
+          <p:cNvPr id="19" name="Picture 18">
+            <a:extLst>
+              <a:ext uri="{FF2B5EF4-FFF2-40B4-BE49-F238E27FC236}">
+                <a16:creationId xmlns:a16="http://schemas.microsoft.com/office/drawing/2014/main" id="{390547ED-37BD-342A-2A7B-1ACAB99C3858}"/>
+              </a:ext>
+            </a:extLst>
+          </p:cNvPr>
+          <p:cNvPicPr>
+            <a:picLocks noChangeAspect="1"/>
+          </p:cNvPicPr>
+          <p:nvPr/>
+        </p:nvPicPr>
+        <p:blipFill>
+          <a:blip r:embed="rId3"/>
+          <a:stretch>
+            <a:fillRect/>
+          </a:stretch>
+        </p:blipFill>
+        <p:spPr>
+          <a:xfrm>
+            <a:off x="5901021" y="3429000"/>
+            <a:ext cx="3969935" cy="3420525"/>
+          </a:xfrm>
+          <a:prstGeom prst="rect">
+            <a:avLst/>
+          </a:prstGeom>
+        </p:spPr>
+      </p:pic>
     </p:spTree>
     <p:extLst>
       <p:ext uri="{BB962C8B-B14F-4D97-AF65-F5344CB8AC3E}">
-        <p14:creationId xmlns:p14="http://schemas.microsoft.com/office/powerpoint/2010/main" val="3587871389"/>
+        <p14:creationId xmlns:p14="http://schemas.microsoft.com/office/powerpoint/2010/main" val="2082573321"/>
+      </p:ext>
+    </p:extLst>
+  </p:cSld>
+  <p:clrMapOvr>
+    <a:masterClrMapping/>
+  </p:clrMapOvr>
+</p:sld>
+</file>
+
+<file path=ppt/slides/slide9.xml><?xml version="1.0" encoding="utf-8"?>
+<p:sld xmlns:a="http://schemas.openxmlformats.org/drawingml/2006/main" xmlns:r="http://schemas.openxmlformats.org/officeDocument/2006/relationships" xmlns:p="http://schemas.openxmlformats.org/presentationml/2006/main">
+  <p:cSld>
+    <p:spTree>
+      <p:nvGrpSpPr>
+        <p:cNvPr id="1" name=""/>
+        <p:cNvGrpSpPr/>
+        <p:nvPr/>
+      </p:nvGrpSpPr>
+      <p:grpSpPr>
+        <a:xfrm>
+          <a:off x="0" y="0"/>
+          <a:ext cx="0" cy="0"/>
+          <a:chOff x="0" y="0"/>
+          <a:chExt cx="0" cy="0"/>
+        </a:xfrm>
+      </p:grpSpPr>
+      <p:sp>
+        <p:nvSpPr>
+          <p:cNvPr id="2" name="Title 1">
+            <a:extLst>
+              <a:ext uri="{FF2B5EF4-FFF2-40B4-BE49-F238E27FC236}">
+                <a16:creationId xmlns:a16="http://schemas.microsoft.com/office/drawing/2014/main" id="{3376D123-2065-07F5-E05C-458EABA446F2}"/>
+              </a:ext>
+            </a:extLst>
+          </p:cNvPr>
+          <p:cNvSpPr>
+            <a:spLocks noGrp="1"/>
+          </p:cNvSpPr>
+          <p:nvPr>
+            <p:ph type="title"/>
+          </p:nvPr>
+        </p:nvSpPr>
+        <p:spPr/>
+        <p:txBody>
+          <a:bodyPr/>
+          <a:lstStyle/>
+          <a:p>
+            <a:r>
+              <a:rPr lang="en-US" dirty="0"/>
+              <a:t>Home component &amp; component communication</a:t>
+            </a:r>
+          </a:p>
+        </p:txBody>
+      </p:sp>
+      <p:sp>
+        <p:nvSpPr>
+          <p:cNvPr id="3" name="Content Placeholder 2">
+            <a:extLst>
+              <a:ext uri="{FF2B5EF4-FFF2-40B4-BE49-F238E27FC236}">
+                <a16:creationId xmlns:a16="http://schemas.microsoft.com/office/drawing/2014/main" id="{0BB51B84-04D9-2F57-A75B-56F466FA26F7}"/>
+              </a:ext>
+            </a:extLst>
+          </p:cNvPr>
+          <p:cNvSpPr>
+            <a:spLocks noGrp="1"/>
+          </p:cNvSpPr>
+          <p:nvPr>
+            <p:ph idx="1"/>
+          </p:nvPr>
+        </p:nvSpPr>
+        <p:spPr>
+          <a:xfrm>
+            <a:off x="581192" y="2180496"/>
+            <a:ext cx="6202380" cy="1821487"/>
+          </a:xfrm>
+        </p:spPr>
+        <p:txBody>
+          <a:bodyPr>
+            <a:normAutofit fontScale="85000" lnSpcReduction="20000"/>
+          </a:bodyPr>
+          <a:lstStyle/>
+          <a:p>
+            <a:r>
+              <a:rPr lang="en-US" dirty="0"/>
+              <a:t>[student]=“student” – this is </a:t>
+            </a:r>
+            <a:r>
+              <a:rPr lang="en-US" dirty="0">
+                <a:solidFill>
+                  <a:schemeClr val="accent2"/>
+                </a:solidFill>
+              </a:rPr>
+              <a:t>property binding</a:t>
+            </a:r>
+            <a:r>
+              <a:rPr lang="en-US" dirty="0"/>
+              <a:t>, it is passing the value of student down to the input expected in the child component </a:t>
+            </a:r>
+          </a:p>
+          <a:p>
+            <a:r>
+              <a:rPr lang="en-US" dirty="0"/>
+              <a:t>(selected)=“</a:t>
+            </a:r>
+            <a:r>
+              <a:rPr lang="en-US" dirty="0" err="1"/>
+              <a:t>onStudentSelected</a:t>
+            </a:r>
+            <a:r>
+              <a:rPr lang="en-US" dirty="0"/>
+              <a:t>” – this is </a:t>
+            </a:r>
+            <a:r>
+              <a:rPr lang="en-US" dirty="0">
+                <a:solidFill>
+                  <a:schemeClr val="accent2"/>
+                </a:solidFill>
+              </a:rPr>
+              <a:t>event binding</a:t>
+            </a:r>
+            <a:r>
+              <a:rPr lang="en-US" dirty="0"/>
+              <a:t>, it is listening for the ‘selected’ even emitted in the child component</a:t>
+            </a:r>
+          </a:p>
+          <a:p>
+            <a:r>
+              <a:rPr lang="en-US" dirty="0"/>
+              <a:t>@if – control flow block for conditional rendering</a:t>
+            </a:r>
+          </a:p>
+          <a:p>
+            <a:r>
+              <a:rPr lang="en-US" dirty="0"/>
+              <a:t>@for – control flow block for iteration; important to use ‘track’ on unique elements</a:t>
+            </a:r>
+          </a:p>
+        </p:txBody>
+      </p:sp>
+      <p:pic>
+        <p:nvPicPr>
+          <p:cNvPr id="5" name="Picture 4">
+            <a:extLst>
+              <a:ext uri="{FF2B5EF4-FFF2-40B4-BE49-F238E27FC236}">
+                <a16:creationId xmlns:a16="http://schemas.microsoft.com/office/drawing/2014/main" id="{6987A6A8-04F5-D0EE-6682-B7E181B0A62C}"/>
+              </a:ext>
+            </a:extLst>
+          </p:cNvPr>
+          <p:cNvPicPr>
+            <a:picLocks noChangeAspect="1"/>
+          </p:cNvPicPr>
+          <p:nvPr/>
+        </p:nvPicPr>
+        <p:blipFill>
+          <a:blip r:embed="rId2"/>
+          <a:stretch>
+            <a:fillRect/>
+          </a:stretch>
+        </p:blipFill>
+        <p:spPr>
+          <a:xfrm>
+            <a:off x="1217678" y="4353580"/>
+            <a:ext cx="3949959" cy="2323506"/>
+          </a:xfrm>
+          <a:prstGeom prst="rect">
+            <a:avLst/>
+          </a:prstGeom>
+        </p:spPr>
+      </p:pic>
+      <p:pic>
+        <p:nvPicPr>
+          <p:cNvPr id="7" name="Picture 6">
+            <a:extLst>
+              <a:ext uri="{FF2B5EF4-FFF2-40B4-BE49-F238E27FC236}">
+                <a16:creationId xmlns:a16="http://schemas.microsoft.com/office/drawing/2014/main" id="{B3D60E2D-68E0-4BFF-44AF-7AB006145BBB}"/>
+              </a:ext>
+            </a:extLst>
+          </p:cNvPr>
+          <p:cNvPicPr>
+            <a:picLocks noChangeAspect="1"/>
+          </p:cNvPicPr>
+          <p:nvPr/>
+        </p:nvPicPr>
+        <p:blipFill>
+          <a:blip r:embed="rId3"/>
+          <a:stretch>
+            <a:fillRect/>
+          </a:stretch>
+        </p:blipFill>
+        <p:spPr>
+          <a:xfrm>
+            <a:off x="6982550" y="2180497"/>
+            <a:ext cx="3991772" cy="4502829"/>
+          </a:xfrm>
+          <a:prstGeom prst="rect">
+            <a:avLst/>
+          </a:prstGeom>
+        </p:spPr>
+      </p:pic>
+      <p:sp>
+        <p:nvSpPr>
+          <p:cNvPr id="8" name="TextBox 7">
+            <a:extLst>
+              <a:ext uri="{FF2B5EF4-FFF2-40B4-BE49-F238E27FC236}">
+                <a16:creationId xmlns:a16="http://schemas.microsoft.com/office/drawing/2014/main" id="{3DA2AD0E-D72D-6352-EEF4-BB0F566647B7}"/>
+              </a:ext>
+            </a:extLst>
+          </p:cNvPr>
+          <p:cNvSpPr txBox="1"/>
+          <p:nvPr/>
+        </p:nvSpPr>
+        <p:spPr>
+          <a:xfrm>
+            <a:off x="1710047" y="4001984"/>
+            <a:ext cx="1296958" cy="369332"/>
+          </a:xfrm>
+          <a:prstGeom prst="rect">
+            <a:avLst/>
+          </a:prstGeom>
+          <a:noFill/>
+        </p:spPr>
+        <p:txBody>
+          <a:bodyPr wrap="none" rtlCol="0">
+            <a:spAutoFit/>
+          </a:bodyPr>
+          <a:lstStyle/>
+          <a:p>
+            <a:r>
+              <a:rPr lang="en-US" dirty="0"/>
+              <a:t>Home.html:</a:t>
+            </a:r>
+          </a:p>
+        </p:txBody>
+      </p:sp>
+      <p:sp>
+        <p:nvSpPr>
+          <p:cNvPr id="10" name="TextBox 9">
+            <a:extLst>
+              <a:ext uri="{FF2B5EF4-FFF2-40B4-BE49-F238E27FC236}">
+                <a16:creationId xmlns:a16="http://schemas.microsoft.com/office/drawing/2014/main" id="{0A8B7BBF-84FD-9B4E-BFAA-FB5B0E02C966}"/>
+              </a:ext>
+            </a:extLst>
+          </p:cNvPr>
+          <p:cNvSpPr txBox="1"/>
+          <p:nvPr/>
+        </p:nvSpPr>
+        <p:spPr>
+          <a:xfrm>
+            <a:off x="6982550" y="1811165"/>
+            <a:ext cx="1040478" cy="369332"/>
+          </a:xfrm>
+          <a:prstGeom prst="rect">
+            <a:avLst/>
+          </a:prstGeom>
+          <a:noFill/>
+        </p:spPr>
+        <p:txBody>
+          <a:bodyPr wrap="none" rtlCol="0">
+            <a:spAutoFit/>
+          </a:bodyPr>
+          <a:lstStyle/>
+          <a:p>
+            <a:r>
+              <a:rPr lang="en-US" dirty="0" err="1"/>
+              <a:t>Home.ts</a:t>
+            </a:r>
+            <a:r>
+              <a:rPr lang="en-US" dirty="0"/>
+              <a:t>:</a:t>
+            </a:r>
+          </a:p>
+        </p:txBody>
+      </p:sp>
+    </p:spTree>
+    <p:extLst>
+      <p:ext uri="{BB962C8B-B14F-4D97-AF65-F5344CB8AC3E}">
+        <p14:creationId xmlns:p14="http://schemas.microsoft.com/office/powerpoint/2010/main" val="2711382551"/>
       </p:ext>
     </p:extLst>
   </p:cSld>

--- a/Week_7/Angular.pptx
+++ b/Week_7/Angular.pptx
@@ -17,6 +17,14 @@
     <p:sldId id="352" r:id="rId11"/>
     <p:sldId id="353" r:id="rId12"/>
     <p:sldId id="262" r:id="rId13"/>
+    <p:sldId id="354" r:id="rId14"/>
+    <p:sldId id="355" r:id="rId15"/>
+    <p:sldId id="305" r:id="rId16"/>
+    <p:sldId id="356" r:id="rId17"/>
+    <p:sldId id="357" r:id="rId18"/>
+    <p:sldId id="358" r:id="rId19"/>
+    <p:sldId id="359" r:id="rId20"/>
+    <p:sldId id="360" r:id="rId21"/>
   </p:sldIdLst>
   <p:sldSz cx="12192000" cy="6858000"/>
   <p:notesSz cx="6858000" cy="9144000"/>
@@ -5329,6 +5337,1725 @@
 </p:sld>
 </file>
 
+<file path=ppt/slides/slide13.xml><?xml version="1.0" encoding="utf-8"?>
+<p:sld xmlns:a="http://schemas.openxmlformats.org/drawingml/2006/main" xmlns:r="http://schemas.openxmlformats.org/officeDocument/2006/relationships" xmlns:p="http://schemas.openxmlformats.org/presentationml/2006/main">
+  <p:cSld>
+    <p:spTree>
+      <p:nvGrpSpPr>
+        <p:cNvPr id="1" name=""/>
+        <p:cNvGrpSpPr/>
+        <p:nvPr/>
+      </p:nvGrpSpPr>
+      <p:grpSpPr>
+        <a:xfrm>
+          <a:off x="0" y="0"/>
+          <a:ext cx="0" cy="0"/>
+          <a:chOff x="0" y="0"/>
+          <a:chExt cx="0" cy="0"/>
+        </a:xfrm>
+      </p:grpSpPr>
+      <p:sp>
+        <p:nvSpPr>
+          <p:cNvPr id="2" name="Title 1">
+            <a:extLst>
+              <a:ext uri="{FF2B5EF4-FFF2-40B4-BE49-F238E27FC236}">
+                <a16:creationId xmlns:a16="http://schemas.microsoft.com/office/drawing/2014/main" id="{E0530CB9-FF70-7B90-3B91-0805FF89143A}"/>
+              </a:ext>
+            </a:extLst>
+          </p:cNvPr>
+          <p:cNvSpPr>
+            <a:spLocks noGrp="1"/>
+          </p:cNvSpPr>
+          <p:nvPr>
+            <p:ph type="title"/>
+          </p:nvPr>
+        </p:nvSpPr>
+        <p:spPr/>
+        <p:txBody>
+          <a:bodyPr/>
+          <a:lstStyle/>
+          <a:p>
+            <a:r>
+              <a:rPr lang="en-US" dirty="0"/>
+              <a:t>Angular services</a:t>
+            </a:r>
+          </a:p>
+        </p:txBody>
+      </p:sp>
+      <p:sp>
+        <p:nvSpPr>
+          <p:cNvPr id="3" name="Content Placeholder 2">
+            <a:extLst>
+              <a:ext uri="{FF2B5EF4-FFF2-40B4-BE49-F238E27FC236}">
+                <a16:creationId xmlns:a16="http://schemas.microsoft.com/office/drawing/2014/main" id="{130C7E3B-8986-9925-5969-B1531C77E970}"/>
+              </a:ext>
+            </a:extLst>
+          </p:cNvPr>
+          <p:cNvSpPr>
+            <a:spLocks noGrp="1"/>
+          </p:cNvSpPr>
+          <p:nvPr>
+            <p:ph idx="1"/>
+          </p:nvPr>
+        </p:nvSpPr>
+        <p:spPr>
+          <a:xfrm>
+            <a:off x="581192" y="2180496"/>
+            <a:ext cx="4969003" cy="4337262"/>
+          </a:xfrm>
+        </p:spPr>
+        <p:txBody>
+          <a:bodyPr/>
+          <a:lstStyle/>
+          <a:p>
+            <a:r>
+              <a:rPr lang="en-US" i="1" dirty="0"/>
+              <a:t>Angular services</a:t>
+            </a:r>
+            <a:r>
+              <a:rPr lang="en-US" dirty="0"/>
+              <a:t> provide a way for you to separate Angular app data and functions that can be used by multiple components in your app. To be used by multiple components, a service must be made </a:t>
+            </a:r>
+            <a:r>
+              <a:rPr lang="en-US" i="1" dirty="0"/>
+              <a:t>injectable</a:t>
+            </a:r>
+            <a:r>
+              <a:rPr lang="en-US" dirty="0"/>
+              <a:t>. </a:t>
+            </a:r>
+          </a:p>
+          <a:p>
+            <a:r>
+              <a:rPr lang="en-US" i="1" dirty="0"/>
+              <a:t>Dependency injection</a:t>
+            </a:r>
+            <a:r>
+              <a:rPr lang="en-US" dirty="0"/>
+              <a:t> is the mechanism that manages the dependencies of an app's components and the services that other components can use.</a:t>
+            </a:r>
+          </a:p>
+          <a:p>
+            <a:r>
+              <a:rPr lang="en-US" dirty="0" err="1"/>
+              <a:t>npm</a:t>
+            </a:r>
+            <a:r>
+              <a:rPr lang="en-US" dirty="0"/>
+              <a:t> run ng generate service </a:t>
+            </a:r>
+            <a:r>
+              <a:rPr lang="en-US" dirty="0" err="1"/>
+              <a:t>studentService</a:t>
+            </a:r>
+            <a:endParaRPr lang="en-US" dirty="0"/>
+          </a:p>
+          <a:p>
+            <a:r>
+              <a:rPr lang="en-US" dirty="0"/>
+              <a:t>We are hardcoding data into our service; we will build on this later - we can use our service to fetch the data dynamically!</a:t>
+            </a:r>
+          </a:p>
+        </p:txBody>
+      </p:sp>
+      <p:pic>
+        <p:nvPicPr>
+          <p:cNvPr id="7" name="Picture 6">
+            <a:extLst>
+              <a:ext uri="{FF2B5EF4-FFF2-40B4-BE49-F238E27FC236}">
+                <a16:creationId xmlns:a16="http://schemas.microsoft.com/office/drawing/2014/main" id="{AB26997B-E545-C0CD-A634-859CA0F1F8F0}"/>
+              </a:ext>
+            </a:extLst>
+          </p:cNvPr>
+          <p:cNvPicPr>
+            <a:picLocks noChangeAspect="1"/>
+          </p:cNvPicPr>
+          <p:nvPr/>
+        </p:nvPicPr>
+        <p:blipFill>
+          <a:blip r:embed="rId2"/>
+          <a:stretch>
+            <a:fillRect/>
+          </a:stretch>
+        </p:blipFill>
+        <p:spPr>
+          <a:xfrm>
+            <a:off x="6270171" y="888290"/>
+            <a:ext cx="4450286" cy="5847090"/>
+          </a:xfrm>
+          <a:prstGeom prst="rect">
+            <a:avLst/>
+          </a:prstGeom>
+        </p:spPr>
+      </p:pic>
+    </p:spTree>
+    <p:extLst>
+      <p:ext uri="{BB962C8B-B14F-4D97-AF65-F5344CB8AC3E}">
+        <p14:creationId xmlns:p14="http://schemas.microsoft.com/office/powerpoint/2010/main" val="2515847262"/>
+      </p:ext>
+    </p:extLst>
+  </p:cSld>
+  <p:clrMapOvr>
+    <a:masterClrMapping/>
+  </p:clrMapOvr>
+</p:sld>
+</file>
+
+<file path=ppt/slides/slide14.xml><?xml version="1.0" encoding="utf-8"?>
+<p:sld xmlns:a="http://schemas.openxmlformats.org/drawingml/2006/main" xmlns:r="http://schemas.openxmlformats.org/officeDocument/2006/relationships" xmlns:p="http://schemas.openxmlformats.org/presentationml/2006/main">
+  <p:cSld>
+    <p:spTree>
+      <p:nvGrpSpPr>
+        <p:cNvPr id="1" name=""/>
+        <p:cNvGrpSpPr/>
+        <p:nvPr/>
+      </p:nvGrpSpPr>
+      <p:grpSpPr>
+        <a:xfrm>
+          <a:off x="0" y="0"/>
+          <a:ext cx="0" cy="0"/>
+          <a:chOff x="0" y="0"/>
+          <a:chExt cx="0" cy="0"/>
+        </a:xfrm>
+      </p:grpSpPr>
+      <p:sp>
+        <p:nvSpPr>
+          <p:cNvPr id="2" name="Title 1">
+            <a:extLst>
+              <a:ext uri="{FF2B5EF4-FFF2-40B4-BE49-F238E27FC236}">
+                <a16:creationId xmlns:a16="http://schemas.microsoft.com/office/drawing/2014/main" id="{9D9107C0-3284-723B-998B-A4D19D82CBD2}"/>
+              </a:ext>
+            </a:extLst>
+          </p:cNvPr>
+          <p:cNvSpPr>
+            <a:spLocks noGrp="1"/>
+          </p:cNvSpPr>
+          <p:nvPr>
+            <p:ph type="title"/>
+          </p:nvPr>
+        </p:nvSpPr>
+        <p:spPr/>
+        <p:txBody>
+          <a:bodyPr/>
+          <a:lstStyle/>
+          <a:p>
+            <a:r>
+              <a:rPr lang="en-US" dirty="0"/>
+              <a:t>Injecting our service into </a:t>
+            </a:r>
+            <a:r>
+              <a:rPr lang="en-US" dirty="0" err="1"/>
+              <a:t>home.ts</a:t>
+            </a:r>
+            <a:endParaRPr lang="en-US" dirty="0"/>
+          </a:p>
+        </p:txBody>
+      </p:sp>
+      <p:pic>
+        <p:nvPicPr>
+          <p:cNvPr id="5" name="Content Placeholder 4">
+            <a:extLst>
+              <a:ext uri="{FF2B5EF4-FFF2-40B4-BE49-F238E27FC236}">
+                <a16:creationId xmlns:a16="http://schemas.microsoft.com/office/drawing/2014/main" id="{30FB85D8-523E-D224-7707-2C2CD4A20145}"/>
+              </a:ext>
+            </a:extLst>
+          </p:cNvPr>
+          <p:cNvPicPr>
+            <a:picLocks noGrp="1" noChangeAspect="1"/>
+          </p:cNvPicPr>
+          <p:nvPr>
+            <p:ph idx="1"/>
+          </p:nvPr>
+        </p:nvPicPr>
+        <p:blipFill>
+          <a:blip r:embed="rId2"/>
+          <a:stretch>
+            <a:fillRect/>
+          </a:stretch>
+        </p:blipFill>
+        <p:spPr>
+          <a:xfrm>
+            <a:off x="4586914" y="1925428"/>
+            <a:ext cx="5915752" cy="4848435"/>
+          </a:xfrm>
+          <a:prstGeom prst="rect">
+            <a:avLst/>
+          </a:prstGeom>
+        </p:spPr>
+      </p:pic>
+      <p:sp>
+        <p:nvSpPr>
+          <p:cNvPr id="6" name="TextBox 5">
+            <a:extLst>
+              <a:ext uri="{FF2B5EF4-FFF2-40B4-BE49-F238E27FC236}">
+                <a16:creationId xmlns:a16="http://schemas.microsoft.com/office/drawing/2014/main" id="{9FBF61F3-B847-B2CC-27E6-1545109D4DE0}"/>
+              </a:ext>
+            </a:extLst>
+          </p:cNvPr>
+          <p:cNvSpPr txBox="1"/>
+          <p:nvPr/>
+        </p:nvSpPr>
+        <p:spPr>
+          <a:xfrm>
+            <a:off x="391886" y="3681350"/>
+            <a:ext cx="3847605" cy="646331"/>
+          </a:xfrm>
+          <a:prstGeom prst="rect">
+            <a:avLst/>
+          </a:prstGeom>
+          <a:noFill/>
+        </p:spPr>
+        <p:txBody>
+          <a:bodyPr wrap="square" rtlCol="0">
+            <a:spAutoFit/>
+          </a:bodyPr>
+          <a:lstStyle/>
+          <a:p>
+            <a:r>
+              <a:rPr lang="en-US" dirty="0"/>
+              <a:t>We now get our students from our service!</a:t>
+            </a:r>
+          </a:p>
+        </p:txBody>
+      </p:sp>
+    </p:spTree>
+    <p:extLst>
+      <p:ext uri="{BB962C8B-B14F-4D97-AF65-F5344CB8AC3E}">
+        <p14:creationId xmlns:p14="http://schemas.microsoft.com/office/powerpoint/2010/main" val="1016770375"/>
+      </p:ext>
+    </p:extLst>
+  </p:cSld>
+  <p:clrMapOvr>
+    <a:masterClrMapping/>
+  </p:clrMapOvr>
+</p:sld>
+</file>
+
+<file path=ppt/slides/slide15.xml><?xml version="1.0" encoding="utf-8"?>
+<p:sld xmlns:a="http://schemas.openxmlformats.org/drawingml/2006/main" xmlns:r="http://schemas.openxmlformats.org/officeDocument/2006/relationships" xmlns:p="http://schemas.openxmlformats.org/presentationml/2006/main">
+  <p:cSld>
+    <p:spTree>
+      <p:nvGrpSpPr>
+        <p:cNvPr id="1" name=""/>
+        <p:cNvGrpSpPr/>
+        <p:nvPr/>
+      </p:nvGrpSpPr>
+      <p:grpSpPr>
+        <a:xfrm>
+          <a:off x="0" y="0"/>
+          <a:ext cx="0" cy="0"/>
+          <a:chOff x="0" y="0"/>
+          <a:chExt cx="0" cy="0"/>
+        </a:xfrm>
+      </p:grpSpPr>
+      <p:sp>
+        <p:nvSpPr>
+          <p:cNvPr id="2" name="Title 1">
+            <a:extLst>
+              <a:ext uri="{FF2B5EF4-FFF2-40B4-BE49-F238E27FC236}">
+                <a16:creationId xmlns:a16="http://schemas.microsoft.com/office/drawing/2014/main" id="{2D1A7E6B-545C-B91E-1784-1B8AE8B3795D}"/>
+              </a:ext>
+            </a:extLst>
+          </p:cNvPr>
+          <p:cNvSpPr>
+            <a:spLocks noGrp="1"/>
+          </p:cNvSpPr>
+          <p:nvPr>
+            <p:ph type="title"/>
+          </p:nvPr>
+        </p:nvSpPr>
+        <p:spPr/>
+        <p:txBody>
+          <a:bodyPr/>
+          <a:lstStyle/>
+          <a:p>
+            <a:r>
+              <a:rPr lang="en-US" dirty="0"/>
+              <a:t>What is angular Routing? What is Deep linking?</a:t>
+            </a:r>
+          </a:p>
+        </p:txBody>
+      </p:sp>
+      <p:sp>
+        <p:nvSpPr>
+          <p:cNvPr id="4" name="Content Placeholder 2">
+            <a:extLst>
+              <a:ext uri="{FF2B5EF4-FFF2-40B4-BE49-F238E27FC236}">
+                <a16:creationId xmlns:a16="http://schemas.microsoft.com/office/drawing/2014/main" id="{377F7FAB-49DF-A039-C8FE-2835C650BE41}"/>
+              </a:ext>
+            </a:extLst>
+          </p:cNvPr>
+          <p:cNvSpPr>
+            <a:spLocks noGrp="1"/>
+          </p:cNvSpPr>
+          <p:nvPr>
+            <p:ph idx="1"/>
+          </p:nvPr>
+        </p:nvSpPr>
+        <p:spPr>
+          <a:xfrm>
+            <a:off x="581192" y="1894353"/>
+            <a:ext cx="5389302" cy="3974619"/>
+          </a:xfrm>
+        </p:spPr>
+        <p:txBody>
+          <a:bodyPr/>
+          <a:lstStyle/>
+          <a:p>
+            <a:r>
+              <a:rPr lang="en-US" dirty="0"/>
+              <a:t>Definition: </a:t>
+            </a:r>
+            <a:r>
+              <a:rPr lang="en-US" dirty="0">
+                <a:solidFill>
+                  <a:schemeClr val="accent2"/>
+                </a:solidFill>
+              </a:rPr>
+              <a:t>Routing </a:t>
+            </a:r>
+            <a:r>
+              <a:rPr lang="en-US" dirty="0"/>
+              <a:t>is the process to provide easy navigation between different views based on the browser URL</a:t>
+            </a:r>
+          </a:p>
+          <a:p>
+            <a:pPr lvl="1"/>
+            <a:r>
+              <a:rPr lang="en-US" dirty="0"/>
+              <a:t>This enables deep linking</a:t>
+            </a:r>
+          </a:p>
+          <a:p>
+            <a:pPr lvl="1"/>
+            <a:r>
+              <a:rPr lang="en-US" dirty="0"/>
+              <a:t>Handle URL parameters and query strings</a:t>
+            </a:r>
+          </a:p>
+          <a:p>
+            <a:pPr lvl="1"/>
+            <a:r>
+              <a:rPr lang="en-US" dirty="0"/>
+              <a:t>Manage browser history &amp; navigation</a:t>
+            </a:r>
+          </a:p>
+          <a:p>
+            <a:pPr lvl="1"/>
+            <a:r>
+              <a:rPr lang="en-US" dirty="0"/>
+              <a:t>Create nested routes and layouts</a:t>
+            </a:r>
+          </a:p>
+          <a:p>
+            <a:pPr lvl="1"/>
+            <a:r>
+              <a:rPr lang="en-US" dirty="0"/>
+              <a:t>Implement protected routes for authentication</a:t>
+            </a:r>
+          </a:p>
+        </p:txBody>
+      </p:sp>
+      <p:sp>
+        <p:nvSpPr>
+          <p:cNvPr id="5" name="Content Placeholder 2">
+            <a:extLst>
+              <a:ext uri="{FF2B5EF4-FFF2-40B4-BE49-F238E27FC236}">
+                <a16:creationId xmlns:a16="http://schemas.microsoft.com/office/drawing/2014/main" id="{CC3D5F76-B2C3-5605-B374-F0F18426EE53}"/>
+              </a:ext>
+            </a:extLst>
+          </p:cNvPr>
+          <p:cNvSpPr txBox="1">
+            <a:spLocks/>
+          </p:cNvSpPr>
+          <p:nvPr/>
+        </p:nvSpPr>
+        <p:spPr>
+          <a:xfrm>
+            <a:off x="6096000" y="2763866"/>
+            <a:ext cx="5389300" cy="3391978"/>
+          </a:xfrm>
+          <a:prstGeom prst="rect">
+            <a:avLst/>
+          </a:prstGeom>
+        </p:spPr>
+        <p:txBody>
+          <a:bodyPr vert="horz" lIns="91440" tIns="45720" rIns="91440" bIns="45720" rtlCol="0" anchor="ctr">
+            <a:normAutofit fontScale="92500" lnSpcReduction="20000"/>
+          </a:bodyPr>
+          <a:lstStyle>
+            <a:lvl1pPr marL="306000" indent="-306000" algn="l" defTabSz="457200" rtl="0" eaLnBrk="1" latinLnBrk="0" hangingPunct="1">
+              <a:spcBef>
+                <a:spcPct val="20000"/>
+              </a:spcBef>
+              <a:spcAft>
+                <a:spcPts val="600"/>
+              </a:spcAft>
+              <a:buClr>
+                <a:schemeClr val="accent2"/>
+              </a:buClr>
+              <a:buSzPct val="92000"/>
+              <a:buFont typeface="Wingdings 2" panose="05020102010507070707" pitchFamily="18" charset="2"/>
+              <a:buChar char=""/>
+              <a:defRPr sz="1800" kern="1200">
+                <a:solidFill>
+                  <a:schemeClr val="tx2"/>
+                </a:solidFill>
+                <a:latin typeface="+mn-lt"/>
+                <a:ea typeface="+mn-ea"/>
+                <a:cs typeface="+mn-cs"/>
+              </a:defRPr>
+            </a:lvl1pPr>
+            <a:lvl2pPr marL="630000" indent="-306000" algn="l" defTabSz="457200" rtl="0" eaLnBrk="1" latinLnBrk="0" hangingPunct="1">
+              <a:spcBef>
+                <a:spcPct val="20000"/>
+              </a:spcBef>
+              <a:spcAft>
+                <a:spcPts val="600"/>
+              </a:spcAft>
+              <a:buClr>
+                <a:schemeClr val="accent2"/>
+              </a:buClr>
+              <a:buSzPct val="92000"/>
+              <a:buFont typeface="Wingdings 2" panose="05020102010507070707" pitchFamily="18" charset="2"/>
+              <a:buChar char=""/>
+              <a:defRPr sz="1600" kern="1200">
+                <a:solidFill>
+                  <a:schemeClr val="tx2"/>
+                </a:solidFill>
+                <a:latin typeface="+mn-lt"/>
+                <a:ea typeface="+mn-ea"/>
+                <a:cs typeface="+mn-cs"/>
+              </a:defRPr>
+            </a:lvl2pPr>
+            <a:lvl3pPr marL="900000" indent="-270000" algn="l" defTabSz="457200" rtl="0" eaLnBrk="1" latinLnBrk="0" hangingPunct="1">
+              <a:spcBef>
+                <a:spcPct val="20000"/>
+              </a:spcBef>
+              <a:spcAft>
+                <a:spcPts val="600"/>
+              </a:spcAft>
+              <a:buClr>
+                <a:schemeClr val="accent2"/>
+              </a:buClr>
+              <a:buSzPct val="92000"/>
+              <a:buFont typeface="Wingdings 2" panose="05020102010507070707" pitchFamily="18" charset="2"/>
+              <a:buChar char=""/>
+              <a:defRPr sz="1400" kern="1200">
+                <a:solidFill>
+                  <a:schemeClr val="tx2"/>
+                </a:solidFill>
+                <a:latin typeface="+mn-lt"/>
+                <a:ea typeface="+mn-ea"/>
+                <a:cs typeface="+mn-cs"/>
+              </a:defRPr>
+            </a:lvl3pPr>
+            <a:lvl4pPr marL="1242000" indent="-234000" algn="l" defTabSz="457200" rtl="0" eaLnBrk="1" latinLnBrk="0" hangingPunct="1">
+              <a:spcBef>
+                <a:spcPct val="20000"/>
+              </a:spcBef>
+              <a:spcAft>
+                <a:spcPts val="600"/>
+              </a:spcAft>
+              <a:buClr>
+                <a:schemeClr val="accent2"/>
+              </a:buClr>
+              <a:buSzPct val="92000"/>
+              <a:buFont typeface="Wingdings 2" panose="05020102010507070707" pitchFamily="18" charset="2"/>
+              <a:buChar char=""/>
+              <a:defRPr sz="1200" kern="1200">
+                <a:solidFill>
+                  <a:schemeClr val="tx2"/>
+                </a:solidFill>
+                <a:latin typeface="+mn-lt"/>
+                <a:ea typeface="+mn-ea"/>
+                <a:cs typeface="+mn-cs"/>
+              </a:defRPr>
+            </a:lvl4pPr>
+            <a:lvl5pPr marL="1602000" indent="-234000" algn="l" defTabSz="457200" rtl="0" eaLnBrk="1" latinLnBrk="0" hangingPunct="1">
+              <a:spcBef>
+                <a:spcPct val="20000"/>
+              </a:spcBef>
+              <a:spcAft>
+                <a:spcPts val="600"/>
+              </a:spcAft>
+              <a:buClr>
+                <a:schemeClr val="accent2"/>
+              </a:buClr>
+              <a:buSzPct val="92000"/>
+              <a:buFont typeface="Wingdings 2" panose="05020102010507070707" pitchFamily="18" charset="2"/>
+              <a:buChar char=""/>
+              <a:defRPr sz="1200" kern="1200">
+                <a:solidFill>
+                  <a:schemeClr val="tx2"/>
+                </a:solidFill>
+                <a:latin typeface="+mn-lt"/>
+                <a:ea typeface="+mn-ea"/>
+                <a:cs typeface="+mn-cs"/>
+              </a:defRPr>
+            </a:lvl5pPr>
+            <a:lvl6pPr marL="1900000" indent="-228600" algn="l" defTabSz="457200" rtl="0" eaLnBrk="1" latinLnBrk="0" hangingPunct="1">
+              <a:spcBef>
+                <a:spcPct val="20000"/>
+              </a:spcBef>
+              <a:spcAft>
+                <a:spcPts val="600"/>
+              </a:spcAft>
+              <a:buClr>
+                <a:schemeClr val="accent2"/>
+              </a:buClr>
+              <a:buSzPct val="92000"/>
+              <a:buFont typeface="Wingdings 2" panose="05020102010507070707" pitchFamily="18" charset="2"/>
+              <a:buChar char=""/>
+              <a:defRPr sz="1200" kern="1200">
+                <a:solidFill>
+                  <a:schemeClr val="tx2"/>
+                </a:solidFill>
+                <a:latin typeface="+mn-lt"/>
+                <a:ea typeface="+mn-ea"/>
+                <a:cs typeface="+mn-cs"/>
+              </a:defRPr>
+            </a:lvl6pPr>
+            <a:lvl7pPr marL="2200000" indent="-228600" algn="l" defTabSz="457200" rtl="0" eaLnBrk="1" latinLnBrk="0" hangingPunct="1">
+              <a:spcBef>
+                <a:spcPct val="20000"/>
+              </a:spcBef>
+              <a:spcAft>
+                <a:spcPts val="600"/>
+              </a:spcAft>
+              <a:buClr>
+                <a:schemeClr val="accent2"/>
+              </a:buClr>
+              <a:buSzPct val="92000"/>
+              <a:buFont typeface="Wingdings 2" panose="05020102010507070707" pitchFamily="18" charset="2"/>
+              <a:buChar char=""/>
+              <a:defRPr sz="1200" kern="1200">
+                <a:solidFill>
+                  <a:schemeClr val="tx2"/>
+                </a:solidFill>
+                <a:latin typeface="+mn-lt"/>
+                <a:ea typeface="+mn-ea"/>
+                <a:cs typeface="+mn-cs"/>
+              </a:defRPr>
+            </a:lvl7pPr>
+            <a:lvl8pPr marL="2500000" indent="-228600" algn="l" defTabSz="457200" rtl="0" eaLnBrk="1" latinLnBrk="0" hangingPunct="1">
+              <a:spcBef>
+                <a:spcPct val="20000"/>
+              </a:spcBef>
+              <a:spcAft>
+                <a:spcPts val="600"/>
+              </a:spcAft>
+              <a:buClr>
+                <a:schemeClr val="accent2"/>
+              </a:buClr>
+              <a:buSzPct val="92000"/>
+              <a:buFont typeface="Wingdings 2" panose="05020102010507070707" pitchFamily="18" charset="2"/>
+              <a:buChar char=""/>
+              <a:defRPr sz="1200" kern="1200">
+                <a:solidFill>
+                  <a:schemeClr val="tx2"/>
+                </a:solidFill>
+                <a:latin typeface="+mn-lt"/>
+                <a:ea typeface="+mn-ea"/>
+                <a:cs typeface="+mn-cs"/>
+              </a:defRPr>
+            </a:lvl8pPr>
+            <a:lvl9pPr marL="2800000" indent="-228600" algn="l" defTabSz="457200" rtl="0" eaLnBrk="1" latinLnBrk="0" hangingPunct="1">
+              <a:spcBef>
+                <a:spcPct val="20000"/>
+              </a:spcBef>
+              <a:spcAft>
+                <a:spcPts val="600"/>
+              </a:spcAft>
+              <a:buClr>
+                <a:schemeClr val="accent2"/>
+              </a:buClr>
+              <a:buSzPct val="92000"/>
+              <a:buFont typeface="Wingdings 2" panose="05020102010507070707" pitchFamily="18" charset="2"/>
+              <a:buChar char=""/>
+              <a:defRPr sz="1200" kern="1200">
+                <a:solidFill>
+                  <a:schemeClr val="tx2"/>
+                </a:solidFill>
+                <a:latin typeface="+mn-lt"/>
+                <a:ea typeface="+mn-ea"/>
+                <a:cs typeface="+mn-cs"/>
+              </a:defRPr>
+            </a:lvl9pPr>
+          </a:lstStyle>
+          <a:p>
+            <a:r>
+              <a:rPr lang="en-US" dirty="0"/>
+              <a:t>Definition: </a:t>
+            </a:r>
+            <a:r>
+              <a:rPr lang="en-US" dirty="0">
+                <a:solidFill>
+                  <a:schemeClr val="accent2"/>
+                </a:solidFill>
+              </a:rPr>
+              <a:t>Deep Linking </a:t>
+            </a:r>
+            <a:r>
+              <a:rPr lang="en-US" dirty="0">
+                <a:solidFill>
+                  <a:schemeClr val="tx1"/>
+                </a:solidFill>
+              </a:rPr>
+              <a:t>is the practice of using hyperlinks to send users directly to specific content within our applications </a:t>
+            </a:r>
+          </a:p>
+          <a:p>
+            <a:r>
+              <a:rPr lang="en-US" dirty="0"/>
+              <a:t>1-2 levels deep: most apps</a:t>
+            </a:r>
+          </a:p>
+          <a:p>
+            <a:pPr lvl="1"/>
+            <a:r>
+              <a:rPr lang="en-US" dirty="0"/>
+              <a:t>/dashboard</a:t>
+            </a:r>
+          </a:p>
+          <a:p>
+            <a:pPr lvl="1"/>
+            <a:r>
+              <a:rPr lang="en-US" dirty="0"/>
+              <a:t>/products/45</a:t>
+            </a:r>
+          </a:p>
+          <a:p>
+            <a:r>
+              <a:rPr lang="en-US" dirty="0"/>
+              <a:t>3-4 levels deeps: common for structured apps</a:t>
+            </a:r>
+          </a:p>
+          <a:p>
+            <a:pPr lvl="1"/>
+            <a:r>
+              <a:rPr lang="en-US" dirty="0"/>
+              <a:t>/dashboard/reports/weekly</a:t>
+            </a:r>
+          </a:p>
+          <a:p>
+            <a:pPr lvl="1"/>
+            <a:r>
+              <a:rPr lang="en-US" dirty="0"/>
+              <a:t>/shop/products/46/reviews</a:t>
+            </a:r>
+          </a:p>
+          <a:p>
+            <a:r>
+              <a:rPr lang="en-US" dirty="0"/>
+              <a:t>5+ levels deep: Rare but possible, usually in enterprise </a:t>
+            </a:r>
+          </a:p>
+          <a:p>
+            <a:pPr lvl="1"/>
+            <a:r>
+              <a:rPr lang="en-US" dirty="0"/>
+              <a:t>/orgs/12/projects/55/tasks/34/comments/2</a:t>
+            </a:r>
+          </a:p>
+          <a:p>
+            <a:endParaRPr lang="en-US" dirty="0"/>
+          </a:p>
+        </p:txBody>
+      </p:sp>
+    </p:spTree>
+    <p:extLst>
+      <p:ext uri="{BB962C8B-B14F-4D97-AF65-F5344CB8AC3E}">
+        <p14:creationId xmlns:p14="http://schemas.microsoft.com/office/powerpoint/2010/main" val="2052455276"/>
+      </p:ext>
+    </p:extLst>
+  </p:cSld>
+  <p:clrMapOvr>
+    <a:masterClrMapping/>
+  </p:clrMapOvr>
+</p:sld>
+</file>
+
+<file path=ppt/slides/slide16.xml><?xml version="1.0" encoding="utf-8"?>
+<p:sld xmlns:a="http://schemas.openxmlformats.org/drawingml/2006/main" xmlns:r="http://schemas.openxmlformats.org/officeDocument/2006/relationships" xmlns:p="http://schemas.openxmlformats.org/presentationml/2006/main">
+  <p:cSld>
+    <p:spTree>
+      <p:nvGrpSpPr>
+        <p:cNvPr id="1" name=""/>
+        <p:cNvGrpSpPr/>
+        <p:nvPr/>
+      </p:nvGrpSpPr>
+      <p:grpSpPr>
+        <a:xfrm>
+          <a:off x="0" y="0"/>
+          <a:ext cx="0" cy="0"/>
+          <a:chOff x="0" y="0"/>
+          <a:chExt cx="0" cy="0"/>
+        </a:xfrm>
+      </p:grpSpPr>
+      <p:sp>
+        <p:nvSpPr>
+          <p:cNvPr id="2" name="Title 1">
+            <a:extLst>
+              <a:ext uri="{FF2B5EF4-FFF2-40B4-BE49-F238E27FC236}">
+                <a16:creationId xmlns:a16="http://schemas.microsoft.com/office/drawing/2014/main" id="{AD974241-6623-DEC2-CD99-377046258493}"/>
+              </a:ext>
+            </a:extLst>
+          </p:cNvPr>
+          <p:cNvSpPr>
+            <a:spLocks noGrp="1"/>
+          </p:cNvSpPr>
+          <p:nvPr>
+            <p:ph type="title"/>
+          </p:nvPr>
+        </p:nvSpPr>
+        <p:spPr/>
+        <p:txBody>
+          <a:bodyPr/>
+          <a:lstStyle/>
+          <a:p>
+            <a:r>
+              <a:rPr lang="en-US" dirty="0"/>
+              <a:t>Implementing angular routing</a:t>
+            </a:r>
+          </a:p>
+        </p:txBody>
+      </p:sp>
+      <p:sp>
+        <p:nvSpPr>
+          <p:cNvPr id="3" name="Content Placeholder 2">
+            <a:extLst>
+              <a:ext uri="{FF2B5EF4-FFF2-40B4-BE49-F238E27FC236}">
+                <a16:creationId xmlns:a16="http://schemas.microsoft.com/office/drawing/2014/main" id="{6C61B787-2252-975A-9D7F-5A7F5341DC8C}"/>
+              </a:ext>
+            </a:extLst>
+          </p:cNvPr>
+          <p:cNvSpPr>
+            <a:spLocks noGrp="1"/>
+          </p:cNvSpPr>
+          <p:nvPr>
+            <p:ph idx="1"/>
+          </p:nvPr>
+        </p:nvSpPr>
+        <p:spPr>
+          <a:xfrm>
+            <a:off x="581192" y="2180496"/>
+            <a:ext cx="4416110" cy="4305364"/>
+          </a:xfrm>
+        </p:spPr>
+        <p:txBody>
+          <a:bodyPr>
+            <a:normAutofit lnSpcReduction="10000"/>
+          </a:bodyPr>
+          <a:lstStyle/>
+          <a:p>
+            <a:r>
+              <a:rPr lang="en-US" dirty="0"/>
+              <a:t>Your build tool will typically autogenerate </a:t>
+            </a:r>
+            <a:r>
+              <a:rPr lang="en-US" dirty="0" err="1"/>
+              <a:t>app.config.ts</a:t>
+            </a:r>
+            <a:r>
+              <a:rPr lang="en-US" dirty="0"/>
+              <a:t> &amp; </a:t>
+            </a:r>
+            <a:r>
+              <a:rPr lang="en-US" dirty="0" err="1"/>
+              <a:t>app.routes.ts</a:t>
+            </a:r>
+            <a:r>
+              <a:rPr lang="en-US" dirty="0"/>
+              <a:t> which pre-configures routing</a:t>
+            </a:r>
+          </a:p>
+          <a:p>
+            <a:r>
+              <a:rPr lang="en-US" dirty="0"/>
+              <a:t>We just need to add routes to </a:t>
+            </a:r>
+            <a:r>
+              <a:rPr lang="en-US" dirty="0" err="1"/>
+              <a:t>app.routes.ts</a:t>
+            </a:r>
+            <a:endParaRPr lang="en-US" dirty="0"/>
+          </a:p>
+          <a:p>
+            <a:r>
+              <a:rPr lang="en-US" dirty="0"/>
+              <a:t>The path represents your endpoint, i.e. localhost:1234/about </a:t>
+            </a:r>
+          </a:p>
+          <a:p>
+            <a:r>
+              <a:rPr lang="en-US" dirty="0"/>
+              <a:t>‘Home’ showcases eager loading, ‘about’ showcases lazy loading </a:t>
+            </a:r>
+          </a:p>
+          <a:p>
+            <a:r>
+              <a:rPr lang="en-US" dirty="0"/>
+              <a:t>Lazy loading ensures the client doesn’t need to download the JavaScript until they visit that page </a:t>
+            </a:r>
+          </a:p>
+          <a:p>
+            <a:r>
+              <a:rPr lang="en-US" dirty="0"/>
+              <a:t>This is great for optimization of large sites &amp; rarely used views</a:t>
+            </a:r>
+          </a:p>
+        </p:txBody>
+      </p:sp>
+      <p:pic>
+        <p:nvPicPr>
+          <p:cNvPr id="5" name="Picture 4">
+            <a:extLst>
+              <a:ext uri="{FF2B5EF4-FFF2-40B4-BE49-F238E27FC236}">
+                <a16:creationId xmlns:a16="http://schemas.microsoft.com/office/drawing/2014/main" id="{4B3E5486-9E15-B0F4-A5D0-9E1D2BF9BE53}"/>
+              </a:ext>
+            </a:extLst>
+          </p:cNvPr>
+          <p:cNvPicPr>
+            <a:picLocks noChangeAspect="1"/>
+          </p:cNvPicPr>
+          <p:nvPr/>
+        </p:nvPicPr>
+        <p:blipFill>
+          <a:blip r:embed="rId2"/>
+          <a:stretch>
+            <a:fillRect/>
+          </a:stretch>
+        </p:blipFill>
+        <p:spPr>
+          <a:xfrm>
+            <a:off x="6264057" y="4304168"/>
+            <a:ext cx="3838939" cy="2394101"/>
+          </a:xfrm>
+          <a:prstGeom prst="rect">
+            <a:avLst/>
+          </a:prstGeom>
+        </p:spPr>
+      </p:pic>
+      <p:pic>
+        <p:nvPicPr>
+          <p:cNvPr id="7" name="Picture 6">
+            <a:extLst>
+              <a:ext uri="{FF2B5EF4-FFF2-40B4-BE49-F238E27FC236}">
+                <a16:creationId xmlns:a16="http://schemas.microsoft.com/office/drawing/2014/main" id="{A4971DE6-9520-B713-4131-572D45D746C1}"/>
+              </a:ext>
+            </a:extLst>
+          </p:cNvPr>
+          <p:cNvPicPr>
+            <a:picLocks noChangeAspect="1"/>
+          </p:cNvPicPr>
+          <p:nvPr/>
+        </p:nvPicPr>
+        <p:blipFill>
+          <a:blip r:embed="rId3"/>
+          <a:stretch>
+            <a:fillRect/>
+          </a:stretch>
+        </p:blipFill>
+        <p:spPr>
+          <a:xfrm>
+            <a:off x="5190015" y="2180496"/>
+            <a:ext cx="5987021" cy="1765495"/>
+          </a:xfrm>
+          <a:prstGeom prst="rect">
+            <a:avLst/>
+          </a:prstGeom>
+        </p:spPr>
+      </p:pic>
+      <p:sp>
+        <p:nvSpPr>
+          <p:cNvPr id="8" name="TextBox 7">
+            <a:extLst>
+              <a:ext uri="{FF2B5EF4-FFF2-40B4-BE49-F238E27FC236}">
+                <a16:creationId xmlns:a16="http://schemas.microsoft.com/office/drawing/2014/main" id="{1839812C-10A9-AA67-B33F-3890D0EE6060}"/>
+              </a:ext>
+            </a:extLst>
+          </p:cNvPr>
+          <p:cNvSpPr txBox="1"/>
+          <p:nvPr/>
+        </p:nvSpPr>
+        <p:spPr>
+          <a:xfrm>
+            <a:off x="5190015" y="1811164"/>
+            <a:ext cx="1431354" cy="369332"/>
+          </a:xfrm>
+          <a:prstGeom prst="rect">
+            <a:avLst/>
+          </a:prstGeom>
+          <a:noFill/>
+        </p:spPr>
+        <p:txBody>
+          <a:bodyPr wrap="none" rtlCol="0">
+            <a:spAutoFit/>
+          </a:bodyPr>
+          <a:lstStyle/>
+          <a:p>
+            <a:r>
+              <a:rPr lang="en-US" dirty="0" err="1"/>
+              <a:t>App.config.ts</a:t>
+            </a:r>
+            <a:r>
+              <a:rPr lang="en-US" dirty="0"/>
+              <a:t>:</a:t>
+            </a:r>
+          </a:p>
+        </p:txBody>
+      </p:sp>
+      <p:sp>
+        <p:nvSpPr>
+          <p:cNvPr id="9" name="TextBox 8">
+            <a:extLst>
+              <a:ext uri="{FF2B5EF4-FFF2-40B4-BE49-F238E27FC236}">
+                <a16:creationId xmlns:a16="http://schemas.microsoft.com/office/drawing/2014/main" id="{3DF63081-20AD-DA0D-5A21-A10A814A31C7}"/>
+              </a:ext>
+            </a:extLst>
+          </p:cNvPr>
+          <p:cNvSpPr txBox="1"/>
+          <p:nvPr/>
+        </p:nvSpPr>
+        <p:spPr>
+          <a:xfrm>
+            <a:off x="6096000" y="3945991"/>
+            <a:ext cx="1484894" cy="369332"/>
+          </a:xfrm>
+          <a:prstGeom prst="rect">
+            <a:avLst/>
+          </a:prstGeom>
+          <a:noFill/>
+        </p:spPr>
+        <p:txBody>
+          <a:bodyPr wrap="none" rtlCol="0">
+            <a:spAutoFit/>
+          </a:bodyPr>
+          <a:lstStyle/>
+          <a:p>
+            <a:r>
+              <a:rPr lang="en-US" dirty="0" err="1"/>
+              <a:t>App.routes.ts</a:t>
+            </a:r>
+            <a:r>
+              <a:rPr lang="en-US" dirty="0"/>
+              <a:t>:</a:t>
+            </a:r>
+          </a:p>
+        </p:txBody>
+      </p:sp>
+    </p:spTree>
+    <p:extLst>
+      <p:ext uri="{BB962C8B-B14F-4D97-AF65-F5344CB8AC3E}">
+        <p14:creationId xmlns:p14="http://schemas.microsoft.com/office/powerpoint/2010/main" val="2840816456"/>
+      </p:ext>
+    </p:extLst>
+  </p:cSld>
+  <p:clrMapOvr>
+    <a:masterClrMapping/>
+  </p:clrMapOvr>
+</p:sld>
+</file>
+
+<file path=ppt/slides/slide17.xml><?xml version="1.0" encoding="utf-8"?>
+<p:sld xmlns:a="http://schemas.openxmlformats.org/drawingml/2006/main" xmlns:r="http://schemas.openxmlformats.org/officeDocument/2006/relationships" xmlns:p="http://schemas.openxmlformats.org/presentationml/2006/main">
+  <p:cSld>
+    <p:spTree>
+      <p:nvGrpSpPr>
+        <p:cNvPr id="1" name=""/>
+        <p:cNvGrpSpPr/>
+        <p:nvPr/>
+      </p:nvGrpSpPr>
+      <p:grpSpPr>
+        <a:xfrm>
+          <a:off x="0" y="0"/>
+          <a:ext cx="0" cy="0"/>
+          <a:chOff x="0" y="0"/>
+          <a:chExt cx="0" cy="0"/>
+        </a:xfrm>
+      </p:grpSpPr>
+      <p:sp>
+        <p:nvSpPr>
+          <p:cNvPr id="2" name="Title 1">
+            <a:extLst>
+              <a:ext uri="{FF2B5EF4-FFF2-40B4-BE49-F238E27FC236}">
+                <a16:creationId xmlns:a16="http://schemas.microsoft.com/office/drawing/2014/main" id="{8B7C674D-1406-6C89-E295-420D2518AEF4}"/>
+              </a:ext>
+            </a:extLst>
+          </p:cNvPr>
+          <p:cNvSpPr>
+            <a:spLocks noGrp="1"/>
+          </p:cNvSpPr>
+          <p:nvPr>
+            <p:ph type="title"/>
+          </p:nvPr>
+        </p:nvSpPr>
+        <p:spPr/>
+        <p:txBody>
+          <a:bodyPr/>
+          <a:lstStyle/>
+          <a:p>
+            <a:r>
+              <a:rPr lang="en-US" dirty="0"/>
+              <a:t>Implementing angular routing</a:t>
+            </a:r>
+          </a:p>
+        </p:txBody>
+      </p:sp>
+      <p:sp>
+        <p:nvSpPr>
+          <p:cNvPr id="3" name="Content Placeholder 2">
+            <a:extLst>
+              <a:ext uri="{FF2B5EF4-FFF2-40B4-BE49-F238E27FC236}">
+                <a16:creationId xmlns:a16="http://schemas.microsoft.com/office/drawing/2014/main" id="{D5163DD9-9CAA-B105-23B3-1A887602FD60}"/>
+              </a:ext>
+            </a:extLst>
+          </p:cNvPr>
+          <p:cNvSpPr>
+            <a:spLocks noGrp="1"/>
+          </p:cNvSpPr>
+          <p:nvPr>
+            <p:ph idx="1"/>
+          </p:nvPr>
+        </p:nvSpPr>
+        <p:spPr>
+          <a:xfrm>
+            <a:off x="581192" y="2180497"/>
+            <a:ext cx="11029615" cy="1094332"/>
+          </a:xfrm>
+        </p:spPr>
+        <p:txBody>
+          <a:bodyPr>
+            <a:normAutofit lnSpcReduction="10000"/>
+          </a:bodyPr>
+          <a:lstStyle/>
+          <a:p>
+            <a:r>
+              <a:rPr lang="en-US" dirty="0"/>
+              <a:t>Now we can use ‘</a:t>
+            </a:r>
+            <a:r>
+              <a:rPr lang="en-US" dirty="0" err="1"/>
+              <a:t>routerLink</a:t>
+            </a:r>
+            <a:r>
+              <a:rPr lang="en-US" dirty="0"/>
+              <a:t>’ to set our activated route</a:t>
+            </a:r>
+          </a:p>
+          <a:p>
+            <a:r>
+              <a:rPr lang="en-US" dirty="0"/>
+              <a:t>We need to bring in ‘</a:t>
+            </a:r>
+            <a:r>
+              <a:rPr lang="en-US" dirty="0" err="1"/>
+              <a:t>RouterLink</a:t>
+            </a:r>
+            <a:r>
+              <a:rPr lang="en-US" dirty="0"/>
+              <a:t>’ to create router linked anchor tags for the component</a:t>
+            </a:r>
+          </a:p>
+          <a:p>
+            <a:r>
+              <a:rPr lang="en-US" dirty="0"/>
+              <a:t>The activated route will render the view(component) in the &lt;router-outlet&gt; </a:t>
+            </a:r>
+          </a:p>
+        </p:txBody>
+      </p:sp>
+      <p:pic>
+        <p:nvPicPr>
+          <p:cNvPr id="5" name="Picture 4">
+            <a:extLst>
+              <a:ext uri="{FF2B5EF4-FFF2-40B4-BE49-F238E27FC236}">
+                <a16:creationId xmlns:a16="http://schemas.microsoft.com/office/drawing/2014/main" id="{847F7877-3398-FB6D-BF9E-AA10C701E2D8}"/>
+              </a:ext>
+            </a:extLst>
+          </p:cNvPr>
+          <p:cNvPicPr>
+            <a:picLocks noChangeAspect="1"/>
+          </p:cNvPicPr>
+          <p:nvPr/>
+        </p:nvPicPr>
+        <p:blipFill>
+          <a:blip r:embed="rId2"/>
+          <a:stretch>
+            <a:fillRect/>
+          </a:stretch>
+        </p:blipFill>
+        <p:spPr>
+          <a:xfrm>
+            <a:off x="819197" y="4172905"/>
+            <a:ext cx="4067743" cy="2191056"/>
+          </a:xfrm>
+          <a:prstGeom prst="rect">
+            <a:avLst/>
+          </a:prstGeom>
+        </p:spPr>
+      </p:pic>
+      <p:pic>
+        <p:nvPicPr>
+          <p:cNvPr id="7" name="Picture 6">
+            <a:extLst>
+              <a:ext uri="{FF2B5EF4-FFF2-40B4-BE49-F238E27FC236}">
+                <a16:creationId xmlns:a16="http://schemas.microsoft.com/office/drawing/2014/main" id="{CF2BF3D3-AA93-116F-73B5-B8345247C5B8}"/>
+              </a:ext>
+            </a:extLst>
+          </p:cNvPr>
+          <p:cNvPicPr>
+            <a:picLocks noChangeAspect="1"/>
+          </p:cNvPicPr>
+          <p:nvPr/>
+        </p:nvPicPr>
+        <p:blipFill>
+          <a:blip r:embed="rId3"/>
+          <a:stretch>
+            <a:fillRect/>
+          </a:stretch>
+        </p:blipFill>
+        <p:spPr>
+          <a:xfrm>
+            <a:off x="6162855" y="3936345"/>
+            <a:ext cx="4376940" cy="2615672"/>
+          </a:xfrm>
+          <a:prstGeom prst="rect">
+            <a:avLst/>
+          </a:prstGeom>
+        </p:spPr>
+      </p:pic>
+      <p:sp>
+        <p:nvSpPr>
+          <p:cNvPr id="8" name="TextBox 7">
+            <a:extLst>
+              <a:ext uri="{FF2B5EF4-FFF2-40B4-BE49-F238E27FC236}">
+                <a16:creationId xmlns:a16="http://schemas.microsoft.com/office/drawing/2014/main" id="{58DACA8A-878B-2D57-6B3E-C51C9EF555D5}"/>
+              </a:ext>
+            </a:extLst>
+          </p:cNvPr>
+          <p:cNvSpPr txBox="1"/>
+          <p:nvPr/>
+        </p:nvSpPr>
+        <p:spPr>
+          <a:xfrm>
+            <a:off x="1223158" y="3633849"/>
+            <a:ext cx="1086708" cy="369332"/>
+          </a:xfrm>
+          <a:prstGeom prst="rect">
+            <a:avLst/>
+          </a:prstGeom>
+          <a:noFill/>
+        </p:spPr>
+        <p:txBody>
+          <a:bodyPr wrap="none" rtlCol="0">
+            <a:spAutoFit/>
+          </a:bodyPr>
+          <a:lstStyle/>
+          <a:p>
+            <a:r>
+              <a:rPr lang="en-US" dirty="0"/>
+              <a:t>App.html:</a:t>
+            </a:r>
+          </a:p>
+        </p:txBody>
+      </p:sp>
+      <p:sp>
+        <p:nvSpPr>
+          <p:cNvPr id="10" name="TextBox 9">
+            <a:extLst>
+              <a:ext uri="{FF2B5EF4-FFF2-40B4-BE49-F238E27FC236}">
+                <a16:creationId xmlns:a16="http://schemas.microsoft.com/office/drawing/2014/main" id="{82316542-FC67-3CCF-3893-7478A6E1E315}"/>
+              </a:ext>
+            </a:extLst>
+          </p:cNvPr>
+          <p:cNvSpPr txBox="1"/>
+          <p:nvPr/>
+        </p:nvSpPr>
+        <p:spPr>
+          <a:xfrm>
+            <a:off x="6162855" y="3471875"/>
+            <a:ext cx="830227" cy="369332"/>
+          </a:xfrm>
+          <a:prstGeom prst="rect">
+            <a:avLst/>
+          </a:prstGeom>
+          <a:noFill/>
+        </p:spPr>
+        <p:txBody>
+          <a:bodyPr wrap="none" rtlCol="0">
+            <a:spAutoFit/>
+          </a:bodyPr>
+          <a:lstStyle/>
+          <a:p>
+            <a:r>
+              <a:rPr lang="en-US" dirty="0" err="1"/>
+              <a:t>App.ts</a:t>
+            </a:r>
+            <a:r>
+              <a:rPr lang="en-US" dirty="0"/>
+              <a:t>:</a:t>
+            </a:r>
+          </a:p>
+        </p:txBody>
+      </p:sp>
+    </p:spTree>
+    <p:extLst>
+      <p:ext uri="{BB962C8B-B14F-4D97-AF65-F5344CB8AC3E}">
+        <p14:creationId xmlns:p14="http://schemas.microsoft.com/office/powerpoint/2010/main" val="3470590973"/>
+      </p:ext>
+    </p:extLst>
+  </p:cSld>
+  <p:clrMapOvr>
+    <a:masterClrMapping/>
+  </p:clrMapOvr>
+</p:sld>
+</file>
+
+<file path=ppt/slides/slide18.xml><?xml version="1.0" encoding="utf-8"?>
+<p:sld xmlns:a="http://schemas.openxmlformats.org/drawingml/2006/main" xmlns:r="http://schemas.openxmlformats.org/officeDocument/2006/relationships" xmlns:p="http://schemas.openxmlformats.org/presentationml/2006/main">
+  <p:cSld>
+    <p:spTree>
+      <p:nvGrpSpPr>
+        <p:cNvPr id="1" name=""/>
+        <p:cNvGrpSpPr/>
+        <p:nvPr/>
+      </p:nvGrpSpPr>
+      <p:grpSpPr>
+        <a:xfrm>
+          <a:off x="0" y="0"/>
+          <a:ext cx="0" cy="0"/>
+          <a:chOff x="0" y="0"/>
+          <a:chExt cx="0" cy="0"/>
+        </a:xfrm>
+      </p:grpSpPr>
+      <p:sp>
+        <p:nvSpPr>
+          <p:cNvPr id="2" name="Title 1">
+            <a:extLst>
+              <a:ext uri="{FF2B5EF4-FFF2-40B4-BE49-F238E27FC236}">
+                <a16:creationId xmlns:a16="http://schemas.microsoft.com/office/drawing/2014/main" id="{ABF26C6D-8A13-5BC2-F9DA-08B389AD55B9}"/>
+              </a:ext>
+            </a:extLst>
+          </p:cNvPr>
+          <p:cNvSpPr>
+            <a:spLocks noGrp="1"/>
+          </p:cNvSpPr>
+          <p:nvPr>
+            <p:ph type="title"/>
+          </p:nvPr>
+        </p:nvSpPr>
+        <p:spPr/>
+        <p:txBody>
+          <a:bodyPr/>
+          <a:lstStyle/>
+          <a:p>
+            <a:r>
+              <a:rPr lang="en-US" dirty="0"/>
+              <a:t>Angular routing with route parameters</a:t>
+            </a:r>
+          </a:p>
+        </p:txBody>
+      </p:sp>
+      <p:sp>
+        <p:nvSpPr>
+          <p:cNvPr id="3" name="Content Placeholder 2">
+            <a:extLst>
+              <a:ext uri="{FF2B5EF4-FFF2-40B4-BE49-F238E27FC236}">
+                <a16:creationId xmlns:a16="http://schemas.microsoft.com/office/drawing/2014/main" id="{7BF551F5-5592-3C27-73F0-978A6C70EBDE}"/>
+              </a:ext>
+            </a:extLst>
+          </p:cNvPr>
+          <p:cNvSpPr>
+            <a:spLocks noGrp="1"/>
+          </p:cNvSpPr>
+          <p:nvPr>
+            <p:ph idx="1"/>
+          </p:nvPr>
+        </p:nvSpPr>
+        <p:spPr>
+          <a:xfrm>
+            <a:off x="474867" y="2361869"/>
+            <a:ext cx="5985863" cy="2114438"/>
+          </a:xfrm>
+        </p:spPr>
+        <p:txBody>
+          <a:bodyPr/>
+          <a:lstStyle/>
+          <a:p>
+            <a:r>
+              <a:rPr lang="en-US" dirty="0"/>
+              <a:t>This is a new component that reads route params and then uses our service to get details about the student (it’s really just showing an extra field compared to our card - email)</a:t>
+            </a:r>
+          </a:p>
+        </p:txBody>
+      </p:sp>
+      <p:pic>
+        <p:nvPicPr>
+          <p:cNvPr id="5" name="Picture 4">
+            <a:extLst>
+              <a:ext uri="{FF2B5EF4-FFF2-40B4-BE49-F238E27FC236}">
+                <a16:creationId xmlns:a16="http://schemas.microsoft.com/office/drawing/2014/main" id="{3129DE1D-23EE-1877-5A3B-3FC6C6157324}"/>
+              </a:ext>
+            </a:extLst>
+          </p:cNvPr>
+          <p:cNvPicPr>
+            <a:picLocks noChangeAspect="1"/>
+          </p:cNvPicPr>
+          <p:nvPr/>
+        </p:nvPicPr>
+        <p:blipFill>
+          <a:blip r:embed="rId2"/>
+          <a:stretch>
+            <a:fillRect/>
+          </a:stretch>
+        </p:blipFill>
+        <p:spPr>
+          <a:xfrm>
+            <a:off x="1271855" y="5355632"/>
+            <a:ext cx="4220164" cy="800212"/>
+          </a:xfrm>
+          <a:prstGeom prst="rect">
+            <a:avLst/>
+          </a:prstGeom>
+        </p:spPr>
+      </p:pic>
+      <p:pic>
+        <p:nvPicPr>
+          <p:cNvPr id="7" name="Picture 6">
+            <a:extLst>
+              <a:ext uri="{FF2B5EF4-FFF2-40B4-BE49-F238E27FC236}">
+                <a16:creationId xmlns:a16="http://schemas.microsoft.com/office/drawing/2014/main" id="{76B6CA2B-2FD3-0C4F-619A-D036762F2D47}"/>
+              </a:ext>
+            </a:extLst>
+          </p:cNvPr>
+          <p:cNvPicPr>
+            <a:picLocks noChangeAspect="1"/>
+          </p:cNvPicPr>
+          <p:nvPr/>
+        </p:nvPicPr>
+        <p:blipFill>
+          <a:blip r:embed="rId3"/>
+          <a:stretch>
+            <a:fillRect/>
+          </a:stretch>
+        </p:blipFill>
+        <p:spPr>
+          <a:xfrm>
+            <a:off x="7008335" y="2361869"/>
+            <a:ext cx="4602473" cy="4034355"/>
+          </a:xfrm>
+          <a:prstGeom prst="rect">
+            <a:avLst/>
+          </a:prstGeom>
+        </p:spPr>
+      </p:pic>
+      <p:sp>
+        <p:nvSpPr>
+          <p:cNvPr id="8" name="TextBox 7">
+            <a:extLst>
+              <a:ext uri="{FF2B5EF4-FFF2-40B4-BE49-F238E27FC236}">
+                <a16:creationId xmlns:a16="http://schemas.microsoft.com/office/drawing/2014/main" id="{6DFDC81D-D71A-3CBF-4424-84157D2C4D68}"/>
+              </a:ext>
+            </a:extLst>
+          </p:cNvPr>
+          <p:cNvSpPr txBox="1"/>
+          <p:nvPr/>
+        </p:nvSpPr>
+        <p:spPr>
+          <a:xfrm>
+            <a:off x="1271855" y="4880758"/>
+            <a:ext cx="2458193" cy="369332"/>
+          </a:xfrm>
+          <a:prstGeom prst="rect">
+            <a:avLst/>
+          </a:prstGeom>
+          <a:noFill/>
+        </p:spPr>
+        <p:txBody>
+          <a:bodyPr wrap="square" rtlCol="0">
+            <a:spAutoFit/>
+          </a:bodyPr>
+          <a:lstStyle/>
+          <a:p>
+            <a:r>
+              <a:rPr lang="en-US" dirty="0"/>
+              <a:t>Student-details.html:</a:t>
+            </a:r>
+          </a:p>
+        </p:txBody>
+      </p:sp>
+      <p:sp>
+        <p:nvSpPr>
+          <p:cNvPr id="10" name="TextBox 9">
+            <a:extLst>
+              <a:ext uri="{FF2B5EF4-FFF2-40B4-BE49-F238E27FC236}">
+                <a16:creationId xmlns:a16="http://schemas.microsoft.com/office/drawing/2014/main" id="{BEC6E51F-0BE6-952B-EB5F-D7A0AFE2A08B}"/>
+              </a:ext>
+            </a:extLst>
+          </p:cNvPr>
+          <p:cNvSpPr txBox="1"/>
+          <p:nvPr/>
+        </p:nvSpPr>
+        <p:spPr>
+          <a:xfrm>
+            <a:off x="7008335" y="1879286"/>
+            <a:ext cx="2458193" cy="369332"/>
+          </a:xfrm>
+          <a:prstGeom prst="rect">
+            <a:avLst/>
+          </a:prstGeom>
+          <a:noFill/>
+        </p:spPr>
+        <p:txBody>
+          <a:bodyPr wrap="square" rtlCol="0">
+            <a:spAutoFit/>
+          </a:bodyPr>
+          <a:lstStyle/>
+          <a:p>
+            <a:r>
+              <a:rPr lang="en-US" dirty="0"/>
+              <a:t>Student-</a:t>
+            </a:r>
+            <a:r>
+              <a:rPr lang="en-US" dirty="0" err="1"/>
+              <a:t>details.ts</a:t>
+            </a:r>
+            <a:r>
+              <a:rPr lang="en-US" dirty="0"/>
+              <a:t>:</a:t>
+            </a:r>
+          </a:p>
+        </p:txBody>
+      </p:sp>
+    </p:spTree>
+    <p:extLst>
+      <p:ext uri="{BB962C8B-B14F-4D97-AF65-F5344CB8AC3E}">
+        <p14:creationId xmlns:p14="http://schemas.microsoft.com/office/powerpoint/2010/main" val="2483581181"/>
+      </p:ext>
+    </p:extLst>
+  </p:cSld>
+  <p:clrMapOvr>
+    <a:masterClrMapping/>
+  </p:clrMapOvr>
+</p:sld>
+</file>
+
+<file path=ppt/slides/slide19.xml><?xml version="1.0" encoding="utf-8"?>
+<p:sld xmlns:a="http://schemas.openxmlformats.org/drawingml/2006/main" xmlns:r="http://schemas.openxmlformats.org/officeDocument/2006/relationships" xmlns:p="http://schemas.openxmlformats.org/presentationml/2006/main">
+  <p:cSld>
+    <p:spTree>
+      <p:nvGrpSpPr>
+        <p:cNvPr id="1" name=""/>
+        <p:cNvGrpSpPr/>
+        <p:nvPr/>
+      </p:nvGrpSpPr>
+      <p:grpSpPr>
+        <a:xfrm>
+          <a:off x="0" y="0"/>
+          <a:ext cx="0" cy="0"/>
+          <a:chOff x="0" y="0"/>
+          <a:chExt cx="0" cy="0"/>
+        </a:xfrm>
+      </p:grpSpPr>
+      <p:sp>
+        <p:nvSpPr>
+          <p:cNvPr id="2" name="Title 1">
+            <a:extLst>
+              <a:ext uri="{FF2B5EF4-FFF2-40B4-BE49-F238E27FC236}">
+                <a16:creationId xmlns:a16="http://schemas.microsoft.com/office/drawing/2014/main" id="{D3B36608-9A34-CB07-2F78-5178871B7D0C}"/>
+              </a:ext>
+            </a:extLst>
+          </p:cNvPr>
+          <p:cNvSpPr>
+            <a:spLocks noGrp="1"/>
+          </p:cNvSpPr>
+          <p:nvPr>
+            <p:ph type="title"/>
+          </p:nvPr>
+        </p:nvSpPr>
+        <p:spPr/>
+        <p:txBody>
+          <a:bodyPr/>
+          <a:lstStyle/>
+          <a:p>
+            <a:r>
+              <a:rPr lang="en-US" dirty="0"/>
+              <a:t>Angular routing with route parameters</a:t>
+            </a:r>
+          </a:p>
+        </p:txBody>
+      </p:sp>
+      <p:sp>
+        <p:nvSpPr>
+          <p:cNvPr id="3" name="Content Placeholder 2">
+            <a:extLst>
+              <a:ext uri="{FF2B5EF4-FFF2-40B4-BE49-F238E27FC236}">
+                <a16:creationId xmlns:a16="http://schemas.microsoft.com/office/drawing/2014/main" id="{E5207E37-56E9-FCCF-842B-4D573F0C8A2A}"/>
+              </a:ext>
+            </a:extLst>
+          </p:cNvPr>
+          <p:cNvSpPr>
+            <a:spLocks noGrp="1"/>
+          </p:cNvSpPr>
+          <p:nvPr>
+            <p:ph idx="1"/>
+          </p:nvPr>
+        </p:nvSpPr>
+        <p:spPr>
+          <a:xfrm>
+            <a:off x="262216" y="2167120"/>
+            <a:ext cx="5688474" cy="4071448"/>
+          </a:xfrm>
+        </p:spPr>
+        <p:txBody>
+          <a:bodyPr>
+            <a:normAutofit/>
+          </a:bodyPr>
+          <a:lstStyle/>
+          <a:p>
+            <a:r>
+              <a:rPr lang="en-US" dirty="0"/>
+              <a:t>Now our </a:t>
+            </a:r>
+            <a:r>
+              <a:rPr lang="en-US" dirty="0" err="1"/>
+              <a:t>StudentCard</a:t>
+            </a:r>
+            <a:r>
+              <a:rPr lang="en-US" dirty="0"/>
+              <a:t> component can have a link to details for that particular student!</a:t>
+            </a:r>
+          </a:p>
+          <a:p>
+            <a:r>
+              <a:rPr lang="en-US" dirty="0"/>
+              <a:t>Don’t forget to bring in ‘</a:t>
+            </a:r>
+            <a:r>
+              <a:rPr lang="en-US" dirty="0" err="1"/>
+              <a:t>RouterLink</a:t>
+            </a:r>
+            <a:r>
+              <a:rPr lang="en-US" dirty="0"/>
+              <a:t>’ in its associated TypeScript file!</a:t>
+            </a:r>
+          </a:p>
+          <a:p>
+            <a:r>
+              <a:rPr lang="en-US" dirty="0"/>
+              <a:t>And if you have nested routes:</a:t>
+            </a:r>
+          </a:p>
+          <a:p>
+            <a:pPr lvl="1"/>
+            <a:r>
+              <a:rPr lang="en-US" dirty="0"/>
+              <a:t>For example, if your route is:</a:t>
+            </a:r>
+          </a:p>
+          <a:p>
+            <a:pPr lvl="1"/>
+            <a:r>
+              <a:rPr lang="en-US" dirty="0"/>
+              <a:t>{ path: 'students/:</a:t>
+            </a:r>
+            <a:r>
+              <a:rPr lang="en-US" dirty="0" err="1"/>
+              <a:t>studentId</a:t>
+            </a:r>
+            <a:r>
+              <a:rPr lang="en-US" dirty="0"/>
+              <a:t>/courses/:</a:t>
+            </a:r>
+            <a:r>
+              <a:rPr lang="en-US" dirty="0" err="1"/>
+              <a:t>courseId</a:t>
+            </a:r>
+            <a:r>
+              <a:rPr lang="en-US" dirty="0"/>
+              <a:t>', component: ... }</a:t>
+            </a:r>
+          </a:p>
+          <a:p>
+            <a:pPr lvl="1"/>
+            <a:r>
+              <a:rPr lang="en-US" dirty="0"/>
+              <a:t>Your </a:t>
+            </a:r>
+            <a:r>
+              <a:rPr lang="en-US" dirty="0" err="1"/>
+              <a:t>routerLink</a:t>
+            </a:r>
+            <a:r>
+              <a:rPr lang="en-US" dirty="0"/>
+              <a:t> would be:</a:t>
+            </a:r>
+          </a:p>
+          <a:p>
+            <a:pPr lvl="1"/>
+            <a:r>
+              <a:rPr lang="en-US" dirty="0"/>
+              <a:t>&lt;a [</a:t>
+            </a:r>
+            <a:r>
+              <a:rPr lang="en-US" dirty="0" err="1"/>
+              <a:t>routerLink</a:t>
+            </a:r>
+            <a:r>
+              <a:rPr lang="en-US" dirty="0"/>
+              <a:t>]="['/students', student().id, 'courses', course.id]"&gt;Course Details&lt;/a&gt;</a:t>
+            </a:r>
+          </a:p>
+          <a:p>
+            <a:endParaRPr lang="en-US" dirty="0"/>
+          </a:p>
+        </p:txBody>
+      </p:sp>
+      <p:pic>
+        <p:nvPicPr>
+          <p:cNvPr id="5" name="Picture 4">
+            <a:extLst>
+              <a:ext uri="{FF2B5EF4-FFF2-40B4-BE49-F238E27FC236}">
+                <a16:creationId xmlns:a16="http://schemas.microsoft.com/office/drawing/2014/main" id="{02CA780A-0CFB-4A7E-7A45-0DFA11EEBE98}"/>
+              </a:ext>
+            </a:extLst>
+          </p:cNvPr>
+          <p:cNvPicPr>
+            <a:picLocks noChangeAspect="1"/>
+          </p:cNvPicPr>
+          <p:nvPr/>
+        </p:nvPicPr>
+        <p:blipFill>
+          <a:blip r:embed="rId2"/>
+          <a:stretch>
+            <a:fillRect/>
+          </a:stretch>
+        </p:blipFill>
+        <p:spPr>
+          <a:xfrm>
+            <a:off x="6241311" y="3737270"/>
+            <a:ext cx="5504121" cy="931149"/>
+          </a:xfrm>
+          <a:prstGeom prst="rect">
+            <a:avLst/>
+          </a:prstGeom>
+        </p:spPr>
+      </p:pic>
+    </p:spTree>
+    <p:extLst>
+      <p:ext uri="{BB962C8B-B14F-4D97-AF65-F5344CB8AC3E}">
+        <p14:creationId xmlns:p14="http://schemas.microsoft.com/office/powerpoint/2010/main" val="2018211923"/>
+      </p:ext>
+    </p:extLst>
+  </p:cSld>
+  <p:clrMapOvr>
+    <a:masterClrMapping/>
+  </p:clrMapOvr>
+</p:sld>
+</file>
+
 <file path=ppt/slides/slide2.xml><?xml version="1.0" encoding="utf-8"?>
 <p:sld xmlns:a="http://schemas.openxmlformats.org/drawingml/2006/main" xmlns:r="http://schemas.openxmlformats.org/officeDocument/2006/relationships" xmlns:p="http://schemas.openxmlformats.org/presentationml/2006/main">
   <p:cSld>
@@ -5483,6 +7210,442 @@
     <p:extLst>
       <p:ext uri="{BB962C8B-B14F-4D97-AF65-F5344CB8AC3E}">
         <p14:creationId xmlns:p14="http://schemas.microsoft.com/office/powerpoint/2010/main" val="1537627767"/>
+      </p:ext>
+    </p:extLst>
+  </p:cSld>
+  <p:clrMapOvr>
+    <a:masterClrMapping/>
+  </p:clrMapOvr>
+</p:sld>
+</file>
+
+<file path=ppt/slides/slide20.xml><?xml version="1.0" encoding="utf-8"?>
+<p:sld xmlns:a="http://schemas.openxmlformats.org/drawingml/2006/main" xmlns:r="http://schemas.openxmlformats.org/officeDocument/2006/relationships" xmlns:p="http://schemas.openxmlformats.org/presentationml/2006/main">
+  <p:cSld>
+    <p:spTree>
+      <p:nvGrpSpPr>
+        <p:cNvPr id="1" name="">
+          <a:extLst>
+            <a:ext uri="{FF2B5EF4-FFF2-40B4-BE49-F238E27FC236}">
+              <a16:creationId xmlns:a16="http://schemas.microsoft.com/office/drawing/2014/main" id="{2B3EC5A3-BBC1-22A2-7E7F-64EE85FFD554}"/>
+            </a:ext>
+          </a:extLst>
+        </p:cNvPr>
+        <p:cNvGrpSpPr/>
+        <p:nvPr/>
+      </p:nvGrpSpPr>
+      <p:grpSpPr>
+        <a:xfrm>
+          <a:off x="0" y="0"/>
+          <a:ext cx="0" cy="0"/>
+          <a:chOff x="0" y="0"/>
+          <a:chExt cx="0" cy="0"/>
+        </a:xfrm>
+      </p:grpSpPr>
+      <p:sp>
+        <p:nvSpPr>
+          <p:cNvPr id="2" name="Title 1">
+            <a:extLst>
+              <a:ext uri="{FF2B5EF4-FFF2-40B4-BE49-F238E27FC236}">
+                <a16:creationId xmlns:a16="http://schemas.microsoft.com/office/drawing/2014/main" id="{688CB7F9-326B-1E7C-E4C2-287C9BEA40CF}"/>
+              </a:ext>
+            </a:extLst>
+          </p:cNvPr>
+          <p:cNvSpPr>
+            <a:spLocks noGrp="1"/>
+          </p:cNvSpPr>
+          <p:nvPr>
+            <p:ph type="title"/>
+          </p:nvPr>
+        </p:nvSpPr>
+        <p:spPr/>
+        <p:txBody>
+          <a:bodyPr>
+            <a:normAutofit/>
+          </a:bodyPr>
+          <a:lstStyle/>
+          <a:p>
+            <a:r>
+              <a:rPr lang="en-US" sz="2400" dirty="0"/>
+              <a:t>Challenge – catch-up</a:t>
+            </a:r>
+          </a:p>
+        </p:txBody>
+      </p:sp>
+      <p:sp>
+        <p:nvSpPr>
+          <p:cNvPr id="3" name="Content Placeholder 2">
+            <a:extLst>
+              <a:ext uri="{FF2B5EF4-FFF2-40B4-BE49-F238E27FC236}">
+                <a16:creationId xmlns:a16="http://schemas.microsoft.com/office/drawing/2014/main" id="{0B82481C-DCD4-18A7-7883-81DC90B28438}"/>
+              </a:ext>
+            </a:extLst>
+          </p:cNvPr>
+          <p:cNvSpPr>
+            <a:spLocks noGrp="1"/>
+          </p:cNvSpPr>
+          <p:nvPr>
+            <p:ph idx="1"/>
+          </p:nvPr>
+        </p:nvSpPr>
+        <p:spPr>
+          <a:xfrm>
+            <a:off x="581192" y="2475925"/>
+            <a:ext cx="5317584" cy="1681246"/>
+          </a:xfrm>
+        </p:spPr>
+        <p:txBody>
+          <a:bodyPr/>
+          <a:lstStyle/>
+          <a:p>
+            <a:r>
+              <a:rPr lang="en-US" dirty="0"/>
+              <a:t>Make sure to stop here and catch up</a:t>
+            </a:r>
+          </a:p>
+        </p:txBody>
+      </p:sp>
+      <p:sp>
+        <p:nvSpPr>
+          <p:cNvPr id="6" name="TextBox 5">
+            <a:extLst>
+              <a:ext uri="{FF2B5EF4-FFF2-40B4-BE49-F238E27FC236}">
+                <a16:creationId xmlns:a16="http://schemas.microsoft.com/office/drawing/2014/main" id="{A9D48B54-DB4F-9FA2-00A5-38CE6A910D87}"/>
+              </a:ext>
+            </a:extLst>
+          </p:cNvPr>
+          <p:cNvSpPr txBox="1"/>
+          <p:nvPr/>
+        </p:nvSpPr>
+        <p:spPr>
+          <a:xfrm>
+            <a:off x="1228165" y="2402747"/>
+            <a:ext cx="756938" cy="369332"/>
+          </a:xfrm>
+          <a:prstGeom prst="rect">
+            <a:avLst/>
+          </a:prstGeom>
+          <a:noFill/>
+        </p:spPr>
+        <p:txBody>
+          <a:bodyPr wrap="none" rtlCol="0">
+            <a:spAutoFit/>
+          </a:bodyPr>
+          <a:lstStyle/>
+          <a:p>
+            <a:r>
+              <a:rPr lang="en-US" b="1" dirty="0"/>
+              <a:t>Goal:</a:t>
+            </a:r>
+          </a:p>
+        </p:txBody>
+      </p:sp>
+      <p:sp>
+        <p:nvSpPr>
+          <p:cNvPr id="7" name="TextBox 6">
+            <a:extLst>
+              <a:ext uri="{FF2B5EF4-FFF2-40B4-BE49-F238E27FC236}">
+                <a16:creationId xmlns:a16="http://schemas.microsoft.com/office/drawing/2014/main" id="{D52875CB-28F0-0EDE-8E65-E7C56825A34B}"/>
+              </a:ext>
+            </a:extLst>
+          </p:cNvPr>
+          <p:cNvSpPr txBox="1"/>
+          <p:nvPr/>
+        </p:nvSpPr>
+        <p:spPr>
+          <a:xfrm>
+            <a:off x="6949165" y="2402747"/>
+            <a:ext cx="4661643" cy="369332"/>
+          </a:xfrm>
+          <a:prstGeom prst="rect">
+            <a:avLst/>
+          </a:prstGeom>
+          <a:noFill/>
+        </p:spPr>
+        <p:txBody>
+          <a:bodyPr wrap="square" rtlCol="0">
+            <a:spAutoFit/>
+          </a:bodyPr>
+          <a:lstStyle/>
+          <a:p>
+            <a:r>
+              <a:rPr lang="en-US" b="1" dirty="0"/>
+              <a:t>Scenario:  			   5 min</a:t>
+            </a:r>
+          </a:p>
+        </p:txBody>
+      </p:sp>
+      <p:sp>
+        <p:nvSpPr>
+          <p:cNvPr id="8" name="Content Placeholder 2">
+            <a:extLst>
+              <a:ext uri="{FF2B5EF4-FFF2-40B4-BE49-F238E27FC236}">
+                <a16:creationId xmlns:a16="http://schemas.microsoft.com/office/drawing/2014/main" id="{7532C02B-F837-144B-F34A-5D7325F9448E}"/>
+              </a:ext>
+            </a:extLst>
+          </p:cNvPr>
+          <p:cNvSpPr txBox="1">
+            <a:spLocks/>
+          </p:cNvSpPr>
+          <p:nvPr/>
+        </p:nvSpPr>
+        <p:spPr>
+          <a:xfrm>
+            <a:off x="6545749" y="2772078"/>
+            <a:ext cx="4661642" cy="3012033"/>
+          </a:xfrm>
+          <a:prstGeom prst="rect">
+            <a:avLst/>
+          </a:prstGeom>
+        </p:spPr>
+        <p:txBody>
+          <a:bodyPr vert="horz" lIns="91440" tIns="45720" rIns="91440" bIns="45720" rtlCol="0" anchor="ctr">
+            <a:normAutofit/>
+          </a:bodyPr>
+          <a:lstStyle>
+            <a:lvl1pPr marL="306000" indent="-306000" algn="l" defTabSz="457200" rtl="0" eaLnBrk="1" latinLnBrk="0" hangingPunct="1">
+              <a:spcBef>
+                <a:spcPct val="20000"/>
+              </a:spcBef>
+              <a:spcAft>
+                <a:spcPts val="600"/>
+              </a:spcAft>
+              <a:buClr>
+                <a:schemeClr val="accent2"/>
+              </a:buClr>
+              <a:buSzPct val="92000"/>
+              <a:buFont typeface="Wingdings 2" panose="05020102010507070707" pitchFamily="18" charset="2"/>
+              <a:buChar char=""/>
+              <a:defRPr sz="1800" kern="1200">
+                <a:solidFill>
+                  <a:schemeClr val="tx2"/>
+                </a:solidFill>
+                <a:latin typeface="+mn-lt"/>
+                <a:ea typeface="+mn-ea"/>
+                <a:cs typeface="+mn-cs"/>
+              </a:defRPr>
+            </a:lvl1pPr>
+            <a:lvl2pPr marL="630000" indent="-306000" algn="l" defTabSz="457200" rtl="0" eaLnBrk="1" latinLnBrk="0" hangingPunct="1">
+              <a:spcBef>
+                <a:spcPct val="20000"/>
+              </a:spcBef>
+              <a:spcAft>
+                <a:spcPts val="600"/>
+              </a:spcAft>
+              <a:buClr>
+                <a:schemeClr val="accent2"/>
+              </a:buClr>
+              <a:buSzPct val="92000"/>
+              <a:buFont typeface="Wingdings 2" panose="05020102010507070707" pitchFamily="18" charset="2"/>
+              <a:buChar char=""/>
+              <a:defRPr sz="1600" kern="1200">
+                <a:solidFill>
+                  <a:schemeClr val="tx2"/>
+                </a:solidFill>
+                <a:latin typeface="+mn-lt"/>
+                <a:ea typeface="+mn-ea"/>
+                <a:cs typeface="+mn-cs"/>
+              </a:defRPr>
+            </a:lvl2pPr>
+            <a:lvl3pPr marL="900000" indent="-270000" algn="l" defTabSz="457200" rtl="0" eaLnBrk="1" latinLnBrk="0" hangingPunct="1">
+              <a:spcBef>
+                <a:spcPct val="20000"/>
+              </a:spcBef>
+              <a:spcAft>
+                <a:spcPts val="600"/>
+              </a:spcAft>
+              <a:buClr>
+                <a:schemeClr val="accent2"/>
+              </a:buClr>
+              <a:buSzPct val="92000"/>
+              <a:buFont typeface="Wingdings 2" panose="05020102010507070707" pitchFamily="18" charset="2"/>
+              <a:buChar char=""/>
+              <a:defRPr sz="1400" kern="1200">
+                <a:solidFill>
+                  <a:schemeClr val="tx2"/>
+                </a:solidFill>
+                <a:latin typeface="+mn-lt"/>
+                <a:ea typeface="+mn-ea"/>
+                <a:cs typeface="+mn-cs"/>
+              </a:defRPr>
+            </a:lvl3pPr>
+            <a:lvl4pPr marL="1242000" indent="-234000" algn="l" defTabSz="457200" rtl="0" eaLnBrk="1" latinLnBrk="0" hangingPunct="1">
+              <a:spcBef>
+                <a:spcPct val="20000"/>
+              </a:spcBef>
+              <a:spcAft>
+                <a:spcPts val="600"/>
+              </a:spcAft>
+              <a:buClr>
+                <a:schemeClr val="accent2"/>
+              </a:buClr>
+              <a:buSzPct val="92000"/>
+              <a:buFont typeface="Wingdings 2" panose="05020102010507070707" pitchFamily="18" charset="2"/>
+              <a:buChar char=""/>
+              <a:defRPr sz="1200" kern="1200">
+                <a:solidFill>
+                  <a:schemeClr val="tx2"/>
+                </a:solidFill>
+                <a:latin typeface="+mn-lt"/>
+                <a:ea typeface="+mn-ea"/>
+                <a:cs typeface="+mn-cs"/>
+              </a:defRPr>
+            </a:lvl4pPr>
+            <a:lvl5pPr marL="1602000" indent="-234000" algn="l" defTabSz="457200" rtl="0" eaLnBrk="1" latinLnBrk="0" hangingPunct="1">
+              <a:spcBef>
+                <a:spcPct val="20000"/>
+              </a:spcBef>
+              <a:spcAft>
+                <a:spcPts val="600"/>
+              </a:spcAft>
+              <a:buClr>
+                <a:schemeClr val="accent2"/>
+              </a:buClr>
+              <a:buSzPct val="92000"/>
+              <a:buFont typeface="Wingdings 2" panose="05020102010507070707" pitchFamily="18" charset="2"/>
+              <a:buChar char=""/>
+              <a:defRPr sz="1200" kern="1200">
+                <a:solidFill>
+                  <a:schemeClr val="tx2"/>
+                </a:solidFill>
+                <a:latin typeface="+mn-lt"/>
+                <a:ea typeface="+mn-ea"/>
+                <a:cs typeface="+mn-cs"/>
+              </a:defRPr>
+            </a:lvl5pPr>
+            <a:lvl6pPr marL="1900000" indent="-228600" algn="l" defTabSz="457200" rtl="0" eaLnBrk="1" latinLnBrk="0" hangingPunct="1">
+              <a:spcBef>
+                <a:spcPct val="20000"/>
+              </a:spcBef>
+              <a:spcAft>
+                <a:spcPts val="600"/>
+              </a:spcAft>
+              <a:buClr>
+                <a:schemeClr val="accent2"/>
+              </a:buClr>
+              <a:buSzPct val="92000"/>
+              <a:buFont typeface="Wingdings 2" panose="05020102010507070707" pitchFamily="18" charset="2"/>
+              <a:buChar char=""/>
+              <a:defRPr sz="1200" kern="1200">
+                <a:solidFill>
+                  <a:schemeClr val="tx2"/>
+                </a:solidFill>
+                <a:latin typeface="+mn-lt"/>
+                <a:ea typeface="+mn-ea"/>
+                <a:cs typeface="+mn-cs"/>
+              </a:defRPr>
+            </a:lvl6pPr>
+            <a:lvl7pPr marL="2200000" indent="-228600" algn="l" defTabSz="457200" rtl="0" eaLnBrk="1" latinLnBrk="0" hangingPunct="1">
+              <a:spcBef>
+                <a:spcPct val="20000"/>
+              </a:spcBef>
+              <a:spcAft>
+                <a:spcPts val="600"/>
+              </a:spcAft>
+              <a:buClr>
+                <a:schemeClr val="accent2"/>
+              </a:buClr>
+              <a:buSzPct val="92000"/>
+              <a:buFont typeface="Wingdings 2" panose="05020102010507070707" pitchFamily="18" charset="2"/>
+              <a:buChar char=""/>
+              <a:defRPr sz="1200" kern="1200">
+                <a:solidFill>
+                  <a:schemeClr val="tx2"/>
+                </a:solidFill>
+                <a:latin typeface="+mn-lt"/>
+                <a:ea typeface="+mn-ea"/>
+                <a:cs typeface="+mn-cs"/>
+              </a:defRPr>
+            </a:lvl7pPr>
+            <a:lvl8pPr marL="2500000" indent="-228600" algn="l" defTabSz="457200" rtl="0" eaLnBrk="1" latinLnBrk="0" hangingPunct="1">
+              <a:spcBef>
+                <a:spcPct val="20000"/>
+              </a:spcBef>
+              <a:spcAft>
+                <a:spcPts val="600"/>
+              </a:spcAft>
+              <a:buClr>
+                <a:schemeClr val="accent2"/>
+              </a:buClr>
+              <a:buSzPct val="92000"/>
+              <a:buFont typeface="Wingdings 2" panose="05020102010507070707" pitchFamily="18" charset="2"/>
+              <a:buChar char=""/>
+              <a:defRPr sz="1200" kern="1200">
+                <a:solidFill>
+                  <a:schemeClr val="tx2"/>
+                </a:solidFill>
+                <a:latin typeface="+mn-lt"/>
+                <a:ea typeface="+mn-ea"/>
+                <a:cs typeface="+mn-cs"/>
+              </a:defRPr>
+            </a:lvl8pPr>
+            <a:lvl9pPr marL="2800000" indent="-228600" algn="l" defTabSz="457200" rtl="0" eaLnBrk="1" latinLnBrk="0" hangingPunct="1">
+              <a:spcBef>
+                <a:spcPct val="20000"/>
+              </a:spcBef>
+              <a:spcAft>
+                <a:spcPts val="600"/>
+              </a:spcAft>
+              <a:buClr>
+                <a:schemeClr val="accent2"/>
+              </a:buClr>
+              <a:buSzPct val="92000"/>
+              <a:buFont typeface="Wingdings 2" panose="05020102010507070707" pitchFamily="18" charset="2"/>
+              <a:buChar char=""/>
+              <a:defRPr sz="1200" kern="1200">
+                <a:solidFill>
+                  <a:schemeClr val="tx2"/>
+                </a:solidFill>
+                <a:latin typeface="+mn-lt"/>
+                <a:ea typeface="+mn-ea"/>
+                <a:cs typeface="+mn-cs"/>
+              </a:defRPr>
+            </a:lvl9pPr>
+          </a:lstStyle>
+          <a:p>
+            <a:r>
+              <a:rPr lang="en-US" dirty="0"/>
+              <a:t>Implement </a:t>
+            </a:r>
+            <a:r>
+              <a:rPr lang="en-US" dirty="0" err="1"/>
+              <a:t>StudentService</a:t>
+            </a:r>
+            <a:endParaRPr lang="en-US" dirty="0"/>
+          </a:p>
+          <a:p>
+            <a:r>
+              <a:rPr lang="en-US" dirty="0"/>
+              <a:t>Create an ‘About’ component to act as a view to describe our website</a:t>
+            </a:r>
+          </a:p>
+          <a:p>
+            <a:r>
+              <a:rPr lang="en-US" dirty="0"/>
+              <a:t>Create a ‘</a:t>
+            </a:r>
+            <a:r>
+              <a:rPr lang="en-US" dirty="0" err="1"/>
+              <a:t>StudentDetails</a:t>
+            </a:r>
+            <a:r>
+              <a:rPr lang="en-US" dirty="0"/>
+              <a:t>’ component that displays all fields of student</a:t>
+            </a:r>
+          </a:p>
+          <a:p>
+            <a:pPr lvl="1"/>
+            <a:r>
+              <a:rPr lang="en-US" dirty="0"/>
+              <a:t>It should use route parameter routing to dynamically populate this info </a:t>
+            </a:r>
+          </a:p>
+        </p:txBody>
+      </p:sp>
+    </p:spTree>
+    <p:extLst>
+      <p:ext uri="{BB962C8B-B14F-4D97-AF65-F5344CB8AC3E}">
+        <p14:creationId xmlns:p14="http://schemas.microsoft.com/office/powerpoint/2010/main" val="3066534917"/>
       </p:ext>
     </p:extLst>
   </p:cSld>
@@ -6730,12 +8893,12 @@
         <p:spPr>
           <a:xfrm>
             <a:off x="581193" y="2180496"/>
-            <a:ext cx="4050184" cy="4082081"/>
+            <a:ext cx="4050184" cy="4443588"/>
           </a:xfrm>
         </p:spPr>
         <p:txBody>
           <a:bodyPr>
-            <a:normAutofit fontScale="92500" lnSpcReduction="10000"/>
+            <a:normAutofit fontScale="92500" lnSpcReduction="20000"/>
           </a:bodyPr>
           <a:lstStyle/>
           <a:p>
@@ -6840,6 +9003,32 @@
                 </a:solidFill>
               </a:rPr>
               <a:t>Output – allows us to emit data to a parent component </a:t>
+            </a:r>
+          </a:p>
+          <a:p>
+            <a:r>
+              <a:rPr lang="en-US" dirty="0">
+                <a:solidFill>
+                  <a:schemeClr val="tx1"/>
+                </a:solidFill>
+              </a:rPr>
+              <a:t>@Input &amp; @Output – in older code you may see this syntax, it won’t benefit however from </a:t>
+            </a:r>
+            <a:r>
+              <a:rPr lang="en-US" dirty="0" err="1">
+                <a:solidFill>
+                  <a:schemeClr val="tx1"/>
+                </a:solidFill>
+              </a:rPr>
+              <a:t>Angular’s</a:t>
+            </a:r>
+            <a:r>
+              <a:rPr lang="en-US" dirty="0">
+                <a:solidFill>
+                  <a:schemeClr val="tx1"/>
+                </a:solidFill>
+              </a:rPr>
+              <a:t> signal API and reactivity (more on that later)</a:t>
             </a:r>
             <a:endParaRPr lang="en-US" dirty="0">
               <a:solidFill>
@@ -7067,8 +9256,8 @@
         </p:nvSpPr>
         <p:spPr>
           <a:xfrm>
-            <a:off x="581192" y="2180496"/>
-            <a:ext cx="6202380" cy="1821487"/>
+            <a:off x="581192" y="1924494"/>
+            <a:ext cx="6202380" cy="2077490"/>
           </a:xfrm>
         </p:spPr>
         <p:txBody>
@@ -7129,7 +9318,7 @@
           <a:p>
             <a:r>
               <a:rPr lang="en-US" dirty="0"/>
-              <a:t>@for – control flow block for iteration; important to use ‘track’ on unique elements</a:t>
+              <a:t>@for – control flow block for iteration; important to use ‘track’ on unique elements so Angular can make changes to single items and doesn’t need to rebuild/regenerate the entire list when the collection changes</a:t>
             </a:r>
           </a:p>
         </p:txBody>

--- a/Week_7/Angular.pptx
+++ b/Week_7/Angular.pptx
@@ -19,12 +19,17 @@
     <p:sldId id="262" r:id="rId13"/>
     <p:sldId id="354" r:id="rId14"/>
     <p:sldId id="355" r:id="rId15"/>
-    <p:sldId id="305" r:id="rId16"/>
-    <p:sldId id="356" r:id="rId17"/>
-    <p:sldId id="357" r:id="rId18"/>
-    <p:sldId id="358" r:id="rId19"/>
-    <p:sldId id="359" r:id="rId20"/>
-    <p:sldId id="360" r:id="rId21"/>
+    <p:sldId id="364" r:id="rId16"/>
+    <p:sldId id="305" r:id="rId17"/>
+    <p:sldId id="356" r:id="rId18"/>
+    <p:sldId id="357" r:id="rId19"/>
+    <p:sldId id="358" r:id="rId20"/>
+    <p:sldId id="359" r:id="rId21"/>
+    <p:sldId id="360" r:id="rId22"/>
+    <p:sldId id="361" r:id="rId23"/>
+    <p:sldId id="362" r:id="rId24"/>
+    <p:sldId id="366" r:id="rId25"/>
+    <p:sldId id="365" r:id="rId26"/>
   </p:sldIdLst>
   <p:sldSz cx="12192000" cy="6858000"/>
   <p:notesSz cx="6858000" cy="9144000"/>
@@ -5636,7 +5641,13 @@
   <p:cSld>
     <p:spTree>
       <p:nvGrpSpPr>
-        <p:cNvPr id="1" name=""/>
+        <p:cNvPr id="1" name="">
+          <a:extLst>
+            <a:ext uri="{FF2B5EF4-FFF2-40B4-BE49-F238E27FC236}">
+              <a16:creationId xmlns:a16="http://schemas.microsoft.com/office/drawing/2014/main" id="{FA8DB13B-D3A0-E461-FCFC-B18751E9DBF8}"/>
+            </a:ext>
+          </a:extLst>
+        </p:cNvPr>
         <p:cNvGrpSpPr/>
         <p:nvPr/>
       </p:nvGrpSpPr>
@@ -5653,7 +5664,7 @@
           <p:cNvPr id="2" name="Title 1">
             <a:extLst>
               <a:ext uri="{FF2B5EF4-FFF2-40B4-BE49-F238E27FC236}">
-                <a16:creationId xmlns:a16="http://schemas.microsoft.com/office/drawing/2014/main" id="{2D1A7E6B-545C-B91E-1784-1B8AE8B3795D}"/>
+                <a16:creationId xmlns:a16="http://schemas.microsoft.com/office/drawing/2014/main" id="{795FE7F8-539B-3379-0FF5-C4694320D5C6}"/>
               </a:ext>
             </a:extLst>
           </p:cNvPr>
@@ -5666,22 +5677,24 @@
         </p:nvSpPr>
         <p:spPr/>
         <p:txBody>
-          <a:bodyPr/>
+          <a:bodyPr>
+            <a:normAutofit/>
+          </a:bodyPr>
           <a:lstStyle/>
           <a:p>
             <a:r>
-              <a:rPr lang="en-US" dirty="0"/>
-              <a:t>What is angular Routing? What is Deep linking?</a:t>
-            </a:r>
-          </a:p>
-        </p:txBody>
-      </p:sp>
-      <p:sp>
-        <p:nvSpPr>
-          <p:cNvPr id="4" name="Content Placeholder 2">
+              <a:rPr lang="en-US" sz="2400" dirty="0"/>
+              <a:t>Challenge</a:t>
+            </a:r>
+          </a:p>
+        </p:txBody>
+      </p:sp>
+      <p:sp>
+        <p:nvSpPr>
+          <p:cNvPr id="3" name="Content Placeholder 2">
             <a:extLst>
               <a:ext uri="{FF2B5EF4-FFF2-40B4-BE49-F238E27FC236}">
-                <a16:creationId xmlns:a16="http://schemas.microsoft.com/office/drawing/2014/main" id="{377F7FAB-49DF-A039-C8FE-2835C650BE41}"/>
+                <a16:creationId xmlns:a16="http://schemas.microsoft.com/office/drawing/2014/main" id="{03A379A0-FBC3-620F-83C7-0C2580D5179F}"/>
               </a:ext>
             </a:extLst>
           </p:cNvPr>
@@ -5694,8 +5707,8 @@
         </p:nvSpPr>
         <p:spPr>
           <a:xfrm>
-            <a:off x="581192" y="1894353"/>
-            <a:ext cx="5389302" cy="3974619"/>
+            <a:off x="581192" y="2475925"/>
+            <a:ext cx="5317584" cy="1681246"/>
           </a:xfrm>
         </p:spPr>
         <p:txBody>
@@ -5704,64 +5717,87 @@
           <a:p>
             <a:r>
               <a:rPr lang="en-US" dirty="0"/>
-              <a:t>Definition: </a:t>
-            </a:r>
-            <a:r>
-              <a:rPr lang="en-US" dirty="0">
-                <a:solidFill>
-                  <a:schemeClr val="accent2"/>
-                </a:solidFill>
-              </a:rPr>
-              <a:t>Routing </a:t>
-            </a:r>
-            <a:r>
-              <a:rPr lang="en-US" dirty="0"/>
-              <a:t>is the process to provide easy navigation between different views based on the browser URL</a:t>
-            </a:r>
-          </a:p>
-          <a:p>
-            <a:pPr lvl="1"/>
-            <a:r>
-              <a:rPr lang="en-US" dirty="0"/>
-              <a:t>This enables deep linking</a:t>
-            </a:r>
-          </a:p>
-          <a:p>
-            <a:pPr lvl="1"/>
-            <a:r>
-              <a:rPr lang="en-US" dirty="0"/>
-              <a:t>Handle URL parameters and query strings</a:t>
-            </a:r>
-          </a:p>
-          <a:p>
-            <a:pPr lvl="1"/>
-            <a:r>
-              <a:rPr lang="en-US" dirty="0"/>
-              <a:t>Manage browser history &amp; navigation</a:t>
-            </a:r>
-          </a:p>
-          <a:p>
-            <a:pPr lvl="1"/>
-            <a:r>
-              <a:rPr lang="en-US" dirty="0"/>
-              <a:t>Create nested routes and layouts</a:t>
-            </a:r>
-          </a:p>
-          <a:p>
-            <a:pPr lvl="1"/>
-            <a:r>
-              <a:rPr lang="en-US" dirty="0"/>
-              <a:t>Implement protected routes for authentication</a:t>
-            </a:r>
-          </a:p>
-        </p:txBody>
-      </p:sp>
-      <p:sp>
-        <p:nvSpPr>
-          <p:cNvPr id="5" name="Content Placeholder 2">
+              <a:t>Update our delete functionality </a:t>
+            </a:r>
+          </a:p>
+        </p:txBody>
+      </p:sp>
+      <p:sp>
+        <p:nvSpPr>
+          <p:cNvPr id="6" name="TextBox 5">
             <a:extLst>
               <a:ext uri="{FF2B5EF4-FFF2-40B4-BE49-F238E27FC236}">
-                <a16:creationId xmlns:a16="http://schemas.microsoft.com/office/drawing/2014/main" id="{CC3D5F76-B2C3-5605-B374-F0F18426EE53}"/>
+                <a16:creationId xmlns:a16="http://schemas.microsoft.com/office/drawing/2014/main" id="{8B5BB53D-221E-23E3-53EE-B2EE99B6429E}"/>
+              </a:ext>
+            </a:extLst>
+          </p:cNvPr>
+          <p:cNvSpPr txBox="1"/>
+          <p:nvPr/>
+        </p:nvSpPr>
+        <p:spPr>
+          <a:xfrm>
+            <a:off x="1228165" y="2402747"/>
+            <a:ext cx="756938" cy="369332"/>
+          </a:xfrm>
+          <a:prstGeom prst="rect">
+            <a:avLst/>
+          </a:prstGeom>
+          <a:noFill/>
+        </p:spPr>
+        <p:txBody>
+          <a:bodyPr wrap="none" rtlCol="0">
+            <a:spAutoFit/>
+          </a:bodyPr>
+          <a:lstStyle/>
+          <a:p>
+            <a:r>
+              <a:rPr lang="en-US" b="1" dirty="0"/>
+              <a:t>Goal:</a:t>
+            </a:r>
+          </a:p>
+        </p:txBody>
+      </p:sp>
+      <p:sp>
+        <p:nvSpPr>
+          <p:cNvPr id="7" name="TextBox 6">
+            <a:extLst>
+              <a:ext uri="{FF2B5EF4-FFF2-40B4-BE49-F238E27FC236}">
+                <a16:creationId xmlns:a16="http://schemas.microsoft.com/office/drawing/2014/main" id="{6770B269-F4B7-61DD-DBC8-D65A8CD1F9AD}"/>
+              </a:ext>
+            </a:extLst>
+          </p:cNvPr>
+          <p:cNvSpPr txBox="1"/>
+          <p:nvPr/>
+        </p:nvSpPr>
+        <p:spPr>
+          <a:xfrm>
+            <a:off x="6949165" y="2402747"/>
+            <a:ext cx="4661643" cy="369332"/>
+          </a:xfrm>
+          <a:prstGeom prst="rect">
+            <a:avLst/>
+          </a:prstGeom>
+          <a:noFill/>
+        </p:spPr>
+        <p:txBody>
+          <a:bodyPr wrap="square" rtlCol="0">
+            <a:spAutoFit/>
+          </a:bodyPr>
+          <a:lstStyle/>
+          <a:p>
+            <a:r>
+              <a:rPr lang="en-US" b="1" dirty="0"/>
+              <a:t>Scenario:  			   5 min</a:t>
+            </a:r>
+          </a:p>
+        </p:txBody>
+      </p:sp>
+      <p:sp>
+        <p:nvSpPr>
+          <p:cNvPr id="8" name="Content Placeholder 2">
+            <a:extLst>
+              <a:ext uri="{FF2B5EF4-FFF2-40B4-BE49-F238E27FC236}">
+                <a16:creationId xmlns:a16="http://schemas.microsoft.com/office/drawing/2014/main" id="{9AC8D5CF-652D-8DA4-029F-D7430F017467}"/>
               </a:ext>
             </a:extLst>
           </p:cNvPr>
@@ -5772,8 +5808,8 @@
         </p:nvSpPr>
         <p:spPr>
           <a:xfrm>
-            <a:off x="6096000" y="2763866"/>
-            <a:ext cx="5389300" cy="3391978"/>
+            <a:off x="6545749" y="2772079"/>
+            <a:ext cx="4661642" cy="2694104"/>
           </a:xfrm>
           <a:prstGeom prst="rect">
             <a:avLst/>
@@ -5781,7 +5817,7 @@
         </p:spPr>
         <p:txBody>
           <a:bodyPr vert="horz" lIns="91440" tIns="45720" rIns="91440" bIns="45720" rtlCol="0" anchor="ctr">
-            <a:normAutofit fontScale="92500" lnSpcReduction="20000"/>
+            <a:normAutofit fontScale="92500"/>
           </a:bodyPr>
           <a:lstStyle>
             <a:lvl1pPr marL="306000" indent="-306000" algn="l" defTabSz="457200" rtl="0" eaLnBrk="1" latinLnBrk="0" hangingPunct="1">
@@ -5986,87 +6022,131 @@
           <a:p>
             <a:r>
               <a:rPr lang="en-US" dirty="0"/>
-              <a:t>Definition: </a:t>
-            </a:r>
-            <a:r>
-              <a:rPr lang="en-US" dirty="0">
-                <a:solidFill>
-                  <a:schemeClr val="accent2"/>
-                </a:solidFill>
-              </a:rPr>
-              <a:t>Deep Linking </a:t>
-            </a:r>
-            <a:r>
-              <a:rPr lang="en-US" dirty="0">
-                <a:solidFill>
-                  <a:schemeClr val="tx1"/>
-                </a:solidFill>
-              </a:rPr>
-              <a:t>is the practice of using hyperlinks to send users directly to specific content within our applications </a:t>
-            </a:r>
-          </a:p>
-          <a:p>
-            <a:r>
-              <a:rPr lang="en-US" dirty="0"/>
-              <a:t>1-2 levels deep: most apps</a:t>
-            </a:r>
-          </a:p>
-          <a:p>
-            <a:pPr lvl="1"/>
-            <a:r>
-              <a:rPr lang="en-US" dirty="0"/>
-              <a:t>/dashboard</a:t>
-            </a:r>
-          </a:p>
-          <a:p>
-            <a:pPr lvl="1"/>
-            <a:r>
-              <a:rPr lang="en-US" dirty="0"/>
-              <a:t>/products/45</a:t>
-            </a:r>
-          </a:p>
-          <a:p>
-            <a:r>
-              <a:rPr lang="en-US" dirty="0"/>
-              <a:t>3-4 levels deeps: common for structured apps</a:t>
-            </a:r>
-          </a:p>
-          <a:p>
-            <a:pPr lvl="1"/>
-            <a:r>
-              <a:rPr lang="en-US" dirty="0"/>
-              <a:t>/dashboard/reports/weekly</a:t>
-            </a:r>
-          </a:p>
-          <a:p>
-            <a:pPr lvl="1"/>
-            <a:r>
-              <a:rPr lang="en-US" dirty="0"/>
-              <a:t>/shop/products/46/reviews</a:t>
-            </a:r>
-          </a:p>
-          <a:p>
-            <a:r>
-              <a:rPr lang="en-US" dirty="0"/>
-              <a:t>5+ levels deep: Rare but possible, usually in enterprise </a:t>
-            </a:r>
-          </a:p>
-          <a:p>
-            <a:pPr lvl="1"/>
-            <a:r>
-              <a:rPr lang="en-US" dirty="0"/>
-              <a:t>/orgs/12/projects/55/tasks/34/comments/2</a:t>
-            </a:r>
-          </a:p>
-          <a:p>
-            <a:endParaRPr lang="en-US" dirty="0"/>
-          </a:p>
-        </p:txBody>
-      </p:sp>
+              <a:t>Create a method in our service to handle delete functionality</a:t>
+            </a:r>
+          </a:p>
+          <a:p>
+            <a:r>
+              <a:rPr lang="en-US" dirty="0"/>
+              <a:t>In our home method, once we hear a child card call to delete the student, we should instead call our new </a:t>
+            </a:r>
+            <a:r>
+              <a:rPr lang="en-US" dirty="0" err="1"/>
+              <a:t>deleteStudent</a:t>
+            </a:r>
+            <a:r>
+              <a:rPr lang="en-US" dirty="0"/>
+              <a:t> service method</a:t>
+            </a:r>
+          </a:p>
+          <a:p>
+            <a:r>
+              <a:rPr lang="en-US" dirty="0"/>
+              <a:t>Make sure you sync the list!</a:t>
+            </a:r>
+          </a:p>
+          <a:p>
+            <a:r>
+              <a:rPr lang="en-US" dirty="0"/>
+              <a:t>We are starting to worry about state management!</a:t>
+            </a:r>
+          </a:p>
+        </p:txBody>
+      </p:sp>
+      <p:pic>
+        <p:nvPicPr>
+          <p:cNvPr id="5" name="Picture 4">
+            <a:extLst>
+              <a:ext uri="{FF2B5EF4-FFF2-40B4-BE49-F238E27FC236}">
+                <a16:creationId xmlns:a16="http://schemas.microsoft.com/office/drawing/2014/main" id="{A71233CE-9A5F-67B5-C022-3FA361B177E8}"/>
+              </a:ext>
+            </a:extLst>
+          </p:cNvPr>
+          <p:cNvPicPr>
+            <a:picLocks noChangeAspect="1"/>
+          </p:cNvPicPr>
+          <p:nvPr/>
+        </p:nvPicPr>
+        <p:blipFill>
+          <a:blip r:embed="rId2"/>
+          <a:stretch>
+            <a:fillRect/>
+          </a:stretch>
+        </p:blipFill>
+        <p:spPr>
+          <a:xfrm>
+            <a:off x="1741531" y="3890007"/>
+            <a:ext cx="1498453" cy="2570875"/>
+          </a:xfrm>
+          <a:prstGeom prst="rect">
+            <a:avLst/>
+          </a:prstGeom>
+        </p:spPr>
+      </p:pic>
+      <p:pic>
+        <p:nvPicPr>
+          <p:cNvPr id="10" name="Picture 9">
+            <a:extLst>
+              <a:ext uri="{FF2B5EF4-FFF2-40B4-BE49-F238E27FC236}">
+                <a16:creationId xmlns:a16="http://schemas.microsoft.com/office/drawing/2014/main" id="{468474F6-A99C-C1AE-7ECB-A85E7FC1C229}"/>
+              </a:ext>
+            </a:extLst>
+          </p:cNvPr>
+          <p:cNvPicPr>
+            <a:picLocks noChangeAspect="1"/>
+          </p:cNvPicPr>
+          <p:nvPr/>
+        </p:nvPicPr>
+        <p:blipFill>
+          <a:blip r:embed="rId3"/>
+          <a:stretch>
+            <a:fillRect/>
+          </a:stretch>
+        </p:blipFill>
+        <p:spPr>
+          <a:xfrm>
+            <a:off x="3239984" y="4914955"/>
+            <a:ext cx="2162477" cy="390580"/>
+          </a:xfrm>
+          <a:prstGeom prst="rect">
+            <a:avLst/>
+          </a:prstGeom>
+        </p:spPr>
+      </p:pic>
+      <p:pic>
+        <p:nvPicPr>
+          <p:cNvPr id="9" name="Picture 8">
+            <a:extLst>
+              <a:ext uri="{FF2B5EF4-FFF2-40B4-BE49-F238E27FC236}">
+                <a16:creationId xmlns:a16="http://schemas.microsoft.com/office/drawing/2014/main" id="{0A6052D7-BAC2-19B3-A684-94559AAB92FF}"/>
+              </a:ext>
+            </a:extLst>
+          </p:cNvPr>
+          <p:cNvPicPr>
+            <a:picLocks noChangeAspect="1"/>
+          </p:cNvPicPr>
+          <p:nvPr/>
+        </p:nvPicPr>
+        <p:blipFill>
+          <a:blip r:embed="rId4"/>
+          <a:stretch>
+            <a:fillRect/>
+          </a:stretch>
+        </p:blipFill>
+        <p:spPr>
+          <a:xfrm>
+            <a:off x="6651409" y="5565407"/>
+            <a:ext cx="4601217" cy="895475"/>
+          </a:xfrm>
+          <a:prstGeom prst="rect">
+            <a:avLst/>
+          </a:prstGeom>
+        </p:spPr>
+      </p:pic>
     </p:spTree>
     <p:extLst>
       <p:ext uri="{BB962C8B-B14F-4D97-AF65-F5344CB8AC3E}">
-        <p14:creationId xmlns:p14="http://schemas.microsoft.com/office/powerpoint/2010/main" val="2052455276"/>
+        <p14:creationId xmlns:p14="http://schemas.microsoft.com/office/powerpoint/2010/main" val="736773504"/>
       </p:ext>
     </p:extLst>
   </p:cSld>
@@ -6098,7 +6178,7 @@
           <p:cNvPr id="2" name="Title 1">
             <a:extLst>
               <a:ext uri="{FF2B5EF4-FFF2-40B4-BE49-F238E27FC236}">
-                <a16:creationId xmlns:a16="http://schemas.microsoft.com/office/drawing/2014/main" id="{AD974241-6623-DEC2-CD99-377046258493}"/>
+                <a16:creationId xmlns:a16="http://schemas.microsoft.com/office/drawing/2014/main" id="{2D1A7E6B-545C-B91E-1784-1B8AE8B3795D}"/>
               </a:ext>
             </a:extLst>
           </p:cNvPr>
@@ -6116,17 +6196,17 @@
           <a:p>
             <a:r>
               <a:rPr lang="en-US" dirty="0"/>
-              <a:t>Implementing angular routing</a:t>
-            </a:r>
-          </a:p>
-        </p:txBody>
-      </p:sp>
-      <p:sp>
-        <p:nvSpPr>
-          <p:cNvPr id="3" name="Content Placeholder 2">
+              <a:t>What is angular Routing? What is Deep linking?</a:t>
+            </a:r>
+          </a:p>
+        </p:txBody>
+      </p:sp>
+      <p:sp>
+        <p:nvSpPr>
+          <p:cNvPr id="4" name="Content Placeholder 2">
             <a:extLst>
               <a:ext uri="{FF2B5EF4-FFF2-40B4-BE49-F238E27FC236}">
-                <a16:creationId xmlns:a16="http://schemas.microsoft.com/office/drawing/2014/main" id="{6C61B787-2252-975A-9D7F-5A7F5341DC8C}"/>
+                <a16:creationId xmlns:a16="http://schemas.microsoft.com/office/drawing/2014/main" id="{377F7FAB-49DF-A039-C8FE-2835C650BE41}"/>
               </a:ext>
             </a:extLst>
           </p:cNvPr>
@@ -6139,216 +6219,379 @@
         </p:nvSpPr>
         <p:spPr>
           <a:xfrm>
-            <a:off x="581192" y="2180496"/>
-            <a:ext cx="4416110" cy="4305364"/>
-          </a:xfrm>
-        </p:spPr>
-        <p:txBody>
-          <a:bodyPr>
-            <a:normAutofit lnSpcReduction="10000"/>
-          </a:bodyPr>
+            <a:off x="581192" y="1894353"/>
+            <a:ext cx="5389302" cy="3974619"/>
+          </a:xfrm>
+        </p:spPr>
+        <p:txBody>
+          <a:bodyPr/>
           <a:lstStyle/>
           <a:p>
             <a:r>
               <a:rPr lang="en-US" dirty="0"/>
-              <a:t>Your build tool will typically autogenerate </a:t>
-            </a:r>
-            <a:r>
-              <a:rPr lang="en-US" dirty="0" err="1"/>
-              <a:t>app.config.ts</a:t>
-            </a:r>
-            <a:r>
-              <a:rPr lang="en-US" dirty="0"/>
-              <a:t> &amp; </a:t>
-            </a:r>
-            <a:r>
-              <a:rPr lang="en-US" dirty="0" err="1"/>
-              <a:t>app.routes.ts</a:t>
-            </a:r>
-            <a:r>
-              <a:rPr lang="en-US" dirty="0"/>
-              <a:t> which pre-configures routing</a:t>
-            </a:r>
-          </a:p>
-          <a:p>
-            <a:r>
-              <a:rPr lang="en-US" dirty="0"/>
-              <a:t>We just need to add routes to </a:t>
-            </a:r>
-            <a:r>
-              <a:rPr lang="en-US" dirty="0" err="1"/>
-              <a:t>app.routes.ts</a:t>
-            </a:r>
-            <a:endParaRPr lang="en-US" dirty="0"/>
-          </a:p>
-          <a:p>
-            <a:r>
-              <a:rPr lang="en-US" dirty="0"/>
-              <a:t>The path represents your endpoint, i.e. localhost:1234/about </a:t>
-            </a:r>
-          </a:p>
-          <a:p>
-            <a:r>
-              <a:rPr lang="en-US" dirty="0"/>
-              <a:t>‘Home’ showcases eager loading, ‘about’ showcases lazy loading </a:t>
-            </a:r>
-          </a:p>
-          <a:p>
-            <a:r>
-              <a:rPr lang="en-US" dirty="0"/>
-              <a:t>Lazy loading ensures the client doesn’t need to download the JavaScript until they visit that page </a:t>
-            </a:r>
-          </a:p>
-          <a:p>
-            <a:r>
-              <a:rPr lang="en-US" dirty="0"/>
-              <a:t>This is great for optimization of large sites &amp; rarely used views</a:t>
-            </a:r>
-          </a:p>
-        </p:txBody>
-      </p:sp>
-      <p:pic>
-        <p:nvPicPr>
-          <p:cNvPr id="5" name="Picture 4">
+              <a:t>Definition: </a:t>
+            </a:r>
+            <a:r>
+              <a:rPr lang="en-US" dirty="0">
+                <a:solidFill>
+                  <a:schemeClr val="accent2"/>
+                </a:solidFill>
+              </a:rPr>
+              <a:t>Routing </a:t>
+            </a:r>
+            <a:r>
+              <a:rPr lang="en-US" dirty="0"/>
+              <a:t>is the process to provide easy navigation between different views based on the browser URL</a:t>
+            </a:r>
+          </a:p>
+          <a:p>
+            <a:pPr lvl="1"/>
+            <a:r>
+              <a:rPr lang="en-US" dirty="0"/>
+              <a:t>This enables deep linking</a:t>
+            </a:r>
+          </a:p>
+          <a:p>
+            <a:pPr lvl="1"/>
+            <a:r>
+              <a:rPr lang="en-US" dirty="0"/>
+              <a:t>Handle URL parameters and query strings</a:t>
+            </a:r>
+          </a:p>
+          <a:p>
+            <a:pPr lvl="1"/>
+            <a:r>
+              <a:rPr lang="en-US" dirty="0"/>
+              <a:t>Manage browser history &amp; navigation</a:t>
+            </a:r>
+          </a:p>
+          <a:p>
+            <a:pPr lvl="1"/>
+            <a:r>
+              <a:rPr lang="en-US" dirty="0"/>
+              <a:t>Create nested routes and layouts</a:t>
+            </a:r>
+          </a:p>
+          <a:p>
+            <a:pPr lvl="1"/>
+            <a:r>
+              <a:rPr lang="en-US" dirty="0"/>
+              <a:t>Implement protected routes for authentication</a:t>
+            </a:r>
+          </a:p>
+        </p:txBody>
+      </p:sp>
+      <p:sp>
+        <p:nvSpPr>
+          <p:cNvPr id="5" name="Content Placeholder 2">
             <a:extLst>
               <a:ext uri="{FF2B5EF4-FFF2-40B4-BE49-F238E27FC236}">
-                <a16:creationId xmlns:a16="http://schemas.microsoft.com/office/drawing/2014/main" id="{4B3E5486-9E15-B0F4-A5D0-9E1D2BF9BE53}"/>
+                <a16:creationId xmlns:a16="http://schemas.microsoft.com/office/drawing/2014/main" id="{CC3D5F76-B2C3-5605-B374-F0F18426EE53}"/>
               </a:ext>
             </a:extLst>
           </p:cNvPr>
-          <p:cNvPicPr>
-            <a:picLocks noChangeAspect="1"/>
-          </p:cNvPicPr>
+          <p:cNvSpPr txBox="1">
+            <a:spLocks/>
+          </p:cNvSpPr>
           <p:nvPr/>
-        </p:nvPicPr>
-        <p:blipFill>
-          <a:blip r:embed="rId2"/>
-          <a:stretch>
-            <a:fillRect/>
-          </a:stretch>
-        </p:blipFill>
-        <p:spPr>
-          <a:xfrm>
-            <a:off x="6264057" y="4304168"/>
-            <a:ext cx="3838939" cy="2394101"/>
+        </p:nvSpPr>
+        <p:spPr>
+          <a:xfrm>
+            <a:off x="6096000" y="2763866"/>
+            <a:ext cx="5389300" cy="3391978"/>
           </a:xfrm>
           <a:prstGeom prst="rect">
             <a:avLst/>
           </a:prstGeom>
         </p:spPr>
-      </p:pic>
-      <p:pic>
-        <p:nvPicPr>
-          <p:cNvPr id="7" name="Picture 6">
-            <a:extLst>
-              <a:ext uri="{FF2B5EF4-FFF2-40B4-BE49-F238E27FC236}">
-                <a16:creationId xmlns:a16="http://schemas.microsoft.com/office/drawing/2014/main" id="{A4971DE6-9520-B713-4131-572D45D746C1}"/>
-              </a:ext>
-            </a:extLst>
-          </p:cNvPr>
-          <p:cNvPicPr>
-            <a:picLocks noChangeAspect="1"/>
-          </p:cNvPicPr>
-          <p:nvPr/>
-        </p:nvPicPr>
-        <p:blipFill>
-          <a:blip r:embed="rId3"/>
-          <a:stretch>
-            <a:fillRect/>
-          </a:stretch>
-        </p:blipFill>
-        <p:spPr>
-          <a:xfrm>
-            <a:off x="5190015" y="2180496"/>
-            <a:ext cx="5987021" cy="1765495"/>
-          </a:xfrm>
-          <a:prstGeom prst="rect">
-            <a:avLst/>
-          </a:prstGeom>
-        </p:spPr>
-      </p:pic>
-      <p:sp>
-        <p:nvSpPr>
-          <p:cNvPr id="8" name="TextBox 7">
-            <a:extLst>
-              <a:ext uri="{FF2B5EF4-FFF2-40B4-BE49-F238E27FC236}">
-                <a16:creationId xmlns:a16="http://schemas.microsoft.com/office/drawing/2014/main" id="{1839812C-10A9-AA67-B33F-3890D0EE6060}"/>
-              </a:ext>
-            </a:extLst>
-          </p:cNvPr>
-          <p:cNvSpPr txBox="1"/>
-          <p:nvPr/>
-        </p:nvSpPr>
-        <p:spPr>
-          <a:xfrm>
-            <a:off x="5190015" y="1811164"/>
-            <a:ext cx="1431354" cy="369332"/>
-          </a:xfrm>
-          <a:prstGeom prst="rect">
-            <a:avLst/>
-          </a:prstGeom>
-          <a:noFill/>
-        </p:spPr>
-        <p:txBody>
-          <a:bodyPr wrap="none" rtlCol="0">
-            <a:spAutoFit/>
+        <p:txBody>
+          <a:bodyPr vert="horz" lIns="91440" tIns="45720" rIns="91440" bIns="45720" rtlCol="0" anchor="ctr">
+            <a:normAutofit fontScale="92500" lnSpcReduction="20000"/>
           </a:bodyPr>
-          <a:lstStyle/>
-          <a:p>
-            <a:r>
-              <a:rPr lang="en-US" dirty="0" err="1"/>
-              <a:t>App.config.ts</a:t>
-            </a:r>
-            <a:r>
-              <a:rPr lang="en-US" dirty="0"/>
-              <a:t>:</a:t>
-            </a:r>
-          </a:p>
-        </p:txBody>
-      </p:sp>
-      <p:sp>
-        <p:nvSpPr>
-          <p:cNvPr id="9" name="TextBox 8">
-            <a:extLst>
-              <a:ext uri="{FF2B5EF4-FFF2-40B4-BE49-F238E27FC236}">
-                <a16:creationId xmlns:a16="http://schemas.microsoft.com/office/drawing/2014/main" id="{3DF63081-20AD-DA0D-5A21-A10A814A31C7}"/>
-              </a:ext>
-            </a:extLst>
-          </p:cNvPr>
-          <p:cNvSpPr txBox="1"/>
-          <p:nvPr/>
-        </p:nvSpPr>
-        <p:spPr>
-          <a:xfrm>
-            <a:off x="6096000" y="3945991"/>
-            <a:ext cx="1484894" cy="369332"/>
-          </a:xfrm>
-          <a:prstGeom prst="rect">
-            <a:avLst/>
-          </a:prstGeom>
-          <a:noFill/>
-        </p:spPr>
-        <p:txBody>
-          <a:bodyPr wrap="none" rtlCol="0">
-            <a:spAutoFit/>
-          </a:bodyPr>
-          <a:lstStyle/>
-          <a:p>
-            <a:r>
-              <a:rPr lang="en-US" dirty="0" err="1"/>
-              <a:t>App.routes.ts</a:t>
-            </a:r>
-            <a:r>
-              <a:rPr lang="en-US" dirty="0"/>
-              <a:t>:</a:t>
-            </a:r>
+          <a:lstStyle>
+            <a:lvl1pPr marL="306000" indent="-306000" algn="l" defTabSz="457200" rtl="0" eaLnBrk="1" latinLnBrk="0" hangingPunct="1">
+              <a:spcBef>
+                <a:spcPct val="20000"/>
+              </a:spcBef>
+              <a:spcAft>
+                <a:spcPts val="600"/>
+              </a:spcAft>
+              <a:buClr>
+                <a:schemeClr val="accent2"/>
+              </a:buClr>
+              <a:buSzPct val="92000"/>
+              <a:buFont typeface="Wingdings 2" panose="05020102010507070707" pitchFamily="18" charset="2"/>
+              <a:buChar char=""/>
+              <a:defRPr sz="1800" kern="1200">
+                <a:solidFill>
+                  <a:schemeClr val="tx2"/>
+                </a:solidFill>
+                <a:latin typeface="+mn-lt"/>
+                <a:ea typeface="+mn-ea"/>
+                <a:cs typeface="+mn-cs"/>
+              </a:defRPr>
+            </a:lvl1pPr>
+            <a:lvl2pPr marL="630000" indent="-306000" algn="l" defTabSz="457200" rtl="0" eaLnBrk="1" latinLnBrk="0" hangingPunct="1">
+              <a:spcBef>
+                <a:spcPct val="20000"/>
+              </a:spcBef>
+              <a:spcAft>
+                <a:spcPts val="600"/>
+              </a:spcAft>
+              <a:buClr>
+                <a:schemeClr val="accent2"/>
+              </a:buClr>
+              <a:buSzPct val="92000"/>
+              <a:buFont typeface="Wingdings 2" panose="05020102010507070707" pitchFamily="18" charset="2"/>
+              <a:buChar char=""/>
+              <a:defRPr sz="1600" kern="1200">
+                <a:solidFill>
+                  <a:schemeClr val="tx2"/>
+                </a:solidFill>
+                <a:latin typeface="+mn-lt"/>
+                <a:ea typeface="+mn-ea"/>
+                <a:cs typeface="+mn-cs"/>
+              </a:defRPr>
+            </a:lvl2pPr>
+            <a:lvl3pPr marL="900000" indent="-270000" algn="l" defTabSz="457200" rtl="0" eaLnBrk="1" latinLnBrk="0" hangingPunct="1">
+              <a:spcBef>
+                <a:spcPct val="20000"/>
+              </a:spcBef>
+              <a:spcAft>
+                <a:spcPts val="600"/>
+              </a:spcAft>
+              <a:buClr>
+                <a:schemeClr val="accent2"/>
+              </a:buClr>
+              <a:buSzPct val="92000"/>
+              <a:buFont typeface="Wingdings 2" panose="05020102010507070707" pitchFamily="18" charset="2"/>
+              <a:buChar char=""/>
+              <a:defRPr sz="1400" kern="1200">
+                <a:solidFill>
+                  <a:schemeClr val="tx2"/>
+                </a:solidFill>
+                <a:latin typeface="+mn-lt"/>
+                <a:ea typeface="+mn-ea"/>
+                <a:cs typeface="+mn-cs"/>
+              </a:defRPr>
+            </a:lvl3pPr>
+            <a:lvl4pPr marL="1242000" indent="-234000" algn="l" defTabSz="457200" rtl="0" eaLnBrk="1" latinLnBrk="0" hangingPunct="1">
+              <a:spcBef>
+                <a:spcPct val="20000"/>
+              </a:spcBef>
+              <a:spcAft>
+                <a:spcPts val="600"/>
+              </a:spcAft>
+              <a:buClr>
+                <a:schemeClr val="accent2"/>
+              </a:buClr>
+              <a:buSzPct val="92000"/>
+              <a:buFont typeface="Wingdings 2" panose="05020102010507070707" pitchFamily="18" charset="2"/>
+              <a:buChar char=""/>
+              <a:defRPr sz="1200" kern="1200">
+                <a:solidFill>
+                  <a:schemeClr val="tx2"/>
+                </a:solidFill>
+                <a:latin typeface="+mn-lt"/>
+                <a:ea typeface="+mn-ea"/>
+                <a:cs typeface="+mn-cs"/>
+              </a:defRPr>
+            </a:lvl4pPr>
+            <a:lvl5pPr marL="1602000" indent="-234000" algn="l" defTabSz="457200" rtl="0" eaLnBrk="1" latinLnBrk="0" hangingPunct="1">
+              <a:spcBef>
+                <a:spcPct val="20000"/>
+              </a:spcBef>
+              <a:spcAft>
+                <a:spcPts val="600"/>
+              </a:spcAft>
+              <a:buClr>
+                <a:schemeClr val="accent2"/>
+              </a:buClr>
+              <a:buSzPct val="92000"/>
+              <a:buFont typeface="Wingdings 2" panose="05020102010507070707" pitchFamily="18" charset="2"/>
+              <a:buChar char=""/>
+              <a:defRPr sz="1200" kern="1200">
+                <a:solidFill>
+                  <a:schemeClr val="tx2"/>
+                </a:solidFill>
+                <a:latin typeface="+mn-lt"/>
+                <a:ea typeface="+mn-ea"/>
+                <a:cs typeface="+mn-cs"/>
+              </a:defRPr>
+            </a:lvl5pPr>
+            <a:lvl6pPr marL="1900000" indent="-228600" algn="l" defTabSz="457200" rtl="0" eaLnBrk="1" latinLnBrk="0" hangingPunct="1">
+              <a:spcBef>
+                <a:spcPct val="20000"/>
+              </a:spcBef>
+              <a:spcAft>
+                <a:spcPts val="600"/>
+              </a:spcAft>
+              <a:buClr>
+                <a:schemeClr val="accent2"/>
+              </a:buClr>
+              <a:buSzPct val="92000"/>
+              <a:buFont typeface="Wingdings 2" panose="05020102010507070707" pitchFamily="18" charset="2"/>
+              <a:buChar char=""/>
+              <a:defRPr sz="1200" kern="1200">
+                <a:solidFill>
+                  <a:schemeClr val="tx2"/>
+                </a:solidFill>
+                <a:latin typeface="+mn-lt"/>
+                <a:ea typeface="+mn-ea"/>
+                <a:cs typeface="+mn-cs"/>
+              </a:defRPr>
+            </a:lvl6pPr>
+            <a:lvl7pPr marL="2200000" indent="-228600" algn="l" defTabSz="457200" rtl="0" eaLnBrk="1" latinLnBrk="0" hangingPunct="1">
+              <a:spcBef>
+                <a:spcPct val="20000"/>
+              </a:spcBef>
+              <a:spcAft>
+                <a:spcPts val="600"/>
+              </a:spcAft>
+              <a:buClr>
+                <a:schemeClr val="accent2"/>
+              </a:buClr>
+              <a:buSzPct val="92000"/>
+              <a:buFont typeface="Wingdings 2" panose="05020102010507070707" pitchFamily="18" charset="2"/>
+              <a:buChar char=""/>
+              <a:defRPr sz="1200" kern="1200">
+                <a:solidFill>
+                  <a:schemeClr val="tx2"/>
+                </a:solidFill>
+                <a:latin typeface="+mn-lt"/>
+                <a:ea typeface="+mn-ea"/>
+                <a:cs typeface="+mn-cs"/>
+              </a:defRPr>
+            </a:lvl7pPr>
+            <a:lvl8pPr marL="2500000" indent="-228600" algn="l" defTabSz="457200" rtl="0" eaLnBrk="1" latinLnBrk="0" hangingPunct="1">
+              <a:spcBef>
+                <a:spcPct val="20000"/>
+              </a:spcBef>
+              <a:spcAft>
+                <a:spcPts val="600"/>
+              </a:spcAft>
+              <a:buClr>
+                <a:schemeClr val="accent2"/>
+              </a:buClr>
+              <a:buSzPct val="92000"/>
+              <a:buFont typeface="Wingdings 2" panose="05020102010507070707" pitchFamily="18" charset="2"/>
+              <a:buChar char=""/>
+              <a:defRPr sz="1200" kern="1200">
+                <a:solidFill>
+                  <a:schemeClr val="tx2"/>
+                </a:solidFill>
+                <a:latin typeface="+mn-lt"/>
+                <a:ea typeface="+mn-ea"/>
+                <a:cs typeface="+mn-cs"/>
+              </a:defRPr>
+            </a:lvl8pPr>
+            <a:lvl9pPr marL="2800000" indent="-228600" algn="l" defTabSz="457200" rtl="0" eaLnBrk="1" latinLnBrk="0" hangingPunct="1">
+              <a:spcBef>
+                <a:spcPct val="20000"/>
+              </a:spcBef>
+              <a:spcAft>
+                <a:spcPts val="600"/>
+              </a:spcAft>
+              <a:buClr>
+                <a:schemeClr val="accent2"/>
+              </a:buClr>
+              <a:buSzPct val="92000"/>
+              <a:buFont typeface="Wingdings 2" panose="05020102010507070707" pitchFamily="18" charset="2"/>
+              <a:buChar char=""/>
+              <a:defRPr sz="1200" kern="1200">
+                <a:solidFill>
+                  <a:schemeClr val="tx2"/>
+                </a:solidFill>
+                <a:latin typeface="+mn-lt"/>
+                <a:ea typeface="+mn-ea"/>
+                <a:cs typeface="+mn-cs"/>
+              </a:defRPr>
+            </a:lvl9pPr>
+          </a:lstStyle>
+          <a:p>
+            <a:r>
+              <a:rPr lang="en-US" dirty="0"/>
+              <a:t>Definition: </a:t>
+            </a:r>
+            <a:r>
+              <a:rPr lang="en-US" dirty="0">
+                <a:solidFill>
+                  <a:schemeClr val="accent2"/>
+                </a:solidFill>
+              </a:rPr>
+              <a:t>Deep Linking </a:t>
+            </a:r>
+            <a:r>
+              <a:rPr lang="en-US" dirty="0">
+                <a:solidFill>
+                  <a:schemeClr val="tx1"/>
+                </a:solidFill>
+              </a:rPr>
+              <a:t>is the practice of using hyperlinks to send users directly to specific content within our applications </a:t>
+            </a:r>
+          </a:p>
+          <a:p>
+            <a:r>
+              <a:rPr lang="en-US" dirty="0"/>
+              <a:t>1-2 levels deep: most apps</a:t>
+            </a:r>
+          </a:p>
+          <a:p>
+            <a:pPr lvl="1"/>
+            <a:r>
+              <a:rPr lang="en-US" dirty="0"/>
+              <a:t>/dashboard</a:t>
+            </a:r>
+          </a:p>
+          <a:p>
+            <a:pPr lvl="1"/>
+            <a:r>
+              <a:rPr lang="en-US" dirty="0"/>
+              <a:t>/products/45</a:t>
+            </a:r>
+          </a:p>
+          <a:p>
+            <a:r>
+              <a:rPr lang="en-US" dirty="0"/>
+              <a:t>3-4 levels deeps: common for structured apps</a:t>
+            </a:r>
+          </a:p>
+          <a:p>
+            <a:pPr lvl="1"/>
+            <a:r>
+              <a:rPr lang="en-US" dirty="0"/>
+              <a:t>/dashboard/reports/weekly</a:t>
+            </a:r>
+          </a:p>
+          <a:p>
+            <a:pPr lvl="1"/>
+            <a:r>
+              <a:rPr lang="en-US" dirty="0"/>
+              <a:t>/shop/products/46/reviews</a:t>
+            </a:r>
+          </a:p>
+          <a:p>
+            <a:r>
+              <a:rPr lang="en-US" dirty="0"/>
+              <a:t>5+ levels deep: Rare but possible, usually in enterprise </a:t>
+            </a:r>
+          </a:p>
+          <a:p>
+            <a:pPr lvl="1"/>
+            <a:r>
+              <a:rPr lang="en-US" dirty="0"/>
+              <a:t>/orgs/12/projects/55/tasks/34/comments/2</a:t>
+            </a:r>
+          </a:p>
+          <a:p>
+            <a:endParaRPr lang="en-US" dirty="0"/>
           </a:p>
         </p:txBody>
       </p:sp>
     </p:spTree>
     <p:extLst>
       <p:ext uri="{BB962C8B-B14F-4D97-AF65-F5344CB8AC3E}">
-        <p14:creationId xmlns:p14="http://schemas.microsoft.com/office/powerpoint/2010/main" val="2840816456"/>
+        <p14:creationId xmlns:p14="http://schemas.microsoft.com/office/powerpoint/2010/main" val="2052455276"/>
       </p:ext>
     </p:extLst>
   </p:cSld>
@@ -6380,7 +6623,7 @@
           <p:cNvPr id="2" name="Title 1">
             <a:extLst>
               <a:ext uri="{FF2B5EF4-FFF2-40B4-BE49-F238E27FC236}">
-                <a16:creationId xmlns:a16="http://schemas.microsoft.com/office/drawing/2014/main" id="{8B7C674D-1406-6C89-E295-420D2518AEF4}"/>
+                <a16:creationId xmlns:a16="http://schemas.microsoft.com/office/drawing/2014/main" id="{AD974241-6623-DEC2-CD99-377046258493}"/>
               </a:ext>
             </a:extLst>
           </p:cNvPr>
@@ -6408,7 +6651,7 @@
           <p:cNvPr id="3" name="Content Placeholder 2">
             <a:extLst>
               <a:ext uri="{FF2B5EF4-FFF2-40B4-BE49-F238E27FC236}">
-                <a16:creationId xmlns:a16="http://schemas.microsoft.com/office/drawing/2014/main" id="{D5163DD9-9CAA-B105-23B3-1A887602FD60}"/>
+                <a16:creationId xmlns:a16="http://schemas.microsoft.com/office/drawing/2014/main" id="{6C61B787-2252-975A-9D7F-5A7F5341DC8C}"/>
               </a:ext>
             </a:extLst>
           </p:cNvPr>
@@ -6421,8 +6664,8 @@
         </p:nvSpPr>
         <p:spPr>
           <a:xfrm>
-            <a:off x="581192" y="2180497"/>
-            <a:ext cx="11029615" cy="1094332"/>
+            <a:off x="581192" y="2180496"/>
+            <a:ext cx="4416110" cy="4305364"/>
           </a:xfrm>
         </p:spPr>
         <p:txBody>
@@ -6433,35 +6676,58 @@
           <a:p>
             <a:r>
               <a:rPr lang="en-US" dirty="0"/>
-              <a:t>Now we can use ‘</a:t>
+              <a:t>Your build tool will typically autogenerate </a:t>
             </a:r>
             <a:r>
               <a:rPr lang="en-US" dirty="0" err="1"/>
-              <a:t>routerLink</a:t>
-            </a:r>
-            <a:r>
-              <a:rPr lang="en-US" dirty="0"/>
-              <a:t>’ to set our activated route</a:t>
-            </a:r>
-          </a:p>
-          <a:p>
-            <a:r>
-              <a:rPr lang="en-US" dirty="0"/>
-              <a:t>We need to bring in ‘</a:t>
+              <a:t>app.config.ts</a:t>
+            </a:r>
+            <a:r>
+              <a:rPr lang="en-US" dirty="0"/>
+              <a:t> &amp; </a:t>
             </a:r>
             <a:r>
               <a:rPr lang="en-US" dirty="0" err="1"/>
-              <a:t>RouterLink</a:t>
-            </a:r>
-            <a:r>
-              <a:rPr lang="en-US" dirty="0"/>
-              <a:t>’ to create router linked anchor tags for the component</a:t>
-            </a:r>
-          </a:p>
-          <a:p>
-            <a:r>
-              <a:rPr lang="en-US" dirty="0"/>
-              <a:t>The activated route will render the view(component) in the &lt;router-outlet&gt; </a:t>
+              <a:t>app.routes.ts</a:t>
+            </a:r>
+            <a:r>
+              <a:rPr lang="en-US" dirty="0"/>
+              <a:t> which pre-configures routing</a:t>
+            </a:r>
+          </a:p>
+          <a:p>
+            <a:r>
+              <a:rPr lang="en-US" dirty="0"/>
+              <a:t>We just need to add routes to </a:t>
+            </a:r>
+            <a:r>
+              <a:rPr lang="en-US" dirty="0" err="1"/>
+              <a:t>app.routes.ts</a:t>
+            </a:r>
+            <a:endParaRPr lang="en-US" dirty="0"/>
+          </a:p>
+          <a:p>
+            <a:r>
+              <a:rPr lang="en-US" dirty="0"/>
+              <a:t>The path represents your endpoint, i.e. localhost:1234/about </a:t>
+            </a:r>
+          </a:p>
+          <a:p>
+            <a:r>
+              <a:rPr lang="en-US" dirty="0"/>
+              <a:t>‘Home’ showcases eager loading, ‘about’ showcases lazy loading </a:t>
+            </a:r>
+          </a:p>
+          <a:p>
+            <a:r>
+              <a:rPr lang="en-US" dirty="0"/>
+              <a:t>Lazy loading ensures the client doesn’t need to download the JavaScript until they visit that page </a:t>
+            </a:r>
+          </a:p>
+          <a:p>
+            <a:r>
+              <a:rPr lang="en-US" dirty="0"/>
+              <a:t>This is great for optimization of large sites &amp; rarely used views</a:t>
             </a:r>
           </a:p>
         </p:txBody>
@@ -6471,7 +6737,7 @@
           <p:cNvPr id="5" name="Picture 4">
             <a:extLst>
               <a:ext uri="{FF2B5EF4-FFF2-40B4-BE49-F238E27FC236}">
-                <a16:creationId xmlns:a16="http://schemas.microsoft.com/office/drawing/2014/main" id="{847F7877-3398-FB6D-BF9E-AA10C701E2D8}"/>
+                <a16:creationId xmlns:a16="http://schemas.microsoft.com/office/drawing/2014/main" id="{4B3E5486-9E15-B0F4-A5D0-9E1D2BF9BE53}"/>
               </a:ext>
             </a:extLst>
           </p:cNvPr>
@@ -6488,8 +6754,8 @@
         </p:blipFill>
         <p:spPr>
           <a:xfrm>
-            <a:off x="819197" y="4172905"/>
-            <a:ext cx="4067743" cy="2191056"/>
+            <a:off x="6264057" y="4304168"/>
+            <a:ext cx="3838939" cy="2394101"/>
           </a:xfrm>
           <a:prstGeom prst="rect">
             <a:avLst/>
@@ -6501,7 +6767,7 @@
           <p:cNvPr id="7" name="Picture 6">
             <a:extLst>
               <a:ext uri="{FF2B5EF4-FFF2-40B4-BE49-F238E27FC236}">
-                <a16:creationId xmlns:a16="http://schemas.microsoft.com/office/drawing/2014/main" id="{CF2BF3D3-AA93-116F-73B5-B8345247C5B8}"/>
+                <a16:creationId xmlns:a16="http://schemas.microsoft.com/office/drawing/2014/main" id="{A4971DE6-9520-B713-4131-572D45D746C1}"/>
               </a:ext>
             </a:extLst>
           </p:cNvPr>
@@ -6518,8 +6784,8 @@
         </p:blipFill>
         <p:spPr>
           <a:xfrm>
-            <a:off x="6162855" y="3936345"/>
-            <a:ext cx="4376940" cy="2615672"/>
+            <a:off x="5190015" y="2180496"/>
+            <a:ext cx="5987021" cy="1765495"/>
           </a:xfrm>
           <a:prstGeom prst="rect">
             <a:avLst/>
@@ -6531,7 +6797,7 @@
           <p:cNvPr id="8" name="TextBox 7">
             <a:extLst>
               <a:ext uri="{FF2B5EF4-FFF2-40B4-BE49-F238E27FC236}">
-                <a16:creationId xmlns:a16="http://schemas.microsoft.com/office/drawing/2014/main" id="{58DACA8A-878B-2D57-6B3E-C51C9EF555D5}"/>
+                <a16:creationId xmlns:a16="http://schemas.microsoft.com/office/drawing/2014/main" id="{1839812C-10A9-AA67-B33F-3890D0EE6060}"/>
               </a:ext>
             </a:extLst>
           </p:cNvPr>
@@ -6540,8 +6806,8 @@
         </p:nvSpPr>
         <p:spPr>
           <a:xfrm>
-            <a:off x="1223158" y="3633849"/>
-            <a:ext cx="1086708" cy="369332"/>
+            <a:off x="5190015" y="1811164"/>
+            <a:ext cx="1431354" cy="369332"/>
           </a:xfrm>
           <a:prstGeom prst="rect">
             <a:avLst/>
@@ -6555,18 +6821,22 @@
           <a:lstStyle/>
           <a:p>
             <a:r>
-              <a:rPr lang="en-US" dirty="0"/>
-              <a:t>App.html:</a:t>
-            </a:r>
-          </a:p>
-        </p:txBody>
-      </p:sp>
-      <p:sp>
-        <p:nvSpPr>
-          <p:cNvPr id="10" name="TextBox 9">
+              <a:rPr lang="en-US" dirty="0" err="1"/>
+              <a:t>App.config.ts</a:t>
+            </a:r>
+            <a:r>
+              <a:rPr lang="en-US" dirty="0"/>
+              <a:t>:</a:t>
+            </a:r>
+          </a:p>
+        </p:txBody>
+      </p:sp>
+      <p:sp>
+        <p:nvSpPr>
+          <p:cNvPr id="9" name="TextBox 8">
             <a:extLst>
               <a:ext uri="{FF2B5EF4-FFF2-40B4-BE49-F238E27FC236}">
-                <a16:creationId xmlns:a16="http://schemas.microsoft.com/office/drawing/2014/main" id="{82316542-FC67-3CCF-3893-7478A6E1E315}"/>
+                <a16:creationId xmlns:a16="http://schemas.microsoft.com/office/drawing/2014/main" id="{3DF63081-20AD-DA0D-5A21-A10A814A31C7}"/>
               </a:ext>
             </a:extLst>
           </p:cNvPr>
@@ -6575,8 +6845,8 @@
         </p:nvSpPr>
         <p:spPr>
           <a:xfrm>
-            <a:off x="6162855" y="3471875"/>
-            <a:ext cx="830227" cy="369332"/>
+            <a:off x="6096000" y="3945991"/>
+            <a:ext cx="1484894" cy="369332"/>
           </a:xfrm>
           <a:prstGeom prst="rect">
             <a:avLst/>
@@ -6591,7 +6861,7 @@
           <a:p>
             <a:r>
               <a:rPr lang="en-US" dirty="0" err="1"/>
-              <a:t>App.ts</a:t>
+              <a:t>App.routes.ts</a:t>
             </a:r>
             <a:r>
               <a:rPr lang="en-US" dirty="0"/>
@@ -6603,7 +6873,7 @@
     </p:spTree>
     <p:extLst>
       <p:ext uri="{BB962C8B-B14F-4D97-AF65-F5344CB8AC3E}">
-        <p14:creationId xmlns:p14="http://schemas.microsoft.com/office/powerpoint/2010/main" val="3470590973"/>
+        <p14:creationId xmlns:p14="http://schemas.microsoft.com/office/powerpoint/2010/main" val="2840816456"/>
       </p:ext>
     </p:extLst>
   </p:cSld>
@@ -6635,7 +6905,7 @@
           <p:cNvPr id="2" name="Title 1">
             <a:extLst>
               <a:ext uri="{FF2B5EF4-FFF2-40B4-BE49-F238E27FC236}">
-                <a16:creationId xmlns:a16="http://schemas.microsoft.com/office/drawing/2014/main" id="{ABF26C6D-8A13-5BC2-F9DA-08B389AD55B9}"/>
+                <a16:creationId xmlns:a16="http://schemas.microsoft.com/office/drawing/2014/main" id="{8B7C674D-1406-6C89-E295-420D2518AEF4}"/>
               </a:ext>
             </a:extLst>
           </p:cNvPr>
@@ -6653,7 +6923,7 @@
           <a:p>
             <a:r>
               <a:rPr lang="en-US" dirty="0"/>
-              <a:t>Angular routing with route parameters</a:t>
+              <a:t>Implementing angular routing</a:t>
             </a:r>
           </a:p>
         </p:txBody>
@@ -6663,7 +6933,7 @@
           <p:cNvPr id="3" name="Content Placeholder 2">
             <a:extLst>
               <a:ext uri="{FF2B5EF4-FFF2-40B4-BE49-F238E27FC236}">
-                <a16:creationId xmlns:a16="http://schemas.microsoft.com/office/drawing/2014/main" id="{7BF551F5-5592-3C27-73F0-978A6C70EBDE}"/>
+                <a16:creationId xmlns:a16="http://schemas.microsoft.com/office/drawing/2014/main" id="{D5163DD9-9CAA-B105-23B3-1A887602FD60}"/>
               </a:ext>
             </a:extLst>
           </p:cNvPr>
@@ -6676,17 +6946,47 @@
         </p:nvSpPr>
         <p:spPr>
           <a:xfrm>
-            <a:off x="474867" y="2361869"/>
-            <a:ext cx="5985863" cy="2114438"/>
-          </a:xfrm>
-        </p:spPr>
-        <p:txBody>
-          <a:bodyPr/>
+            <a:off x="581192" y="2180497"/>
+            <a:ext cx="11029615" cy="1094332"/>
+          </a:xfrm>
+        </p:spPr>
+        <p:txBody>
+          <a:bodyPr>
+            <a:normAutofit lnSpcReduction="10000"/>
+          </a:bodyPr>
           <a:lstStyle/>
           <a:p>
             <a:r>
               <a:rPr lang="en-US" dirty="0"/>
-              <a:t>This is a new component that reads route params and then uses our service to get details about the student (it’s really just showing an extra field compared to our card - email)</a:t>
+              <a:t>Now we can use ‘</a:t>
+            </a:r>
+            <a:r>
+              <a:rPr lang="en-US" dirty="0" err="1"/>
+              <a:t>routerLink</a:t>
+            </a:r>
+            <a:r>
+              <a:rPr lang="en-US" dirty="0"/>
+              <a:t>’ to set our activated route</a:t>
+            </a:r>
+          </a:p>
+          <a:p>
+            <a:r>
+              <a:rPr lang="en-US" dirty="0"/>
+              <a:t>We need to bring in ‘</a:t>
+            </a:r>
+            <a:r>
+              <a:rPr lang="en-US" dirty="0" err="1"/>
+              <a:t>RouterLink</a:t>
+            </a:r>
+            <a:r>
+              <a:rPr lang="en-US" dirty="0"/>
+              <a:t>’ to create router linked anchor tags for the component</a:t>
+            </a:r>
+          </a:p>
+          <a:p>
+            <a:r>
+              <a:rPr lang="en-US" dirty="0"/>
+              <a:t>The activated route will render the view(component) in the &lt;router-outlet&gt; </a:t>
             </a:r>
           </a:p>
         </p:txBody>
@@ -6696,7 +6996,7 @@
           <p:cNvPr id="5" name="Picture 4">
             <a:extLst>
               <a:ext uri="{FF2B5EF4-FFF2-40B4-BE49-F238E27FC236}">
-                <a16:creationId xmlns:a16="http://schemas.microsoft.com/office/drawing/2014/main" id="{3129DE1D-23EE-1877-5A3B-3FC6C6157324}"/>
+                <a16:creationId xmlns:a16="http://schemas.microsoft.com/office/drawing/2014/main" id="{847F7877-3398-FB6D-BF9E-AA10C701E2D8}"/>
               </a:ext>
             </a:extLst>
           </p:cNvPr>
@@ -6713,8 +7013,8 @@
         </p:blipFill>
         <p:spPr>
           <a:xfrm>
-            <a:off x="1271855" y="5355632"/>
-            <a:ext cx="4220164" cy="800212"/>
+            <a:off x="819197" y="4172905"/>
+            <a:ext cx="4067743" cy="2191056"/>
           </a:xfrm>
           <a:prstGeom prst="rect">
             <a:avLst/>
@@ -6726,7 +7026,7 @@
           <p:cNvPr id="7" name="Picture 6">
             <a:extLst>
               <a:ext uri="{FF2B5EF4-FFF2-40B4-BE49-F238E27FC236}">
-                <a16:creationId xmlns:a16="http://schemas.microsoft.com/office/drawing/2014/main" id="{76B6CA2B-2FD3-0C4F-619A-D036762F2D47}"/>
+                <a16:creationId xmlns:a16="http://schemas.microsoft.com/office/drawing/2014/main" id="{CF2BF3D3-AA93-116F-73B5-B8345247C5B8}"/>
               </a:ext>
             </a:extLst>
           </p:cNvPr>
@@ -6743,8 +7043,8 @@
         </p:blipFill>
         <p:spPr>
           <a:xfrm>
-            <a:off x="7008335" y="2361869"/>
-            <a:ext cx="4602473" cy="4034355"/>
+            <a:off x="6162855" y="3936345"/>
+            <a:ext cx="4376940" cy="2615672"/>
           </a:xfrm>
           <a:prstGeom prst="rect">
             <a:avLst/>
@@ -6756,7 +7056,7 @@
           <p:cNvPr id="8" name="TextBox 7">
             <a:extLst>
               <a:ext uri="{FF2B5EF4-FFF2-40B4-BE49-F238E27FC236}">
-                <a16:creationId xmlns:a16="http://schemas.microsoft.com/office/drawing/2014/main" id="{6DFDC81D-D71A-3CBF-4424-84157D2C4D68}"/>
+                <a16:creationId xmlns:a16="http://schemas.microsoft.com/office/drawing/2014/main" id="{58DACA8A-878B-2D57-6B3E-C51C9EF555D5}"/>
               </a:ext>
             </a:extLst>
           </p:cNvPr>
@@ -6765,8 +7065,8 @@
         </p:nvSpPr>
         <p:spPr>
           <a:xfrm>
-            <a:off x="1271855" y="4880758"/>
-            <a:ext cx="2458193" cy="369332"/>
+            <a:off x="1223158" y="3633849"/>
+            <a:ext cx="1086708" cy="369332"/>
           </a:xfrm>
           <a:prstGeom prst="rect">
             <a:avLst/>
@@ -6774,14 +7074,14 @@
           <a:noFill/>
         </p:spPr>
         <p:txBody>
-          <a:bodyPr wrap="square" rtlCol="0">
+          <a:bodyPr wrap="none" rtlCol="0">
             <a:spAutoFit/>
           </a:bodyPr>
           <a:lstStyle/>
           <a:p>
             <a:r>
               <a:rPr lang="en-US" dirty="0"/>
-              <a:t>Student-details.html:</a:t>
+              <a:t>App.html:</a:t>
             </a:r>
           </a:p>
         </p:txBody>
@@ -6791,7 +7091,7 @@
           <p:cNvPr id="10" name="TextBox 9">
             <a:extLst>
               <a:ext uri="{FF2B5EF4-FFF2-40B4-BE49-F238E27FC236}">
-                <a16:creationId xmlns:a16="http://schemas.microsoft.com/office/drawing/2014/main" id="{BEC6E51F-0BE6-952B-EB5F-D7A0AFE2A08B}"/>
+                <a16:creationId xmlns:a16="http://schemas.microsoft.com/office/drawing/2014/main" id="{82316542-FC67-3CCF-3893-7478A6E1E315}"/>
               </a:ext>
             </a:extLst>
           </p:cNvPr>
@@ -6800,8 +7100,8 @@
         </p:nvSpPr>
         <p:spPr>
           <a:xfrm>
-            <a:off x="7008335" y="1879286"/>
-            <a:ext cx="2458193" cy="369332"/>
+            <a:off x="6162855" y="3471875"/>
+            <a:ext cx="830227" cy="369332"/>
           </a:xfrm>
           <a:prstGeom prst="rect">
             <a:avLst/>
@@ -6809,18 +7109,14 @@
           <a:noFill/>
         </p:spPr>
         <p:txBody>
-          <a:bodyPr wrap="square" rtlCol="0">
+          <a:bodyPr wrap="none" rtlCol="0">
             <a:spAutoFit/>
           </a:bodyPr>
           <a:lstStyle/>
           <a:p>
             <a:r>
-              <a:rPr lang="en-US" dirty="0"/>
-              <a:t>Student-</a:t>
-            </a:r>
-            <a:r>
               <a:rPr lang="en-US" dirty="0" err="1"/>
-              <a:t>details.ts</a:t>
+              <a:t>App.ts</a:t>
             </a:r>
             <a:r>
               <a:rPr lang="en-US" dirty="0"/>
@@ -6832,7 +7128,7 @@
     </p:spTree>
     <p:extLst>
       <p:ext uri="{BB962C8B-B14F-4D97-AF65-F5344CB8AC3E}">
-        <p14:creationId xmlns:p14="http://schemas.microsoft.com/office/powerpoint/2010/main" val="2483581181"/>
+        <p14:creationId xmlns:p14="http://schemas.microsoft.com/office/powerpoint/2010/main" val="3470590973"/>
       </p:ext>
     </p:extLst>
   </p:cSld>
@@ -6864,7 +7160,7 @@
           <p:cNvPr id="2" name="Title 1">
             <a:extLst>
               <a:ext uri="{FF2B5EF4-FFF2-40B4-BE49-F238E27FC236}">
-                <a16:creationId xmlns:a16="http://schemas.microsoft.com/office/drawing/2014/main" id="{D3B36608-9A34-CB07-2F78-5178871B7D0C}"/>
+                <a16:creationId xmlns:a16="http://schemas.microsoft.com/office/drawing/2014/main" id="{ABF26C6D-8A13-5BC2-F9DA-08B389AD55B9}"/>
               </a:ext>
             </a:extLst>
           </p:cNvPr>
@@ -6892,7 +7188,7 @@
           <p:cNvPr id="3" name="Content Placeholder 2">
             <a:extLst>
               <a:ext uri="{FF2B5EF4-FFF2-40B4-BE49-F238E27FC236}">
-                <a16:creationId xmlns:a16="http://schemas.microsoft.com/office/drawing/2014/main" id="{E5207E37-56E9-FCCF-842B-4D573F0C8A2A}"/>
+                <a16:creationId xmlns:a16="http://schemas.microsoft.com/office/drawing/2014/main" id="{7BF551F5-5592-3C27-73F0-978A6C70EBDE}"/>
               </a:ext>
             </a:extLst>
           </p:cNvPr>
@@ -6905,111 +7201,18 @@
         </p:nvSpPr>
         <p:spPr>
           <a:xfrm>
-            <a:off x="262216" y="2167120"/>
-            <a:ext cx="5688474" cy="4071448"/>
-          </a:xfrm>
-        </p:spPr>
-        <p:txBody>
-          <a:bodyPr>
-            <a:normAutofit/>
-          </a:bodyPr>
+            <a:off x="474867" y="2361869"/>
+            <a:ext cx="5985863" cy="2114438"/>
+          </a:xfrm>
+        </p:spPr>
+        <p:txBody>
+          <a:bodyPr/>
           <a:lstStyle/>
           <a:p>
             <a:r>
               <a:rPr lang="en-US" dirty="0"/>
-              <a:t>Now our </a:t>
-            </a:r>
-            <a:r>
-              <a:rPr lang="en-US" dirty="0" err="1"/>
-              <a:t>StudentCard</a:t>
-            </a:r>
-            <a:r>
-              <a:rPr lang="en-US" dirty="0"/>
-              <a:t> component can have a link to details for that particular student!</a:t>
-            </a:r>
-          </a:p>
-          <a:p>
-            <a:r>
-              <a:rPr lang="en-US" dirty="0"/>
-              <a:t>Don’t forget to bring in ‘</a:t>
-            </a:r>
-            <a:r>
-              <a:rPr lang="en-US" dirty="0" err="1"/>
-              <a:t>RouterLink</a:t>
-            </a:r>
-            <a:r>
-              <a:rPr lang="en-US" dirty="0"/>
-              <a:t>’ in its associated TypeScript file!</a:t>
-            </a:r>
-          </a:p>
-          <a:p>
-            <a:r>
-              <a:rPr lang="en-US" dirty="0"/>
-              <a:t>And if you have nested routes:</a:t>
-            </a:r>
-          </a:p>
-          <a:p>
-            <a:pPr lvl="1"/>
-            <a:r>
-              <a:rPr lang="en-US" dirty="0"/>
-              <a:t>For example, if your route is:</a:t>
-            </a:r>
-          </a:p>
-          <a:p>
-            <a:pPr lvl="1"/>
-            <a:r>
-              <a:rPr lang="en-US" dirty="0"/>
-              <a:t>{ path: 'students/:</a:t>
-            </a:r>
-            <a:r>
-              <a:rPr lang="en-US" dirty="0" err="1"/>
-              <a:t>studentId</a:t>
-            </a:r>
-            <a:r>
-              <a:rPr lang="en-US" dirty="0"/>
-              <a:t>/courses/:</a:t>
-            </a:r>
-            <a:r>
-              <a:rPr lang="en-US" dirty="0" err="1"/>
-              <a:t>courseId</a:t>
-            </a:r>
-            <a:r>
-              <a:rPr lang="en-US" dirty="0"/>
-              <a:t>', component: ... }</a:t>
-            </a:r>
-          </a:p>
-          <a:p>
-            <a:pPr lvl="1"/>
-            <a:r>
-              <a:rPr lang="en-US" dirty="0"/>
-              <a:t>Your </a:t>
-            </a:r>
-            <a:r>
-              <a:rPr lang="en-US" dirty="0" err="1"/>
-              <a:t>routerLink</a:t>
-            </a:r>
-            <a:r>
-              <a:rPr lang="en-US" dirty="0"/>
-              <a:t> would be:</a:t>
-            </a:r>
-          </a:p>
-          <a:p>
-            <a:pPr lvl="1"/>
-            <a:r>
-              <a:rPr lang="en-US" dirty="0"/>
-              <a:t>&lt;a [</a:t>
-            </a:r>
-            <a:r>
-              <a:rPr lang="en-US" dirty="0" err="1"/>
-              <a:t>routerLink</a:t>
-            </a:r>
-            <a:r>
-              <a:rPr lang="en-US" dirty="0"/>
-              <a:t>]="['/students', student().id, 'courses', course.id]"&gt;Course Details&lt;/a&gt;</a:t>
-            </a:r>
-          </a:p>
-          <a:p>
-            <a:endParaRPr lang="en-US" dirty="0"/>
+              <a:t>This is a new component that reads route params and then uses our service to get details about the student (it’s really just showing an extra field compared to our card - email)</a:t>
+            </a:r>
           </a:p>
         </p:txBody>
       </p:sp>
@@ -7018,7 +7221,7 @@
           <p:cNvPr id="5" name="Picture 4">
             <a:extLst>
               <a:ext uri="{FF2B5EF4-FFF2-40B4-BE49-F238E27FC236}">
-                <a16:creationId xmlns:a16="http://schemas.microsoft.com/office/drawing/2014/main" id="{02CA780A-0CFB-4A7E-7A45-0DFA11EEBE98}"/>
+                <a16:creationId xmlns:a16="http://schemas.microsoft.com/office/drawing/2014/main" id="{3129DE1D-23EE-1877-5A3B-3FC6C6157324}"/>
               </a:ext>
             </a:extLst>
           </p:cNvPr>
@@ -7035,18 +7238,126 @@
         </p:blipFill>
         <p:spPr>
           <a:xfrm>
-            <a:off x="6241311" y="3737270"/>
-            <a:ext cx="5504121" cy="931149"/>
+            <a:off x="1271855" y="5355632"/>
+            <a:ext cx="4220164" cy="800212"/>
           </a:xfrm>
           <a:prstGeom prst="rect">
             <a:avLst/>
           </a:prstGeom>
         </p:spPr>
       </p:pic>
+      <p:pic>
+        <p:nvPicPr>
+          <p:cNvPr id="7" name="Picture 6">
+            <a:extLst>
+              <a:ext uri="{FF2B5EF4-FFF2-40B4-BE49-F238E27FC236}">
+                <a16:creationId xmlns:a16="http://schemas.microsoft.com/office/drawing/2014/main" id="{76B6CA2B-2FD3-0C4F-619A-D036762F2D47}"/>
+              </a:ext>
+            </a:extLst>
+          </p:cNvPr>
+          <p:cNvPicPr>
+            <a:picLocks noChangeAspect="1"/>
+          </p:cNvPicPr>
+          <p:nvPr/>
+        </p:nvPicPr>
+        <p:blipFill>
+          <a:blip r:embed="rId3"/>
+          <a:stretch>
+            <a:fillRect/>
+          </a:stretch>
+        </p:blipFill>
+        <p:spPr>
+          <a:xfrm>
+            <a:off x="7008335" y="2361869"/>
+            <a:ext cx="4602473" cy="4034355"/>
+          </a:xfrm>
+          <a:prstGeom prst="rect">
+            <a:avLst/>
+          </a:prstGeom>
+        </p:spPr>
+      </p:pic>
+      <p:sp>
+        <p:nvSpPr>
+          <p:cNvPr id="8" name="TextBox 7">
+            <a:extLst>
+              <a:ext uri="{FF2B5EF4-FFF2-40B4-BE49-F238E27FC236}">
+                <a16:creationId xmlns:a16="http://schemas.microsoft.com/office/drawing/2014/main" id="{6DFDC81D-D71A-3CBF-4424-84157D2C4D68}"/>
+              </a:ext>
+            </a:extLst>
+          </p:cNvPr>
+          <p:cNvSpPr txBox="1"/>
+          <p:nvPr/>
+        </p:nvSpPr>
+        <p:spPr>
+          <a:xfrm>
+            <a:off x="1271855" y="4880758"/>
+            <a:ext cx="2458193" cy="369332"/>
+          </a:xfrm>
+          <a:prstGeom prst="rect">
+            <a:avLst/>
+          </a:prstGeom>
+          <a:noFill/>
+        </p:spPr>
+        <p:txBody>
+          <a:bodyPr wrap="square" rtlCol="0">
+            <a:spAutoFit/>
+          </a:bodyPr>
+          <a:lstStyle/>
+          <a:p>
+            <a:r>
+              <a:rPr lang="en-US" dirty="0"/>
+              <a:t>Student-details.html:</a:t>
+            </a:r>
+          </a:p>
+        </p:txBody>
+      </p:sp>
+      <p:sp>
+        <p:nvSpPr>
+          <p:cNvPr id="10" name="TextBox 9">
+            <a:extLst>
+              <a:ext uri="{FF2B5EF4-FFF2-40B4-BE49-F238E27FC236}">
+                <a16:creationId xmlns:a16="http://schemas.microsoft.com/office/drawing/2014/main" id="{BEC6E51F-0BE6-952B-EB5F-D7A0AFE2A08B}"/>
+              </a:ext>
+            </a:extLst>
+          </p:cNvPr>
+          <p:cNvSpPr txBox="1"/>
+          <p:nvPr/>
+        </p:nvSpPr>
+        <p:spPr>
+          <a:xfrm>
+            <a:off x="7008335" y="1879286"/>
+            <a:ext cx="2458193" cy="369332"/>
+          </a:xfrm>
+          <a:prstGeom prst="rect">
+            <a:avLst/>
+          </a:prstGeom>
+          <a:noFill/>
+        </p:spPr>
+        <p:txBody>
+          <a:bodyPr wrap="square" rtlCol="0">
+            <a:spAutoFit/>
+          </a:bodyPr>
+          <a:lstStyle/>
+          <a:p>
+            <a:r>
+              <a:rPr lang="en-US" dirty="0"/>
+              <a:t>Student-</a:t>
+            </a:r>
+            <a:r>
+              <a:rPr lang="en-US" dirty="0" err="1"/>
+              <a:t>details.ts</a:t>
+            </a:r>
+            <a:r>
+              <a:rPr lang="en-US" dirty="0"/>
+              <a:t>:</a:t>
+            </a:r>
+          </a:p>
+        </p:txBody>
+      </p:sp>
     </p:spTree>
     <p:extLst>
       <p:ext uri="{BB962C8B-B14F-4D97-AF65-F5344CB8AC3E}">
-        <p14:creationId xmlns:p14="http://schemas.microsoft.com/office/powerpoint/2010/main" val="2018211923"/>
+        <p14:creationId xmlns:p14="http://schemas.microsoft.com/office/powerpoint/2010/main" val="2483581181"/>
       </p:ext>
     </p:extLst>
   </p:cSld>
@@ -7224,6 +7535,220 @@
   <p:cSld>
     <p:spTree>
       <p:nvGrpSpPr>
+        <p:cNvPr id="1" name=""/>
+        <p:cNvGrpSpPr/>
+        <p:nvPr/>
+      </p:nvGrpSpPr>
+      <p:grpSpPr>
+        <a:xfrm>
+          <a:off x="0" y="0"/>
+          <a:ext cx="0" cy="0"/>
+          <a:chOff x="0" y="0"/>
+          <a:chExt cx="0" cy="0"/>
+        </a:xfrm>
+      </p:grpSpPr>
+      <p:sp>
+        <p:nvSpPr>
+          <p:cNvPr id="2" name="Title 1">
+            <a:extLst>
+              <a:ext uri="{FF2B5EF4-FFF2-40B4-BE49-F238E27FC236}">
+                <a16:creationId xmlns:a16="http://schemas.microsoft.com/office/drawing/2014/main" id="{D3B36608-9A34-CB07-2F78-5178871B7D0C}"/>
+              </a:ext>
+            </a:extLst>
+          </p:cNvPr>
+          <p:cNvSpPr>
+            <a:spLocks noGrp="1"/>
+          </p:cNvSpPr>
+          <p:nvPr>
+            <p:ph type="title"/>
+          </p:nvPr>
+        </p:nvSpPr>
+        <p:spPr/>
+        <p:txBody>
+          <a:bodyPr/>
+          <a:lstStyle/>
+          <a:p>
+            <a:r>
+              <a:rPr lang="en-US" dirty="0"/>
+              <a:t>Angular routing with route parameters</a:t>
+            </a:r>
+          </a:p>
+        </p:txBody>
+      </p:sp>
+      <p:sp>
+        <p:nvSpPr>
+          <p:cNvPr id="3" name="Content Placeholder 2">
+            <a:extLst>
+              <a:ext uri="{FF2B5EF4-FFF2-40B4-BE49-F238E27FC236}">
+                <a16:creationId xmlns:a16="http://schemas.microsoft.com/office/drawing/2014/main" id="{E5207E37-56E9-FCCF-842B-4D573F0C8A2A}"/>
+              </a:ext>
+            </a:extLst>
+          </p:cNvPr>
+          <p:cNvSpPr>
+            <a:spLocks noGrp="1"/>
+          </p:cNvSpPr>
+          <p:nvPr>
+            <p:ph idx="1"/>
+          </p:nvPr>
+        </p:nvSpPr>
+        <p:spPr>
+          <a:xfrm>
+            <a:off x="262216" y="2167120"/>
+            <a:ext cx="5688474" cy="4071448"/>
+          </a:xfrm>
+        </p:spPr>
+        <p:txBody>
+          <a:bodyPr>
+            <a:normAutofit/>
+          </a:bodyPr>
+          <a:lstStyle/>
+          <a:p>
+            <a:r>
+              <a:rPr lang="en-US" dirty="0"/>
+              <a:t>Now our </a:t>
+            </a:r>
+            <a:r>
+              <a:rPr lang="en-US" dirty="0" err="1"/>
+              <a:t>StudentCard</a:t>
+            </a:r>
+            <a:r>
+              <a:rPr lang="en-US" dirty="0"/>
+              <a:t> component can have a link to details for that particular student!</a:t>
+            </a:r>
+          </a:p>
+          <a:p>
+            <a:r>
+              <a:rPr lang="en-US" dirty="0"/>
+              <a:t>Don’t forget to bring in ‘</a:t>
+            </a:r>
+            <a:r>
+              <a:rPr lang="en-US" dirty="0" err="1"/>
+              <a:t>RouterLink</a:t>
+            </a:r>
+            <a:r>
+              <a:rPr lang="en-US" dirty="0"/>
+              <a:t>’ in its associated TypeScript file!</a:t>
+            </a:r>
+          </a:p>
+          <a:p>
+            <a:r>
+              <a:rPr lang="en-US" dirty="0"/>
+              <a:t>And if you have nested routes:</a:t>
+            </a:r>
+          </a:p>
+          <a:p>
+            <a:pPr lvl="1"/>
+            <a:r>
+              <a:rPr lang="en-US" dirty="0"/>
+              <a:t>For example, if your route is:</a:t>
+            </a:r>
+          </a:p>
+          <a:p>
+            <a:pPr lvl="1"/>
+            <a:r>
+              <a:rPr lang="en-US" dirty="0"/>
+              <a:t>{ path: 'students/:</a:t>
+            </a:r>
+            <a:r>
+              <a:rPr lang="en-US" dirty="0" err="1"/>
+              <a:t>studentId</a:t>
+            </a:r>
+            <a:r>
+              <a:rPr lang="en-US" dirty="0"/>
+              <a:t>/courses/:</a:t>
+            </a:r>
+            <a:r>
+              <a:rPr lang="en-US" dirty="0" err="1"/>
+              <a:t>courseId</a:t>
+            </a:r>
+            <a:r>
+              <a:rPr lang="en-US" dirty="0"/>
+              <a:t>', component: ... }</a:t>
+            </a:r>
+          </a:p>
+          <a:p>
+            <a:pPr lvl="1"/>
+            <a:r>
+              <a:rPr lang="en-US" dirty="0"/>
+              <a:t>Your </a:t>
+            </a:r>
+            <a:r>
+              <a:rPr lang="en-US" dirty="0" err="1"/>
+              <a:t>routerLink</a:t>
+            </a:r>
+            <a:r>
+              <a:rPr lang="en-US" dirty="0"/>
+              <a:t> would be:</a:t>
+            </a:r>
+          </a:p>
+          <a:p>
+            <a:pPr lvl="1"/>
+            <a:r>
+              <a:rPr lang="en-US" dirty="0"/>
+              <a:t>&lt;a [</a:t>
+            </a:r>
+            <a:r>
+              <a:rPr lang="en-US" dirty="0" err="1"/>
+              <a:t>routerLink</a:t>
+            </a:r>
+            <a:r>
+              <a:rPr lang="en-US" dirty="0"/>
+              <a:t>]="['/students', student().id, 'courses', course.id]"&gt;Course Details&lt;/a&gt;</a:t>
+            </a:r>
+          </a:p>
+          <a:p>
+            <a:endParaRPr lang="en-US" dirty="0"/>
+          </a:p>
+        </p:txBody>
+      </p:sp>
+      <p:pic>
+        <p:nvPicPr>
+          <p:cNvPr id="5" name="Picture 4">
+            <a:extLst>
+              <a:ext uri="{FF2B5EF4-FFF2-40B4-BE49-F238E27FC236}">
+                <a16:creationId xmlns:a16="http://schemas.microsoft.com/office/drawing/2014/main" id="{02CA780A-0CFB-4A7E-7A45-0DFA11EEBE98}"/>
+              </a:ext>
+            </a:extLst>
+          </p:cNvPr>
+          <p:cNvPicPr>
+            <a:picLocks noChangeAspect="1"/>
+          </p:cNvPicPr>
+          <p:nvPr/>
+        </p:nvPicPr>
+        <p:blipFill>
+          <a:blip r:embed="rId2"/>
+          <a:stretch>
+            <a:fillRect/>
+          </a:stretch>
+        </p:blipFill>
+        <p:spPr>
+          <a:xfrm>
+            <a:off x="6241311" y="3737270"/>
+            <a:ext cx="5504121" cy="931149"/>
+          </a:xfrm>
+          <a:prstGeom prst="rect">
+            <a:avLst/>
+          </a:prstGeom>
+        </p:spPr>
+      </p:pic>
+    </p:spTree>
+    <p:extLst>
+      <p:ext uri="{BB962C8B-B14F-4D97-AF65-F5344CB8AC3E}">
+        <p14:creationId xmlns:p14="http://schemas.microsoft.com/office/powerpoint/2010/main" val="2018211923"/>
+      </p:ext>
+    </p:extLst>
+  </p:cSld>
+  <p:clrMapOvr>
+    <a:masterClrMapping/>
+  </p:clrMapOvr>
+</p:sld>
+</file>
+
+<file path=ppt/slides/slide21.xml><?xml version="1.0" encoding="utf-8"?>
+<p:sld xmlns:a="http://schemas.openxmlformats.org/drawingml/2006/main" xmlns:r="http://schemas.openxmlformats.org/officeDocument/2006/relationships" xmlns:p="http://schemas.openxmlformats.org/presentationml/2006/main">
+  <p:cSld>
+    <p:spTree>
+      <p:nvGrpSpPr>
         <p:cNvPr id="1" name="">
           <a:extLst>
             <a:ext uri="{FF2B5EF4-FFF2-40B4-BE49-F238E27FC236}">
@@ -7637,7 +8162,7 @@
             <a:pPr lvl="1"/>
             <a:r>
               <a:rPr lang="en-US" dirty="0"/>
-              <a:t>It should use route parameter routing to dynamically populate this info </a:t>
+              <a:t>It should use route parameter, routing to dynamically populate this info </a:t>
             </a:r>
           </a:p>
         </p:txBody>
@@ -7646,6 +8171,859 @@
     <p:extLst>
       <p:ext uri="{BB962C8B-B14F-4D97-AF65-F5344CB8AC3E}">
         <p14:creationId xmlns:p14="http://schemas.microsoft.com/office/powerpoint/2010/main" val="3066534917"/>
+      </p:ext>
+    </p:extLst>
+  </p:cSld>
+  <p:clrMapOvr>
+    <a:masterClrMapping/>
+  </p:clrMapOvr>
+</p:sld>
+</file>
+
+<file path=ppt/slides/slide22.xml><?xml version="1.0" encoding="utf-8"?>
+<p:sld xmlns:a="http://schemas.openxmlformats.org/drawingml/2006/main" xmlns:r="http://schemas.openxmlformats.org/officeDocument/2006/relationships" xmlns:p="http://schemas.openxmlformats.org/presentationml/2006/main">
+  <p:cSld>
+    <p:spTree>
+      <p:nvGrpSpPr>
+        <p:cNvPr id="1" name=""/>
+        <p:cNvGrpSpPr/>
+        <p:nvPr/>
+      </p:nvGrpSpPr>
+      <p:grpSpPr>
+        <a:xfrm>
+          <a:off x="0" y="0"/>
+          <a:ext cx="0" cy="0"/>
+          <a:chOff x="0" y="0"/>
+          <a:chExt cx="0" cy="0"/>
+        </a:xfrm>
+      </p:grpSpPr>
+      <p:sp>
+        <p:nvSpPr>
+          <p:cNvPr id="2" name="Title 1">
+            <a:extLst>
+              <a:ext uri="{FF2B5EF4-FFF2-40B4-BE49-F238E27FC236}">
+                <a16:creationId xmlns:a16="http://schemas.microsoft.com/office/drawing/2014/main" id="{5FF2F184-CC13-C332-765D-D283A3A9E967}"/>
+              </a:ext>
+            </a:extLst>
+          </p:cNvPr>
+          <p:cNvSpPr>
+            <a:spLocks noGrp="1"/>
+          </p:cNvSpPr>
+          <p:nvPr>
+            <p:ph type="title"/>
+          </p:nvPr>
+        </p:nvSpPr>
+        <p:spPr/>
+        <p:txBody>
+          <a:bodyPr/>
+          <a:lstStyle/>
+          <a:p>
+            <a:r>
+              <a:rPr lang="en-US" dirty="0"/>
+              <a:t>forms</a:t>
+            </a:r>
+          </a:p>
+        </p:txBody>
+      </p:sp>
+      <p:sp>
+        <p:nvSpPr>
+          <p:cNvPr id="8" name="TextBox 7">
+            <a:extLst>
+              <a:ext uri="{FF2B5EF4-FFF2-40B4-BE49-F238E27FC236}">
+                <a16:creationId xmlns:a16="http://schemas.microsoft.com/office/drawing/2014/main" id="{D5B5D526-8783-CBF8-692E-438D0287549F}"/>
+              </a:ext>
+            </a:extLst>
+          </p:cNvPr>
+          <p:cNvSpPr txBox="1"/>
+          <p:nvPr/>
+        </p:nvSpPr>
+        <p:spPr>
+          <a:xfrm>
+            <a:off x="1225774" y="2006930"/>
+            <a:ext cx="4225644" cy="646331"/>
+          </a:xfrm>
+          <a:prstGeom prst="rect">
+            <a:avLst/>
+          </a:prstGeom>
+          <a:noFill/>
+        </p:spPr>
+        <p:txBody>
+          <a:bodyPr wrap="none" rtlCol="0">
+            <a:spAutoFit/>
+          </a:bodyPr>
+          <a:lstStyle/>
+          <a:p>
+            <a:r>
+              <a:rPr lang="en-US" dirty="0"/>
+              <a:t>We use </a:t>
+            </a:r>
+            <a:r>
+              <a:rPr lang="en-US" dirty="0" err="1"/>
+              <a:t>FormGroup</a:t>
+            </a:r>
+            <a:r>
+              <a:rPr lang="en-US" dirty="0"/>
+              <a:t> to create forms.</a:t>
+            </a:r>
+          </a:p>
+          <a:p>
+            <a:r>
+              <a:rPr lang="en-US" dirty="0"/>
+              <a:t>These changes are in home.html &amp; </a:t>
+            </a:r>
+            <a:r>
+              <a:rPr lang="en-US" dirty="0" err="1"/>
+              <a:t>home.ts</a:t>
+            </a:r>
+            <a:endParaRPr lang="en-US" dirty="0"/>
+          </a:p>
+        </p:txBody>
+      </p:sp>
+      <p:pic>
+        <p:nvPicPr>
+          <p:cNvPr id="10" name="Picture 9">
+            <a:extLst>
+              <a:ext uri="{FF2B5EF4-FFF2-40B4-BE49-F238E27FC236}">
+                <a16:creationId xmlns:a16="http://schemas.microsoft.com/office/drawing/2014/main" id="{45CE63C3-60FC-AD96-8620-176036E3CD6A}"/>
+              </a:ext>
+            </a:extLst>
+          </p:cNvPr>
+          <p:cNvPicPr>
+            <a:picLocks noChangeAspect="1"/>
+          </p:cNvPicPr>
+          <p:nvPr/>
+        </p:nvPicPr>
+        <p:blipFill>
+          <a:blip r:embed="rId2"/>
+          <a:stretch>
+            <a:fillRect/>
+          </a:stretch>
+        </p:blipFill>
+        <p:spPr>
+          <a:xfrm>
+            <a:off x="793306" y="2653261"/>
+            <a:ext cx="5090580" cy="4100068"/>
+          </a:xfrm>
+          <a:prstGeom prst="rect">
+            <a:avLst/>
+          </a:prstGeom>
+        </p:spPr>
+      </p:pic>
+      <p:pic>
+        <p:nvPicPr>
+          <p:cNvPr id="12" name="Picture 11">
+            <a:extLst>
+              <a:ext uri="{FF2B5EF4-FFF2-40B4-BE49-F238E27FC236}">
+                <a16:creationId xmlns:a16="http://schemas.microsoft.com/office/drawing/2014/main" id="{B43ADB93-CA56-EBE8-E5C1-17EB4BBD4FBE}"/>
+              </a:ext>
+            </a:extLst>
+          </p:cNvPr>
+          <p:cNvPicPr>
+            <a:picLocks noChangeAspect="1"/>
+          </p:cNvPicPr>
+          <p:nvPr/>
+        </p:nvPicPr>
+        <p:blipFill>
+          <a:blip r:embed="rId3"/>
+          <a:stretch>
+            <a:fillRect/>
+          </a:stretch>
+        </p:blipFill>
+        <p:spPr>
+          <a:xfrm>
+            <a:off x="6316354" y="28100"/>
+            <a:ext cx="4848902" cy="6801799"/>
+          </a:xfrm>
+          <a:prstGeom prst="rect">
+            <a:avLst/>
+          </a:prstGeom>
+        </p:spPr>
+      </p:pic>
+    </p:spTree>
+    <p:extLst>
+      <p:ext uri="{BB962C8B-B14F-4D97-AF65-F5344CB8AC3E}">
+        <p14:creationId xmlns:p14="http://schemas.microsoft.com/office/powerpoint/2010/main" val="1938317544"/>
+      </p:ext>
+    </p:extLst>
+  </p:cSld>
+  <p:clrMapOvr>
+    <a:masterClrMapping/>
+  </p:clrMapOvr>
+</p:sld>
+</file>
+
+<file path=ppt/slides/slide23.xml><?xml version="1.0" encoding="utf-8"?>
+<p:sld xmlns:a="http://schemas.openxmlformats.org/drawingml/2006/main" xmlns:r="http://schemas.openxmlformats.org/officeDocument/2006/relationships" xmlns:p="http://schemas.openxmlformats.org/presentationml/2006/main">
+  <p:cSld>
+    <p:spTree>
+      <p:nvGrpSpPr>
+        <p:cNvPr id="1" name=""/>
+        <p:cNvGrpSpPr/>
+        <p:nvPr/>
+      </p:nvGrpSpPr>
+      <p:grpSpPr>
+        <a:xfrm>
+          <a:off x="0" y="0"/>
+          <a:ext cx="0" cy="0"/>
+          <a:chOff x="0" y="0"/>
+          <a:chExt cx="0" cy="0"/>
+        </a:xfrm>
+      </p:grpSpPr>
+      <p:sp>
+        <p:nvSpPr>
+          <p:cNvPr id="2" name="Title 1">
+            <a:extLst>
+              <a:ext uri="{FF2B5EF4-FFF2-40B4-BE49-F238E27FC236}">
+                <a16:creationId xmlns:a16="http://schemas.microsoft.com/office/drawing/2014/main" id="{EAD428AA-3096-2C3D-0403-C58429AB668C}"/>
+              </a:ext>
+            </a:extLst>
+          </p:cNvPr>
+          <p:cNvSpPr>
+            <a:spLocks noGrp="1"/>
+          </p:cNvSpPr>
+          <p:nvPr>
+            <p:ph type="title"/>
+          </p:nvPr>
+        </p:nvSpPr>
+        <p:spPr/>
+        <p:txBody>
+          <a:bodyPr/>
+          <a:lstStyle/>
+          <a:p>
+            <a:r>
+              <a:rPr lang="en-US" dirty="0"/>
+              <a:t>Forms – our service method</a:t>
+            </a:r>
+          </a:p>
+        </p:txBody>
+      </p:sp>
+      <p:sp>
+        <p:nvSpPr>
+          <p:cNvPr id="3" name="Content Placeholder 2">
+            <a:extLst>
+              <a:ext uri="{FF2B5EF4-FFF2-40B4-BE49-F238E27FC236}">
+                <a16:creationId xmlns:a16="http://schemas.microsoft.com/office/drawing/2014/main" id="{78E8EF25-F4FF-5CBE-58B1-02CD17D108A0}"/>
+              </a:ext>
+            </a:extLst>
+          </p:cNvPr>
+          <p:cNvSpPr>
+            <a:spLocks noGrp="1"/>
+          </p:cNvSpPr>
+          <p:nvPr>
+            <p:ph idx="1"/>
+          </p:nvPr>
+        </p:nvSpPr>
+        <p:spPr>
+          <a:xfrm>
+            <a:off x="581193" y="2180496"/>
+            <a:ext cx="4976460" cy="3678303"/>
+          </a:xfrm>
+        </p:spPr>
+        <p:txBody>
+          <a:bodyPr>
+            <a:normAutofit/>
+          </a:bodyPr>
+          <a:lstStyle/>
+          <a:p>
+            <a:r>
+              <a:rPr lang="en-US" dirty="0"/>
+              <a:t>This method was added to student-</a:t>
+            </a:r>
+            <a:r>
+              <a:rPr lang="en-US" dirty="0" err="1"/>
+              <a:t>service.ts</a:t>
+            </a:r>
+            <a:endParaRPr lang="en-US" dirty="0"/>
+          </a:p>
+          <a:p>
+            <a:r>
+              <a:rPr lang="en-US" dirty="0"/>
+              <a:t>Now we can create students, and our list will dynamically populate!</a:t>
+            </a:r>
+          </a:p>
+          <a:p>
+            <a:r>
+              <a:rPr lang="en-US" dirty="0"/>
+              <a:t>There are still a few issues…. </a:t>
+            </a:r>
+          </a:p>
+          <a:p>
+            <a:pPr lvl="1"/>
+            <a:r>
+              <a:rPr lang="en-US" dirty="0"/>
+              <a:t>Clicking details for a new student won’t work</a:t>
+            </a:r>
+          </a:p>
+          <a:p>
+            <a:pPr lvl="1"/>
+            <a:r>
+              <a:rPr lang="en-US" dirty="0"/>
+              <a:t>Navigating to the ‘about’ view, and then back to ‘home’ resets the state </a:t>
+            </a:r>
+          </a:p>
+          <a:p>
+            <a:pPr lvl="1"/>
+            <a:r>
+              <a:rPr lang="en-US" dirty="0"/>
+              <a:t>Delete does not persist, even for new records not present in our service </a:t>
+            </a:r>
+          </a:p>
+        </p:txBody>
+      </p:sp>
+      <p:pic>
+        <p:nvPicPr>
+          <p:cNvPr id="7" name="Picture 6">
+            <a:extLst>
+              <a:ext uri="{FF2B5EF4-FFF2-40B4-BE49-F238E27FC236}">
+                <a16:creationId xmlns:a16="http://schemas.microsoft.com/office/drawing/2014/main" id="{E51C3CAC-CBCF-F22C-4BDE-04EED5736CDA}"/>
+              </a:ext>
+            </a:extLst>
+          </p:cNvPr>
+          <p:cNvPicPr>
+            <a:picLocks noChangeAspect="1"/>
+          </p:cNvPicPr>
+          <p:nvPr/>
+        </p:nvPicPr>
+        <p:blipFill>
+          <a:blip r:embed="rId2"/>
+          <a:stretch>
+            <a:fillRect/>
+          </a:stretch>
+        </p:blipFill>
+        <p:spPr>
+          <a:xfrm>
+            <a:off x="6119752" y="2448373"/>
+            <a:ext cx="5087060" cy="3410426"/>
+          </a:xfrm>
+          <a:prstGeom prst="rect">
+            <a:avLst/>
+          </a:prstGeom>
+        </p:spPr>
+      </p:pic>
+    </p:spTree>
+    <p:extLst>
+      <p:ext uri="{BB962C8B-B14F-4D97-AF65-F5344CB8AC3E}">
+        <p14:creationId xmlns:p14="http://schemas.microsoft.com/office/powerpoint/2010/main" val="3276332126"/>
+      </p:ext>
+    </p:extLst>
+  </p:cSld>
+  <p:clrMapOvr>
+    <a:masterClrMapping/>
+  </p:clrMapOvr>
+</p:sld>
+</file>
+
+<file path=ppt/slides/slide24.xml><?xml version="1.0" encoding="utf-8"?>
+<p:sld xmlns:a="http://schemas.openxmlformats.org/drawingml/2006/main" xmlns:r="http://schemas.openxmlformats.org/officeDocument/2006/relationships" xmlns:p="http://schemas.openxmlformats.org/presentationml/2006/main">
+  <p:cSld>
+    <p:spTree>
+      <p:nvGrpSpPr>
+        <p:cNvPr id="1" name="">
+          <a:extLst>
+            <a:ext uri="{FF2B5EF4-FFF2-40B4-BE49-F238E27FC236}">
+              <a16:creationId xmlns:a16="http://schemas.microsoft.com/office/drawing/2014/main" id="{F45289FC-4ED3-495D-677F-62A6B6D976BB}"/>
+            </a:ext>
+          </a:extLst>
+        </p:cNvPr>
+        <p:cNvGrpSpPr/>
+        <p:nvPr/>
+      </p:nvGrpSpPr>
+      <p:grpSpPr>
+        <a:xfrm>
+          <a:off x="0" y="0"/>
+          <a:ext cx="0" cy="0"/>
+          <a:chOff x="0" y="0"/>
+          <a:chExt cx="0" cy="0"/>
+        </a:xfrm>
+      </p:grpSpPr>
+      <p:sp>
+        <p:nvSpPr>
+          <p:cNvPr id="2" name="Title 1">
+            <a:extLst>
+              <a:ext uri="{FF2B5EF4-FFF2-40B4-BE49-F238E27FC236}">
+                <a16:creationId xmlns:a16="http://schemas.microsoft.com/office/drawing/2014/main" id="{46B1A1A5-04DF-92BE-6BDD-D944842AE1F5}"/>
+              </a:ext>
+            </a:extLst>
+          </p:cNvPr>
+          <p:cNvSpPr>
+            <a:spLocks noGrp="1"/>
+          </p:cNvSpPr>
+          <p:nvPr>
+            <p:ph type="title"/>
+          </p:nvPr>
+        </p:nvSpPr>
+        <p:spPr/>
+        <p:txBody>
+          <a:bodyPr>
+            <a:normAutofit/>
+          </a:bodyPr>
+          <a:lstStyle/>
+          <a:p>
+            <a:r>
+              <a:rPr lang="en-US" sz="2400" dirty="0"/>
+              <a:t>Challenge – catch-up</a:t>
+            </a:r>
+          </a:p>
+        </p:txBody>
+      </p:sp>
+      <p:sp>
+        <p:nvSpPr>
+          <p:cNvPr id="3" name="Content Placeholder 2">
+            <a:extLst>
+              <a:ext uri="{FF2B5EF4-FFF2-40B4-BE49-F238E27FC236}">
+                <a16:creationId xmlns:a16="http://schemas.microsoft.com/office/drawing/2014/main" id="{358763CA-55D4-4DDC-51EC-C29F8E6A1BDB}"/>
+              </a:ext>
+            </a:extLst>
+          </p:cNvPr>
+          <p:cNvSpPr>
+            <a:spLocks noGrp="1"/>
+          </p:cNvSpPr>
+          <p:nvPr>
+            <p:ph idx="1"/>
+          </p:nvPr>
+        </p:nvSpPr>
+        <p:spPr>
+          <a:xfrm>
+            <a:off x="581192" y="2475925"/>
+            <a:ext cx="5317584" cy="1681246"/>
+          </a:xfrm>
+        </p:spPr>
+        <p:txBody>
+          <a:bodyPr/>
+          <a:lstStyle/>
+          <a:p>
+            <a:r>
+              <a:rPr lang="en-US" dirty="0"/>
+              <a:t>Make sure to stop here and catch up</a:t>
+            </a:r>
+          </a:p>
+        </p:txBody>
+      </p:sp>
+      <p:sp>
+        <p:nvSpPr>
+          <p:cNvPr id="6" name="TextBox 5">
+            <a:extLst>
+              <a:ext uri="{FF2B5EF4-FFF2-40B4-BE49-F238E27FC236}">
+                <a16:creationId xmlns:a16="http://schemas.microsoft.com/office/drawing/2014/main" id="{679781B4-3B36-5630-7D8F-8F1A55B535C2}"/>
+              </a:ext>
+            </a:extLst>
+          </p:cNvPr>
+          <p:cNvSpPr txBox="1"/>
+          <p:nvPr/>
+        </p:nvSpPr>
+        <p:spPr>
+          <a:xfrm>
+            <a:off x="1228165" y="2402747"/>
+            <a:ext cx="756938" cy="369332"/>
+          </a:xfrm>
+          <a:prstGeom prst="rect">
+            <a:avLst/>
+          </a:prstGeom>
+          <a:noFill/>
+        </p:spPr>
+        <p:txBody>
+          <a:bodyPr wrap="none" rtlCol="0">
+            <a:spAutoFit/>
+          </a:bodyPr>
+          <a:lstStyle/>
+          <a:p>
+            <a:r>
+              <a:rPr lang="en-US" b="1" dirty="0"/>
+              <a:t>Goal:</a:t>
+            </a:r>
+          </a:p>
+        </p:txBody>
+      </p:sp>
+      <p:sp>
+        <p:nvSpPr>
+          <p:cNvPr id="7" name="TextBox 6">
+            <a:extLst>
+              <a:ext uri="{FF2B5EF4-FFF2-40B4-BE49-F238E27FC236}">
+                <a16:creationId xmlns:a16="http://schemas.microsoft.com/office/drawing/2014/main" id="{1044E4EB-3FD5-E666-393B-CB84E9B0729B}"/>
+              </a:ext>
+            </a:extLst>
+          </p:cNvPr>
+          <p:cNvSpPr txBox="1"/>
+          <p:nvPr/>
+        </p:nvSpPr>
+        <p:spPr>
+          <a:xfrm>
+            <a:off x="6949165" y="2402747"/>
+            <a:ext cx="4661643" cy="369332"/>
+          </a:xfrm>
+          <a:prstGeom prst="rect">
+            <a:avLst/>
+          </a:prstGeom>
+          <a:noFill/>
+        </p:spPr>
+        <p:txBody>
+          <a:bodyPr wrap="square" rtlCol="0">
+            <a:spAutoFit/>
+          </a:bodyPr>
+          <a:lstStyle/>
+          <a:p>
+            <a:r>
+              <a:rPr lang="en-US" b="1" dirty="0"/>
+              <a:t>Scenario:  			   5 min</a:t>
+            </a:r>
+          </a:p>
+        </p:txBody>
+      </p:sp>
+      <p:sp>
+        <p:nvSpPr>
+          <p:cNvPr id="8" name="Content Placeholder 2">
+            <a:extLst>
+              <a:ext uri="{FF2B5EF4-FFF2-40B4-BE49-F238E27FC236}">
+                <a16:creationId xmlns:a16="http://schemas.microsoft.com/office/drawing/2014/main" id="{1C563911-B263-3102-26D6-86BBCC36E4E4}"/>
+              </a:ext>
+            </a:extLst>
+          </p:cNvPr>
+          <p:cNvSpPr txBox="1">
+            <a:spLocks/>
+          </p:cNvSpPr>
+          <p:nvPr/>
+        </p:nvSpPr>
+        <p:spPr>
+          <a:xfrm>
+            <a:off x="6545749" y="2772078"/>
+            <a:ext cx="4661642" cy="3012033"/>
+          </a:xfrm>
+          <a:prstGeom prst="rect">
+            <a:avLst/>
+          </a:prstGeom>
+        </p:spPr>
+        <p:txBody>
+          <a:bodyPr vert="horz" lIns="91440" tIns="45720" rIns="91440" bIns="45720" rtlCol="0" anchor="ctr">
+            <a:normAutofit/>
+          </a:bodyPr>
+          <a:lstStyle>
+            <a:lvl1pPr marL="306000" indent="-306000" algn="l" defTabSz="457200" rtl="0" eaLnBrk="1" latinLnBrk="0" hangingPunct="1">
+              <a:spcBef>
+                <a:spcPct val="20000"/>
+              </a:spcBef>
+              <a:spcAft>
+                <a:spcPts val="600"/>
+              </a:spcAft>
+              <a:buClr>
+                <a:schemeClr val="accent2"/>
+              </a:buClr>
+              <a:buSzPct val="92000"/>
+              <a:buFont typeface="Wingdings 2" panose="05020102010507070707" pitchFamily="18" charset="2"/>
+              <a:buChar char=""/>
+              <a:defRPr sz="1800" kern="1200">
+                <a:solidFill>
+                  <a:schemeClr val="tx2"/>
+                </a:solidFill>
+                <a:latin typeface="+mn-lt"/>
+                <a:ea typeface="+mn-ea"/>
+                <a:cs typeface="+mn-cs"/>
+              </a:defRPr>
+            </a:lvl1pPr>
+            <a:lvl2pPr marL="630000" indent="-306000" algn="l" defTabSz="457200" rtl="0" eaLnBrk="1" latinLnBrk="0" hangingPunct="1">
+              <a:spcBef>
+                <a:spcPct val="20000"/>
+              </a:spcBef>
+              <a:spcAft>
+                <a:spcPts val="600"/>
+              </a:spcAft>
+              <a:buClr>
+                <a:schemeClr val="accent2"/>
+              </a:buClr>
+              <a:buSzPct val="92000"/>
+              <a:buFont typeface="Wingdings 2" panose="05020102010507070707" pitchFamily="18" charset="2"/>
+              <a:buChar char=""/>
+              <a:defRPr sz="1600" kern="1200">
+                <a:solidFill>
+                  <a:schemeClr val="tx2"/>
+                </a:solidFill>
+                <a:latin typeface="+mn-lt"/>
+                <a:ea typeface="+mn-ea"/>
+                <a:cs typeface="+mn-cs"/>
+              </a:defRPr>
+            </a:lvl2pPr>
+            <a:lvl3pPr marL="900000" indent="-270000" algn="l" defTabSz="457200" rtl="0" eaLnBrk="1" latinLnBrk="0" hangingPunct="1">
+              <a:spcBef>
+                <a:spcPct val="20000"/>
+              </a:spcBef>
+              <a:spcAft>
+                <a:spcPts val="600"/>
+              </a:spcAft>
+              <a:buClr>
+                <a:schemeClr val="accent2"/>
+              </a:buClr>
+              <a:buSzPct val="92000"/>
+              <a:buFont typeface="Wingdings 2" panose="05020102010507070707" pitchFamily="18" charset="2"/>
+              <a:buChar char=""/>
+              <a:defRPr sz="1400" kern="1200">
+                <a:solidFill>
+                  <a:schemeClr val="tx2"/>
+                </a:solidFill>
+                <a:latin typeface="+mn-lt"/>
+                <a:ea typeface="+mn-ea"/>
+                <a:cs typeface="+mn-cs"/>
+              </a:defRPr>
+            </a:lvl3pPr>
+            <a:lvl4pPr marL="1242000" indent="-234000" algn="l" defTabSz="457200" rtl="0" eaLnBrk="1" latinLnBrk="0" hangingPunct="1">
+              <a:spcBef>
+                <a:spcPct val="20000"/>
+              </a:spcBef>
+              <a:spcAft>
+                <a:spcPts val="600"/>
+              </a:spcAft>
+              <a:buClr>
+                <a:schemeClr val="accent2"/>
+              </a:buClr>
+              <a:buSzPct val="92000"/>
+              <a:buFont typeface="Wingdings 2" panose="05020102010507070707" pitchFamily="18" charset="2"/>
+              <a:buChar char=""/>
+              <a:defRPr sz="1200" kern="1200">
+                <a:solidFill>
+                  <a:schemeClr val="tx2"/>
+                </a:solidFill>
+                <a:latin typeface="+mn-lt"/>
+                <a:ea typeface="+mn-ea"/>
+                <a:cs typeface="+mn-cs"/>
+              </a:defRPr>
+            </a:lvl4pPr>
+            <a:lvl5pPr marL="1602000" indent="-234000" algn="l" defTabSz="457200" rtl="0" eaLnBrk="1" latinLnBrk="0" hangingPunct="1">
+              <a:spcBef>
+                <a:spcPct val="20000"/>
+              </a:spcBef>
+              <a:spcAft>
+                <a:spcPts val="600"/>
+              </a:spcAft>
+              <a:buClr>
+                <a:schemeClr val="accent2"/>
+              </a:buClr>
+              <a:buSzPct val="92000"/>
+              <a:buFont typeface="Wingdings 2" panose="05020102010507070707" pitchFamily="18" charset="2"/>
+              <a:buChar char=""/>
+              <a:defRPr sz="1200" kern="1200">
+                <a:solidFill>
+                  <a:schemeClr val="tx2"/>
+                </a:solidFill>
+                <a:latin typeface="+mn-lt"/>
+                <a:ea typeface="+mn-ea"/>
+                <a:cs typeface="+mn-cs"/>
+              </a:defRPr>
+            </a:lvl5pPr>
+            <a:lvl6pPr marL="1900000" indent="-228600" algn="l" defTabSz="457200" rtl="0" eaLnBrk="1" latinLnBrk="0" hangingPunct="1">
+              <a:spcBef>
+                <a:spcPct val="20000"/>
+              </a:spcBef>
+              <a:spcAft>
+                <a:spcPts val="600"/>
+              </a:spcAft>
+              <a:buClr>
+                <a:schemeClr val="accent2"/>
+              </a:buClr>
+              <a:buSzPct val="92000"/>
+              <a:buFont typeface="Wingdings 2" panose="05020102010507070707" pitchFamily="18" charset="2"/>
+              <a:buChar char=""/>
+              <a:defRPr sz="1200" kern="1200">
+                <a:solidFill>
+                  <a:schemeClr val="tx2"/>
+                </a:solidFill>
+                <a:latin typeface="+mn-lt"/>
+                <a:ea typeface="+mn-ea"/>
+                <a:cs typeface="+mn-cs"/>
+              </a:defRPr>
+            </a:lvl6pPr>
+            <a:lvl7pPr marL="2200000" indent="-228600" algn="l" defTabSz="457200" rtl="0" eaLnBrk="1" latinLnBrk="0" hangingPunct="1">
+              <a:spcBef>
+                <a:spcPct val="20000"/>
+              </a:spcBef>
+              <a:spcAft>
+                <a:spcPts val="600"/>
+              </a:spcAft>
+              <a:buClr>
+                <a:schemeClr val="accent2"/>
+              </a:buClr>
+              <a:buSzPct val="92000"/>
+              <a:buFont typeface="Wingdings 2" panose="05020102010507070707" pitchFamily="18" charset="2"/>
+              <a:buChar char=""/>
+              <a:defRPr sz="1200" kern="1200">
+                <a:solidFill>
+                  <a:schemeClr val="tx2"/>
+                </a:solidFill>
+                <a:latin typeface="+mn-lt"/>
+                <a:ea typeface="+mn-ea"/>
+                <a:cs typeface="+mn-cs"/>
+              </a:defRPr>
+            </a:lvl7pPr>
+            <a:lvl8pPr marL="2500000" indent="-228600" algn="l" defTabSz="457200" rtl="0" eaLnBrk="1" latinLnBrk="0" hangingPunct="1">
+              <a:spcBef>
+                <a:spcPct val="20000"/>
+              </a:spcBef>
+              <a:spcAft>
+                <a:spcPts val="600"/>
+              </a:spcAft>
+              <a:buClr>
+                <a:schemeClr val="accent2"/>
+              </a:buClr>
+              <a:buSzPct val="92000"/>
+              <a:buFont typeface="Wingdings 2" panose="05020102010507070707" pitchFamily="18" charset="2"/>
+              <a:buChar char=""/>
+              <a:defRPr sz="1200" kern="1200">
+                <a:solidFill>
+                  <a:schemeClr val="tx2"/>
+                </a:solidFill>
+                <a:latin typeface="+mn-lt"/>
+                <a:ea typeface="+mn-ea"/>
+                <a:cs typeface="+mn-cs"/>
+              </a:defRPr>
+            </a:lvl8pPr>
+            <a:lvl9pPr marL="2800000" indent="-228600" algn="l" defTabSz="457200" rtl="0" eaLnBrk="1" latinLnBrk="0" hangingPunct="1">
+              <a:spcBef>
+                <a:spcPct val="20000"/>
+              </a:spcBef>
+              <a:spcAft>
+                <a:spcPts val="600"/>
+              </a:spcAft>
+              <a:buClr>
+                <a:schemeClr val="accent2"/>
+              </a:buClr>
+              <a:buSzPct val="92000"/>
+              <a:buFont typeface="Wingdings 2" panose="05020102010507070707" pitchFamily="18" charset="2"/>
+              <a:buChar char=""/>
+              <a:defRPr sz="1200" kern="1200">
+                <a:solidFill>
+                  <a:schemeClr val="tx2"/>
+                </a:solidFill>
+                <a:latin typeface="+mn-lt"/>
+                <a:ea typeface="+mn-ea"/>
+                <a:cs typeface="+mn-cs"/>
+              </a:defRPr>
+            </a:lvl9pPr>
+          </a:lstStyle>
+          <a:p>
+            <a:r>
+              <a:rPr lang="en-US" dirty="0"/>
+              <a:t>Implement a feature to create new students with a form</a:t>
+            </a:r>
+          </a:p>
+          <a:p>
+            <a:r>
+              <a:rPr lang="en-US" dirty="0"/>
+              <a:t>Our app does NOT need to be pretty at this stage, we are just worried about functionality and grasping basics </a:t>
+            </a:r>
+          </a:p>
+        </p:txBody>
+      </p:sp>
+      <p:pic>
+        <p:nvPicPr>
+          <p:cNvPr id="5" name="Picture 4">
+            <a:extLst>
+              <a:ext uri="{FF2B5EF4-FFF2-40B4-BE49-F238E27FC236}">
+                <a16:creationId xmlns:a16="http://schemas.microsoft.com/office/drawing/2014/main" id="{9E9456BD-2B62-1658-F6C2-B4F4D025506C}"/>
+              </a:ext>
+            </a:extLst>
+          </p:cNvPr>
+          <p:cNvPicPr>
+            <a:picLocks noChangeAspect="1"/>
+          </p:cNvPicPr>
+          <p:nvPr/>
+        </p:nvPicPr>
+        <p:blipFill>
+          <a:blip r:embed="rId2"/>
+          <a:stretch>
+            <a:fillRect/>
+          </a:stretch>
+        </p:blipFill>
+        <p:spPr>
+          <a:xfrm>
+            <a:off x="715548" y="3532048"/>
+            <a:ext cx="4658061" cy="3224151"/>
+          </a:xfrm>
+          <a:prstGeom prst="rect">
+            <a:avLst/>
+          </a:prstGeom>
+        </p:spPr>
+      </p:pic>
+    </p:spTree>
+    <p:extLst>
+      <p:ext uri="{BB962C8B-B14F-4D97-AF65-F5344CB8AC3E}">
+        <p14:creationId xmlns:p14="http://schemas.microsoft.com/office/powerpoint/2010/main" val="3609098665"/>
+      </p:ext>
+    </p:extLst>
+  </p:cSld>
+  <p:clrMapOvr>
+    <a:masterClrMapping/>
+  </p:clrMapOvr>
+</p:sld>
+</file>
+
+<file path=ppt/slides/slide25.xml><?xml version="1.0" encoding="utf-8"?>
+<p:sld xmlns:a="http://schemas.openxmlformats.org/drawingml/2006/main" xmlns:r="http://schemas.openxmlformats.org/officeDocument/2006/relationships" xmlns:p="http://schemas.openxmlformats.org/presentationml/2006/main">
+  <p:cSld>
+    <p:spTree>
+      <p:nvGrpSpPr>
+        <p:cNvPr id="1" name=""/>
+        <p:cNvGrpSpPr/>
+        <p:nvPr/>
+      </p:nvGrpSpPr>
+      <p:grpSpPr>
+        <a:xfrm>
+          <a:off x="0" y="0"/>
+          <a:ext cx="0" cy="0"/>
+          <a:chOff x="0" y="0"/>
+          <a:chExt cx="0" cy="0"/>
+        </a:xfrm>
+      </p:grpSpPr>
+      <p:sp>
+        <p:nvSpPr>
+          <p:cNvPr id="2" name="Title 1">
+            <a:extLst>
+              <a:ext uri="{FF2B5EF4-FFF2-40B4-BE49-F238E27FC236}">
+                <a16:creationId xmlns:a16="http://schemas.microsoft.com/office/drawing/2014/main" id="{EEA7876D-A0BA-495F-FB75-EDE29F4286BF}"/>
+              </a:ext>
+            </a:extLst>
+          </p:cNvPr>
+          <p:cNvSpPr>
+            <a:spLocks noGrp="1"/>
+          </p:cNvSpPr>
+          <p:nvPr>
+            <p:ph type="title"/>
+          </p:nvPr>
+        </p:nvSpPr>
+        <p:spPr/>
+        <p:txBody>
+          <a:bodyPr/>
+          <a:lstStyle/>
+          <a:p>
+            <a:endParaRPr lang="en-US"/>
+          </a:p>
+        </p:txBody>
+      </p:sp>
+      <p:sp>
+        <p:nvSpPr>
+          <p:cNvPr id="3" name="Content Placeholder 2">
+            <a:extLst>
+              <a:ext uri="{FF2B5EF4-FFF2-40B4-BE49-F238E27FC236}">
+                <a16:creationId xmlns:a16="http://schemas.microsoft.com/office/drawing/2014/main" id="{0702011F-0D74-69DF-65CB-08EEAFDB4D5A}"/>
+              </a:ext>
+            </a:extLst>
+          </p:cNvPr>
+          <p:cNvSpPr>
+            <a:spLocks noGrp="1"/>
+          </p:cNvSpPr>
+          <p:nvPr>
+            <p:ph idx="1"/>
+          </p:nvPr>
+        </p:nvSpPr>
+        <p:spPr/>
+        <p:txBody>
+          <a:bodyPr/>
+          <a:lstStyle/>
+          <a:p>
+            <a:endParaRPr lang="en-US"/>
+          </a:p>
+        </p:txBody>
+      </p:sp>
+    </p:spTree>
+    <p:extLst>
+      <p:ext uri="{BB962C8B-B14F-4D97-AF65-F5344CB8AC3E}">
+        <p14:creationId xmlns:p14="http://schemas.microsoft.com/office/powerpoint/2010/main" val="280156339"/>
       </p:ext>
     </p:extLst>
   </p:cSld>
